--- a/sales/markgate-agent-deck.pptx
+++ b/sales/markgate-agent-deck.pptx
@@ -3245,7 +3245,7 @@
               </a:lnSpc>
             </a:pPr>
             <a:r>
-              <a:rPr sz="1050" b="0" spc="400">
+              <a:rPr sz="1240" b="0" spc="400">
                 <a:solidFill>
                   <a:srgbClr val="E2C88A"/>
                 </a:solidFill>
@@ -3285,7 +3285,7 @@
               </a:lnSpc>
             </a:pPr>
             <a:r>
-              <a:rPr sz="3300" b="1">
+              <a:rPr sz="3890" b="1">
                 <a:solidFill>
                   <a:srgbClr val="FFFFFF"/>
                 </a:solidFill>
@@ -3302,7 +3302,7 @@
               </a:lnSpc>
             </a:pPr>
             <a:r>
-              <a:rPr sz="3300" b="1">
+              <a:rPr sz="3890" b="1">
                 <a:solidFill>
                   <a:srgbClr val="E2C88A"/>
                 </a:solidFill>
@@ -3312,7 +3312,7 @@
               <a:t>“指名される”</a:t>
             </a:r>
             <a:r>
-              <a:rPr sz="3300" b="1">
+              <a:rPr sz="3890" b="1">
                 <a:solidFill>
                   <a:srgbClr val="FFFFFF"/>
                 </a:solidFill>
@@ -3352,7 +3352,7 @@
               </a:lnSpc>
             </a:pPr>
             <a:r>
-              <a:rPr sz="1150" b="0">
+              <a:rPr sz="1360" b="0">
                 <a:solidFill>
                   <a:srgbClr val="D5D9E2"/>
                 </a:solidFill>
@@ -3369,7 +3369,7 @@
               </a:lnSpc>
             </a:pPr>
             <a:r>
-              <a:rPr sz="1150" b="0">
+              <a:rPr sz="1360" b="0">
                 <a:solidFill>
                   <a:srgbClr val="D5D9E2"/>
                 </a:solidFill>
@@ -3409,7 +3409,7 @@
               </a:lnSpc>
             </a:pPr>
             <a:r>
-              <a:rPr sz="1400" b="1">
+              <a:rPr sz="1650" b="1">
                 <a:solidFill>
                   <a:srgbClr val="FFFFFF"/>
                 </a:solidFill>
@@ -3419,7 +3419,7 @@
               <a:t>MarkGate</a:t>
             </a:r>
             <a:r>
-              <a:rPr sz="900" b="0">
+              <a:rPr sz="1060" b="0">
                 <a:solidFill>
                   <a:srgbClr val="C6A15B"/>
                 </a:solidFill>
@@ -3429,7 +3429,7 @@
               <a:t>　／　</a:t>
             </a:r>
             <a:r>
-              <a:rPr sz="900" b="0" spc="100">
+              <a:rPr sz="1060" b="0" spc="100">
                 <a:solidFill>
                   <a:srgbClr val="B9BFCC"/>
                 </a:solidFill>
@@ -3439,7 +3439,7 @@
               <a:t>MarkGate株式会社</a:t>
             </a:r>
             <a:r>
-              <a:rPr sz="900" b="0">
+              <a:rPr sz="1060" b="0">
                 <a:solidFill>
                   <a:srgbClr val="C6A15B"/>
                 </a:solidFill>
@@ -3449,7 +3449,7 @@
               <a:t>　／　</a:t>
             </a:r>
             <a:r>
-              <a:rPr sz="900" b="0" spc="100">
+              <a:rPr sz="1060" b="0" spc="100">
                 <a:solidFill>
                   <a:srgbClr val="B9BFCC"/>
                 </a:solidFill>
@@ -3551,7 +3551,7 @@
               </a:lnSpc>
             </a:pPr>
             <a:r>
-              <a:rPr sz="1700" b="0">
+              <a:rPr sz="2010" b="0">
                 <a:solidFill>
                   <a:srgbClr val="C6A15B"/>
                 </a:solidFill>
@@ -3591,7 +3591,7 @@
               </a:lnSpc>
             </a:pPr>
             <a:r>
-              <a:rPr sz="750" b="0" spc="300">
+              <a:rPr sz="880" b="0" spc="300">
                 <a:solidFill>
                   <a:srgbClr val="7A6030"/>
                 </a:solidFill>
@@ -3612,7 +3612,7 @@
         <p:spPr>
           <a:xfrm>
             <a:off x="684000" y="792000"/>
-            <a:ext cx="9324000" cy="432000"/>
+            <a:ext cx="9324000" cy="504000"/>
           </a:xfrm>
           <a:prstGeom prst="rect">
             <a:avLst/>
@@ -3631,7 +3631,7 @@
               </a:lnSpc>
             </a:pPr>
             <a:r>
-              <a:rPr sz="2200" b="1">
+              <a:rPr sz="2600" b="1">
                 <a:solidFill>
                   <a:srgbClr val="1A1D29"/>
                 </a:solidFill>
@@ -3641,7 +3641,7 @@
               <a:t>プロフィールが、エースの</a:t>
             </a:r>
             <a:r>
-              <a:rPr sz="2200" b="1">
+              <a:rPr sz="2600" b="1">
                 <a:solidFill>
                   <a:srgbClr val="7A6030"/>
                 </a:solidFill>
@@ -3651,7 +3651,7 @@
               <a:t>“指名される窓口”</a:t>
             </a:r>
             <a:r>
-              <a:rPr sz="2200" b="1">
+              <a:rPr sz="2600" b="1">
                 <a:solidFill>
                   <a:srgbClr val="1A1D29"/>
                 </a:solidFill>
@@ -3671,7 +3671,7 @@
         </p:nvSpPr>
         <p:spPr>
           <a:xfrm>
-            <a:off x="684000" y="1296000"/>
+            <a:off x="684000" y="1368000"/>
             <a:ext cx="504000" cy="25200"/>
           </a:xfrm>
           <a:prstGeom prst="rect">
@@ -3715,7 +3715,7 @@
         </p:nvSpPr>
         <p:spPr>
           <a:xfrm>
-            <a:off x="684000" y="1728000"/>
+            <a:off x="684000" y="1800000"/>
             <a:ext cx="4248000" cy="3240000"/>
           </a:xfrm>
           <a:prstGeom prst="rect">
@@ -3738,7 +3738,7 @@
               </a:spcAft>
             </a:pPr>
             <a:r>
-              <a:rPr sz="950" b="0">
+              <a:rPr sz="1120" b="0">
                 <a:solidFill>
                   <a:srgbClr val="7A6030"/>
                 </a:solidFill>
@@ -3748,7 +3748,7 @@
               <a:t>－ </a:t>
             </a:r>
             <a:r>
-              <a:rPr sz="950" b="1">
+              <a:rPr sz="1120" b="1">
                 <a:solidFill>
                   <a:srgbClr val="1A1D29"/>
                 </a:solidFill>
@@ -3758,7 +3758,7 @@
               <a:t>経歴・支援実績</a:t>
             </a:r>
             <a:r>
-              <a:rPr sz="950" b="0">
+              <a:rPr sz="1120" b="0">
                 <a:solidFill>
                   <a:srgbClr val="3A3F4D"/>
                 </a:solidFill>
@@ -3778,7 +3778,7 @@
               </a:spcAft>
             </a:pPr>
             <a:r>
-              <a:rPr sz="950" b="0">
+              <a:rPr sz="1120" b="0">
                 <a:solidFill>
                   <a:srgbClr val="7A6030"/>
                 </a:solidFill>
@@ -3788,7 +3788,7 @@
               <a:t>－ </a:t>
             </a:r>
             <a:r>
-              <a:rPr sz="950" b="1">
+              <a:rPr sz="1120" b="1">
                 <a:solidFill>
                   <a:srgbClr val="1A1D29"/>
                 </a:solidFill>
@@ -3798,7 +3798,7 @@
               <a:t>専門領域（業界／職種／対応年収帯）</a:t>
             </a:r>
             <a:r>
-              <a:rPr sz="950" b="0">
+              <a:rPr sz="1120" b="0">
                 <a:solidFill>
                   <a:srgbClr val="3A3F4D"/>
                 </a:solidFill>
@@ -3818,7 +3818,7 @@
               </a:spcAft>
             </a:pPr>
             <a:r>
-              <a:rPr sz="950" b="0">
+              <a:rPr sz="1120" b="0">
                 <a:solidFill>
                   <a:srgbClr val="7A6030"/>
                 </a:solidFill>
@@ -3828,7 +3828,7 @@
               <a:t>－ </a:t>
             </a:r>
             <a:r>
-              <a:rPr sz="950" b="1">
+              <a:rPr sz="1120" b="1">
                 <a:solidFill>
                   <a:srgbClr val="1A1D29"/>
                 </a:solidFill>
@@ -3838,7 +3838,7 @@
               <a:t>支援スタンス</a:t>
             </a:r>
             <a:r>
-              <a:rPr sz="950" b="0">
+              <a:rPr sz="1120" b="0">
                 <a:solidFill>
                   <a:srgbClr val="3A3F4D"/>
                 </a:solidFill>
@@ -3858,7 +3858,7 @@
               </a:spcAft>
             </a:pPr>
             <a:r>
-              <a:rPr sz="950" b="0">
+              <a:rPr sz="1120" b="0">
                 <a:solidFill>
                   <a:srgbClr val="7A6030"/>
                 </a:solidFill>
@@ -3868,7 +3868,7 @@
               <a:t>－ </a:t>
             </a:r>
             <a:r>
-              <a:rPr sz="950" b="1">
+              <a:rPr sz="1120" b="1">
                 <a:solidFill>
                   <a:srgbClr val="1A1D29"/>
                 </a:solidFill>
@@ -3878,7 +3878,7 @@
               <a:t>指名にはメッセージが添付</a:t>
             </a:r>
             <a:r>
-              <a:rPr sz="950" b="0">
+              <a:rPr sz="1120" b="0">
                 <a:solidFill>
                   <a:srgbClr val="3A3F4D"/>
                 </a:solidFill>
@@ -3898,7 +3898,7 @@
               </a:spcAft>
             </a:pPr>
             <a:r>
-              <a:rPr sz="950" b="0">
+              <a:rPr sz="1120" b="0">
                 <a:solidFill>
                   <a:srgbClr val="7A6030"/>
                 </a:solidFill>
@@ -3908,7 +3908,7 @@
               <a:t>－ </a:t>
             </a:r>
             <a:r>
-              <a:rPr sz="950" b="1">
+              <a:rPr sz="1120" b="1">
                 <a:solidFill>
                   <a:srgbClr val="1A1D29"/>
                 </a:solidFill>
@@ -3918,7 +3918,7 @@
               <a:t>プロフィールは掲載後も更新可能</a:t>
             </a:r>
             <a:r>
-              <a:rPr sz="950" b="0">
+              <a:rPr sz="1120" b="0">
                 <a:solidFill>
                   <a:srgbClr val="3A3F4D"/>
                 </a:solidFill>
@@ -3938,7 +3938,7 @@
         </p:nvSpPr>
         <p:spPr>
           <a:xfrm>
-            <a:off x="5400000" y="1620000"/>
+            <a:off x="5400000" y="1692000"/>
             <a:ext cx="4608000" cy="3312000"/>
           </a:xfrm>
           <a:prstGeom prst="rect">
@@ -3984,7 +3984,7 @@
         </p:nvSpPr>
         <p:spPr>
           <a:xfrm>
-            <a:off x="5652000" y="1836000"/>
+            <a:off x="5652000" y="1908000"/>
             <a:ext cx="540000" cy="540000"/>
           </a:xfrm>
           <a:prstGeom prst="ellipse">
@@ -4028,7 +4028,7 @@
         </p:nvSpPr>
         <p:spPr>
           <a:xfrm>
-            <a:off x="5652000" y="1962000"/>
+            <a:off x="5652000" y="2034000"/>
             <a:ext cx="540000" cy="288000"/>
           </a:xfrm>
           <a:prstGeom prst="rect">
@@ -4048,7 +4048,7 @@
               </a:lnSpc>
             </a:pPr>
             <a:r>
-              <a:rPr sz="1300" b="0">
+              <a:rPr sz="1530" b="0">
                 <a:solidFill>
                   <a:srgbClr val="E2C88A"/>
                 </a:solidFill>
@@ -4068,7 +4068,7 @@
         </p:nvSpPr>
         <p:spPr>
           <a:xfrm>
-            <a:off x="6336000" y="1818000"/>
+            <a:off x="6336000" y="1890000"/>
             <a:ext cx="3420000" cy="648000"/>
           </a:xfrm>
           <a:prstGeom prst="rect">
@@ -4091,7 +4091,7 @@
               </a:spcAft>
             </a:pPr>
             <a:r>
-              <a:rPr sz="1150" b="1">
+              <a:rPr sz="1360" b="1">
                 <a:solidFill>
                   <a:srgbClr val="1A1D29"/>
                 </a:solidFill>
@@ -4111,7 +4111,7 @@
               </a:spcAft>
             </a:pPr>
             <a:r>
-              <a:rPr sz="750" b="0">
+              <a:rPr sz="880" b="0">
                 <a:solidFill>
                   <a:srgbClr val="5F6672"/>
                 </a:solidFill>
@@ -4128,7 +4128,7 @@
               </a:lnSpc>
             </a:pPr>
             <a:r>
-              <a:rPr sz="700" b="0">
+              <a:rPr sz="830" b="0">
                 <a:solidFill>
                   <a:srgbClr val="7A6030"/>
                 </a:solidFill>
@@ -4138,7 +4138,7 @@
               <a:t> 審査通過 </a:t>
             </a:r>
             <a:r>
-              <a:rPr sz="700" b="0">
+              <a:rPr sz="830" b="0">
                 <a:solidFill>
                   <a:srgbClr val="1A1D29"/>
                 </a:solidFill>
@@ -4148,7 +4148,7 @@
               <a:t>　</a:t>
             </a:r>
             <a:r>
-              <a:rPr sz="700" b="0">
+              <a:rPr sz="830" b="0">
                 <a:solidFill>
                   <a:srgbClr val="7A6030"/>
                 </a:solidFill>
@@ -4158,7 +4158,7 @@
               <a:t> 経営幹部・CxO </a:t>
             </a:r>
             <a:r>
-              <a:rPr sz="700" b="0">
+              <a:rPr sz="830" b="0">
                 <a:solidFill>
                   <a:srgbClr val="1A1D29"/>
                 </a:solidFill>
@@ -4168,7 +4168,7 @@
               <a:t>　</a:t>
             </a:r>
             <a:r>
-              <a:rPr sz="700" b="0">
+              <a:rPr sz="830" b="0">
                 <a:solidFill>
                   <a:srgbClr val="7A6030"/>
                 </a:solidFill>
@@ -4188,7 +4188,7 @@
         </p:nvSpPr>
         <p:spPr>
           <a:xfrm>
-            <a:off x="5652000" y="2520000"/>
+            <a:off x="5652000" y="2592000"/>
             <a:ext cx="4104000" cy="14400"/>
           </a:xfrm>
           <a:prstGeom prst="rect">
@@ -4232,7 +4232,7 @@
         </p:nvSpPr>
         <p:spPr>
           <a:xfrm>
-            <a:off x="5652000" y="2664000"/>
+            <a:off x="5652000" y="2736000"/>
             <a:ext cx="936000" cy="216000"/>
           </a:xfrm>
           <a:prstGeom prst="rect">
@@ -4252,7 +4252,7 @@
               </a:lnSpc>
             </a:pPr>
             <a:r>
-              <a:rPr sz="800" b="0">
+              <a:rPr sz="940" b="0">
                 <a:solidFill>
                   <a:srgbClr val="5F6672"/>
                 </a:solidFill>
@@ -4272,7 +4272,7 @@
         </p:nvSpPr>
         <p:spPr>
           <a:xfrm>
-            <a:off x="6660000" y="2664000"/>
+            <a:off x="6660000" y="2736000"/>
             <a:ext cx="3096000" cy="216000"/>
           </a:xfrm>
           <a:prstGeom prst="rect">
@@ -4292,7 +4292,7 @@
               </a:lnSpc>
             </a:pPr>
             <a:r>
-              <a:rPr sz="800" b="0">
+              <a:rPr sz="940" b="0">
                 <a:solidFill>
                   <a:srgbClr val="1A1D29"/>
                 </a:solidFill>
@@ -4312,7 +4312,7 @@
         </p:nvSpPr>
         <p:spPr>
           <a:xfrm>
-            <a:off x="5652000" y="2970000"/>
+            <a:off x="5652000" y="3042000"/>
             <a:ext cx="936000" cy="216000"/>
           </a:xfrm>
           <a:prstGeom prst="rect">
@@ -4332,7 +4332,7 @@
               </a:lnSpc>
             </a:pPr>
             <a:r>
-              <a:rPr sz="800" b="0">
+              <a:rPr sz="940" b="0">
                 <a:solidFill>
                   <a:srgbClr val="5F6672"/>
                 </a:solidFill>
@@ -4352,7 +4352,7 @@
         </p:nvSpPr>
         <p:spPr>
           <a:xfrm>
-            <a:off x="6660000" y="2970000"/>
+            <a:off x="6660000" y="3042000"/>
             <a:ext cx="3096000" cy="216000"/>
           </a:xfrm>
           <a:prstGeom prst="rect">
@@ -4372,7 +4372,7 @@
               </a:lnSpc>
             </a:pPr>
             <a:r>
-              <a:rPr sz="800" b="0">
+              <a:rPr sz="940" b="0">
                 <a:solidFill>
                   <a:srgbClr val="1A1D29"/>
                 </a:solidFill>
@@ -4392,7 +4392,7 @@
         </p:nvSpPr>
         <p:spPr>
           <a:xfrm>
-            <a:off x="5652000" y="3276000"/>
+            <a:off x="5652000" y="3348000"/>
             <a:ext cx="936000" cy="216000"/>
           </a:xfrm>
           <a:prstGeom prst="rect">
@@ -4412,7 +4412,7 @@
               </a:lnSpc>
             </a:pPr>
             <a:r>
-              <a:rPr sz="800" b="0">
+              <a:rPr sz="940" b="0">
                 <a:solidFill>
                   <a:srgbClr val="5F6672"/>
                 </a:solidFill>
@@ -4432,7 +4432,7 @@
         </p:nvSpPr>
         <p:spPr>
           <a:xfrm>
-            <a:off x="6660000" y="3276000"/>
+            <a:off x="6660000" y="3348000"/>
             <a:ext cx="3096000" cy="216000"/>
           </a:xfrm>
           <a:prstGeom prst="rect">
@@ -4452,7 +4452,7 @@
               </a:lnSpc>
             </a:pPr>
             <a:r>
-              <a:rPr sz="800" b="0">
+              <a:rPr sz="940" b="0">
                 <a:solidFill>
                   <a:srgbClr val="1A1D29"/>
                 </a:solidFill>
@@ -4472,7 +4472,7 @@
         </p:nvSpPr>
         <p:spPr>
           <a:xfrm>
-            <a:off x="5652000" y="3582000"/>
+            <a:off x="5652000" y="3654000"/>
             <a:ext cx="936000" cy="216000"/>
           </a:xfrm>
           <a:prstGeom prst="rect">
@@ -4492,7 +4492,7 @@
               </a:lnSpc>
             </a:pPr>
             <a:r>
-              <a:rPr sz="800" b="0">
+              <a:rPr sz="940" b="0">
                 <a:solidFill>
                   <a:srgbClr val="5F6672"/>
                 </a:solidFill>
@@ -4512,7 +4512,7 @@
         </p:nvSpPr>
         <p:spPr>
           <a:xfrm>
-            <a:off x="6660000" y="3582000"/>
+            <a:off x="6660000" y="3654000"/>
             <a:ext cx="3096000" cy="216000"/>
           </a:xfrm>
           <a:prstGeom prst="rect">
@@ -4532,7 +4532,7 @@
               </a:lnSpc>
             </a:pPr>
             <a:r>
-              <a:rPr sz="800" b="0">
+              <a:rPr sz="940" b="0">
                 <a:solidFill>
                   <a:srgbClr val="1A1D29"/>
                 </a:solidFill>
@@ -4552,7 +4552,7 @@
         </p:nvSpPr>
         <p:spPr>
           <a:xfrm>
-            <a:off x="5652000" y="3960000"/>
+            <a:off x="5652000" y="4032000"/>
             <a:ext cx="4104000" cy="324000"/>
           </a:xfrm>
           <a:prstGeom prst="rect">
@@ -4596,7 +4596,7 @@
         </p:nvSpPr>
         <p:spPr>
           <a:xfrm>
-            <a:off x="5652000" y="4039200"/>
+            <a:off x="5652000" y="4111200"/>
             <a:ext cx="4104000" cy="180000"/>
           </a:xfrm>
           <a:prstGeom prst="rect">
@@ -4616,7 +4616,7 @@
               </a:lnSpc>
             </a:pPr>
             <a:r>
-              <a:rPr sz="850" b="1" spc="150">
+              <a:rPr sz="1000" b="1" spc="150">
                 <a:solidFill>
                   <a:srgbClr val="0A0E1A"/>
                 </a:solidFill>
@@ -4636,7 +4636,7 @@
         </p:nvSpPr>
         <p:spPr>
           <a:xfrm>
-            <a:off x="684000" y="5112000"/>
+            <a:off x="684000" y="5184000"/>
             <a:ext cx="9324000" cy="216000"/>
           </a:xfrm>
           <a:prstGeom prst="rect">
@@ -4656,7 +4656,7 @@
               </a:lnSpc>
             </a:pPr>
             <a:r>
-              <a:rPr sz="750" b="0">
+              <a:rPr sz="880" b="0">
                 <a:solidFill>
                   <a:srgbClr val="5F6672"/>
                 </a:solidFill>
@@ -4696,7 +4696,7 @@
               </a:lnSpc>
             </a:pPr>
             <a:r>
-              <a:rPr sz="900" b="1">
+              <a:rPr sz="1060" b="1">
                 <a:solidFill>
                   <a:srgbClr val="7A6030"/>
                 </a:solidFill>
@@ -4706,7 +4706,7 @@
               <a:t>MarkGate</a:t>
             </a:r>
             <a:r>
-              <a:rPr sz="700" b="0">
+              <a:rPr sz="830" b="0">
                 <a:solidFill>
                   <a:srgbClr val="5F6672"/>
                 </a:solidFill>
@@ -4746,7 +4746,7 @@
               </a:lnSpc>
             </a:pPr>
             <a:r>
-              <a:rPr sz="900" b="0" spc="100">
+              <a:rPr sz="1060" b="0" spc="100">
                 <a:solidFill>
                   <a:srgbClr val="5F6672"/>
                 </a:solidFill>
@@ -4848,7 +4848,7 @@
               </a:lnSpc>
             </a:pPr>
             <a:r>
-              <a:rPr sz="1700" b="0">
+              <a:rPr sz="2010" b="0">
                 <a:solidFill>
                   <a:srgbClr val="C6A15B"/>
                 </a:solidFill>
@@ -4888,7 +4888,7 @@
               </a:lnSpc>
             </a:pPr>
             <a:r>
-              <a:rPr sz="750" b="0" spc="300">
+              <a:rPr sz="880" b="0" spc="300">
                 <a:solidFill>
                   <a:srgbClr val="7A6030"/>
                 </a:solidFill>
@@ -4909,7 +4909,7 @@
         <p:spPr>
           <a:xfrm>
             <a:off x="684000" y="792000"/>
-            <a:ext cx="9324000" cy="432000"/>
+            <a:ext cx="9324000" cy="504000"/>
           </a:xfrm>
           <a:prstGeom prst="rect">
             <a:avLst/>
@@ -4928,7 +4928,7 @@
               </a:lnSpc>
             </a:pPr>
             <a:r>
-              <a:rPr sz="2200" b="1">
+              <a:rPr sz="2600" b="1">
                 <a:solidFill>
                   <a:srgbClr val="1A1D29"/>
                 </a:solidFill>
@@ -4948,8 +4948,8 @@
         </p:nvSpPr>
         <p:spPr>
           <a:xfrm>
-            <a:off x="684000" y="1260000"/>
-            <a:ext cx="9000000" cy="360000"/>
+            <a:off x="684000" y="1332000"/>
+            <a:ext cx="9180000" cy="504000"/>
           </a:xfrm>
           <a:prstGeom prst="rect">
             <a:avLst/>
@@ -4968,7 +4968,7 @@
               </a:lnSpc>
             </a:pPr>
             <a:r>
-              <a:rPr sz="1000" b="0">
+              <a:rPr sz="1180" b="0">
                 <a:solidFill>
                   <a:srgbClr val="3A3F4D"/>
                 </a:solidFill>
@@ -4988,7 +4988,7 @@
         </p:nvSpPr>
         <p:spPr>
           <a:xfrm>
-            <a:off x="684000" y="1656000"/>
+            <a:off x="684000" y="1908000"/>
             <a:ext cx="504000" cy="25200"/>
           </a:xfrm>
           <a:prstGeom prst="rect">
@@ -5032,7 +5032,7 @@
         </p:nvSpPr>
         <p:spPr>
           <a:xfrm>
-            <a:off x="684000" y="2016000"/>
+            <a:off x="684000" y="2268000"/>
             <a:ext cx="2962800" cy="2232000"/>
           </a:xfrm>
           <a:prstGeom prst="rect">
@@ -5078,7 +5078,7 @@
         </p:nvSpPr>
         <p:spPr>
           <a:xfrm>
-            <a:off x="900000" y="2304000"/>
+            <a:off x="900000" y="2556000"/>
             <a:ext cx="2530800" cy="1728000"/>
           </a:xfrm>
           <a:prstGeom prst="rect">
@@ -5101,7 +5101,7 @@
               </a:spcAft>
             </a:pPr>
             <a:r>
-              <a:rPr sz="850" b="0" spc="150">
+              <a:rPr sz="1000" b="0" spc="150">
                 <a:solidFill>
                   <a:srgbClr val="7A6030"/>
                 </a:solidFill>
@@ -5121,7 +5121,7 @@
               </a:spcAft>
             </a:pPr>
             <a:r>
-              <a:rPr sz="2400" b="1">
+              <a:rPr sz="2830" b="1">
                 <a:solidFill>
                   <a:srgbClr val="1A1D29"/>
                 </a:solidFill>
@@ -5131,7 +5131,7 @@
               <a:t>0</a:t>
             </a:r>
             <a:r>
-              <a:rPr sz="1100" b="0">
+              <a:rPr sz="1300" b="0">
                 <a:solidFill>
                   <a:srgbClr val="3A3F4D"/>
                 </a:solidFill>
@@ -5148,7 +5148,7 @@
               </a:lnSpc>
             </a:pPr>
             <a:r>
-              <a:rPr sz="850" b="0">
+              <a:rPr sz="1000" b="0">
                 <a:solidFill>
                   <a:srgbClr val="3A3F4D"/>
                 </a:solidFill>
@@ -5168,7 +5168,7 @@
         </p:nvSpPr>
         <p:spPr>
           <a:xfrm>
-            <a:off x="3862800" y="2016000"/>
+            <a:off x="3862800" y="2268000"/>
             <a:ext cx="2962800" cy="2232000"/>
           </a:xfrm>
           <a:prstGeom prst="rect">
@@ -5214,7 +5214,7 @@
         </p:nvSpPr>
         <p:spPr>
           <a:xfrm>
-            <a:off x="4078800" y="2304000"/>
+            <a:off x="4078800" y="2556000"/>
             <a:ext cx="2530800" cy="1728000"/>
           </a:xfrm>
           <a:prstGeom prst="rect">
@@ -5237,7 +5237,7 @@
               </a:spcAft>
             </a:pPr>
             <a:r>
-              <a:rPr sz="850" b="0" spc="150">
+              <a:rPr sz="1000" b="0" spc="150">
                 <a:solidFill>
                   <a:srgbClr val="7A6030"/>
                 </a:solidFill>
@@ -5257,7 +5257,7 @@
               </a:spcAft>
             </a:pPr>
             <a:r>
-              <a:rPr sz="2400" b="1">
+              <a:rPr sz="2830" b="1">
                 <a:solidFill>
                   <a:srgbClr val="1A1D29"/>
                 </a:solidFill>
@@ -5267,7 +5267,7 @@
               <a:t>0</a:t>
             </a:r>
             <a:r>
-              <a:rPr sz="1100" b="0">
+              <a:rPr sz="1300" b="0">
                 <a:solidFill>
                   <a:srgbClr val="3A3F4D"/>
                 </a:solidFill>
@@ -5284,7 +5284,7 @@
               </a:lnSpc>
             </a:pPr>
             <a:r>
-              <a:rPr sz="850" b="0">
+              <a:rPr sz="1000" b="0">
                 <a:solidFill>
                   <a:srgbClr val="3A3F4D"/>
                 </a:solidFill>
@@ -5304,7 +5304,7 @@
         </p:nvSpPr>
         <p:spPr>
           <a:xfrm>
-            <a:off x="7041600" y="2016000"/>
+            <a:off x="7041600" y="2268000"/>
             <a:ext cx="2962800" cy="2232000"/>
           </a:xfrm>
           <a:prstGeom prst="rect">
@@ -5350,7 +5350,7 @@
         </p:nvSpPr>
         <p:spPr>
           <a:xfrm>
-            <a:off x="7257600" y="2304000"/>
+            <a:off x="7257600" y="2556000"/>
             <a:ext cx="2530800" cy="1728000"/>
           </a:xfrm>
           <a:prstGeom prst="rect">
@@ -5373,7 +5373,7 @@
               </a:spcAft>
             </a:pPr>
             <a:r>
-              <a:rPr sz="850" b="0" spc="150">
+              <a:rPr sz="1000" b="0" spc="150">
                 <a:solidFill>
                   <a:srgbClr val="7A6030"/>
                 </a:solidFill>
@@ -5393,7 +5393,7 @@
               </a:spcAft>
             </a:pPr>
             <a:r>
-              <a:rPr sz="2400" b="1">
+              <a:rPr sz="2830" b="1">
                 <a:solidFill>
                   <a:srgbClr val="1A1D29"/>
                 </a:solidFill>
@@ -5403,7 +5403,7 @@
               <a:t>5</a:t>
             </a:r>
             <a:r>
-              <a:rPr sz="1100" b="0">
+              <a:rPr sz="1300" b="0">
                 <a:solidFill>
                   <a:srgbClr val="3A3F4D"/>
                 </a:solidFill>
@@ -5420,7 +5420,7 @@
               </a:lnSpc>
             </a:pPr>
             <a:r>
-              <a:rPr sz="850" b="0">
+              <a:rPr sz="1000" b="0">
                 <a:solidFill>
                   <a:srgbClr val="3A3F4D"/>
                 </a:solidFill>
@@ -5440,7 +5440,7 @@
         </p:nvSpPr>
         <p:spPr>
           <a:xfrm>
-            <a:off x="684000" y="4536000"/>
+            <a:off x="684000" y="4788000"/>
             <a:ext cx="9324000" cy="720000"/>
           </a:xfrm>
           <a:prstGeom prst="rect">
@@ -5487,7 +5487,7 @@
         </p:nvSpPr>
         <p:spPr>
           <a:xfrm>
-            <a:off x="972000" y="4536000"/>
+            <a:off x="972000" y="4788000"/>
             <a:ext cx="8748000" cy="720000"/>
           </a:xfrm>
           <a:prstGeom prst="rect">
@@ -5507,7 +5507,7 @@
               </a:lnSpc>
             </a:pPr>
             <a:r>
-              <a:rPr sz="900" b="1">
+              <a:rPr sz="1060" b="1">
                 <a:solidFill>
                   <a:srgbClr val="7A6030"/>
                 </a:solidFill>
@@ -5517,7 +5517,7 @@
               <a:t>【開始キャンペーンについて】</a:t>
             </a:r>
             <a:r>
-              <a:rPr sz="900" b="0">
+              <a:rPr sz="1060" b="0">
                 <a:solidFill>
                   <a:srgbClr val="3A3F4D"/>
                 </a:solidFill>
@@ -5557,7 +5557,7 @@
               </a:lnSpc>
             </a:pPr>
             <a:r>
-              <a:rPr sz="900" b="1">
+              <a:rPr sz="1060" b="1">
                 <a:solidFill>
                   <a:srgbClr val="7A6030"/>
                 </a:solidFill>
@@ -5567,7 +5567,7 @@
               <a:t>MarkGate</a:t>
             </a:r>
             <a:r>
-              <a:rPr sz="700" b="0">
+              <a:rPr sz="830" b="0">
                 <a:solidFill>
                   <a:srgbClr val="5F6672"/>
                 </a:solidFill>
@@ -5607,7 +5607,7 @@
               </a:lnSpc>
             </a:pPr>
             <a:r>
-              <a:rPr sz="900" b="0" spc="100">
+              <a:rPr sz="1060" b="0" spc="100">
                 <a:solidFill>
                   <a:srgbClr val="5F6672"/>
                 </a:solidFill>
@@ -5709,7 +5709,7 @@
               </a:lnSpc>
             </a:pPr>
             <a:r>
-              <a:rPr sz="1700" b="0">
+              <a:rPr sz="2010" b="0">
                 <a:solidFill>
                   <a:srgbClr val="C6A15B"/>
                 </a:solidFill>
@@ -5749,7 +5749,7 @@
               </a:lnSpc>
             </a:pPr>
             <a:r>
-              <a:rPr sz="750" b="0" spc="300">
+              <a:rPr sz="880" b="0" spc="300">
                 <a:solidFill>
                   <a:srgbClr val="7A6030"/>
                 </a:solidFill>
@@ -5770,7 +5770,7 @@
         <p:spPr>
           <a:xfrm>
             <a:off x="684000" y="792000"/>
-            <a:ext cx="9324000" cy="432000"/>
+            <a:ext cx="9324000" cy="504000"/>
           </a:xfrm>
           <a:prstGeom prst="rect">
             <a:avLst/>
@@ -5789,7 +5789,7 @@
               </a:lnSpc>
             </a:pPr>
             <a:r>
-              <a:rPr sz="2200" b="1">
+              <a:rPr sz="2600" b="1">
                 <a:solidFill>
                   <a:srgbClr val="1A1D29"/>
                 </a:solidFill>
@@ -5809,7 +5809,7 @@
         </p:nvSpPr>
         <p:spPr>
           <a:xfrm>
-            <a:off x="684000" y="1296000"/>
+            <a:off x="684000" y="1368000"/>
             <a:ext cx="504000" cy="25200"/>
           </a:xfrm>
           <a:prstGeom prst="rect">
@@ -5853,7 +5853,7 @@
         </p:nvSpPr>
         <p:spPr>
           <a:xfrm>
-            <a:off x="684000" y="1656000"/>
+            <a:off x="684000" y="1728000"/>
             <a:ext cx="1778400" cy="1584000"/>
           </a:xfrm>
           <a:prstGeom prst="rect">
@@ -5899,7 +5899,7 @@
         </p:nvSpPr>
         <p:spPr>
           <a:xfrm>
-            <a:off x="684000" y="1656000"/>
+            <a:off x="684000" y="1728000"/>
             <a:ext cx="1778400" cy="32400"/>
           </a:xfrm>
           <a:prstGeom prst="rect">
@@ -5943,7 +5943,7 @@
         </p:nvSpPr>
         <p:spPr>
           <a:xfrm>
-            <a:off x="864000" y="1872000"/>
+            <a:off x="864000" y="1944000"/>
             <a:ext cx="1418400" cy="1224000"/>
           </a:xfrm>
           <a:prstGeom prst="rect">
@@ -5966,7 +5966,7 @@
               </a:spcAft>
             </a:pPr>
             <a:r>
-              <a:rPr sz="800" b="0" spc="100">
+              <a:rPr sz="940" b="0" spc="100">
                 <a:solidFill>
                   <a:srgbClr val="7A6030"/>
                 </a:solidFill>
@@ -5986,7 +5986,7 @@
               </a:spcAft>
             </a:pPr>
             <a:r>
-              <a:rPr sz="1050" b="1">
+              <a:rPr sz="1240" b="1">
                 <a:solidFill>
                   <a:srgbClr val="1A1D29"/>
                 </a:solidFill>
@@ -6003,7 +6003,7 @@
               </a:lnSpc>
             </a:pPr>
             <a:r>
-              <a:rPr sz="780" b="0">
+              <a:rPr sz="919" b="0">
                 <a:solidFill>
                   <a:srgbClr val="3A3F4D"/>
                 </a:solidFill>
@@ -6023,7 +6023,7 @@
         </p:nvSpPr>
         <p:spPr>
           <a:xfrm>
-            <a:off x="2570400" y="1656000"/>
+            <a:off x="2570400" y="1728000"/>
             <a:ext cx="1778400" cy="1584000"/>
           </a:xfrm>
           <a:prstGeom prst="rect">
@@ -6069,7 +6069,7 @@
         </p:nvSpPr>
         <p:spPr>
           <a:xfrm>
-            <a:off x="2570400" y="1656000"/>
+            <a:off x="2570400" y="1728000"/>
             <a:ext cx="1778400" cy="32400"/>
           </a:xfrm>
           <a:prstGeom prst="rect">
@@ -6113,7 +6113,7 @@
         </p:nvSpPr>
         <p:spPr>
           <a:xfrm>
-            <a:off x="2750400" y="1872000"/>
+            <a:off x="2750400" y="1944000"/>
             <a:ext cx="1418400" cy="1224000"/>
           </a:xfrm>
           <a:prstGeom prst="rect">
@@ -6136,7 +6136,7 @@
               </a:spcAft>
             </a:pPr>
             <a:r>
-              <a:rPr sz="800" b="0" spc="100">
+              <a:rPr sz="940" b="0" spc="100">
                 <a:solidFill>
                   <a:srgbClr val="7A6030"/>
                 </a:solidFill>
@@ -6156,7 +6156,7 @@
               </a:spcAft>
             </a:pPr>
             <a:r>
-              <a:rPr sz="1050" b="1">
+              <a:rPr sz="1240" b="1">
                 <a:solidFill>
                   <a:srgbClr val="1A1D29"/>
                 </a:solidFill>
@@ -6173,7 +6173,7 @@
               </a:lnSpc>
             </a:pPr>
             <a:r>
-              <a:rPr sz="780" b="0">
+              <a:rPr sz="919" b="0">
                 <a:solidFill>
                   <a:srgbClr val="3A3F4D"/>
                 </a:solidFill>
@@ -6193,7 +6193,7 @@
         </p:nvSpPr>
         <p:spPr>
           <a:xfrm>
-            <a:off x="4456800" y="1656000"/>
+            <a:off x="4456800" y="1728000"/>
             <a:ext cx="1778400" cy="1584000"/>
           </a:xfrm>
           <a:prstGeom prst="rect">
@@ -6239,7 +6239,7 @@
         </p:nvSpPr>
         <p:spPr>
           <a:xfrm>
-            <a:off x="4456800" y="1656000"/>
+            <a:off x="4456800" y="1728000"/>
             <a:ext cx="1778400" cy="32400"/>
           </a:xfrm>
           <a:prstGeom prst="rect">
@@ -6283,7 +6283,7 @@
         </p:nvSpPr>
         <p:spPr>
           <a:xfrm>
-            <a:off x="4636800" y="1872000"/>
+            <a:off x="4636800" y="1944000"/>
             <a:ext cx="1418400" cy="1224000"/>
           </a:xfrm>
           <a:prstGeom prst="rect">
@@ -6306,7 +6306,7 @@
               </a:spcAft>
             </a:pPr>
             <a:r>
-              <a:rPr sz="800" b="0" spc="100">
+              <a:rPr sz="940" b="0" spc="100">
                 <a:solidFill>
                   <a:srgbClr val="7A6030"/>
                 </a:solidFill>
@@ -6326,7 +6326,7 @@
               </a:spcAft>
             </a:pPr>
             <a:r>
-              <a:rPr sz="1050" b="1">
+              <a:rPr sz="1240" b="1">
                 <a:solidFill>
                   <a:srgbClr val="1A1D29"/>
                 </a:solidFill>
@@ -6343,7 +6343,7 @@
               </a:lnSpc>
             </a:pPr>
             <a:r>
-              <a:rPr sz="780" b="0">
+              <a:rPr sz="919" b="0">
                 <a:solidFill>
                   <a:srgbClr val="3A3F4D"/>
                 </a:solidFill>
@@ -6363,7 +6363,7 @@
         </p:nvSpPr>
         <p:spPr>
           <a:xfrm>
-            <a:off x="6343200" y="1656000"/>
+            <a:off x="6343200" y="1728000"/>
             <a:ext cx="1778400" cy="1584000"/>
           </a:xfrm>
           <a:prstGeom prst="rect">
@@ -6409,7 +6409,7 @@
         </p:nvSpPr>
         <p:spPr>
           <a:xfrm>
-            <a:off x="6343200" y="1656000"/>
+            <a:off x="6343200" y="1728000"/>
             <a:ext cx="1778400" cy="32400"/>
           </a:xfrm>
           <a:prstGeom prst="rect">
@@ -6453,7 +6453,7 @@
         </p:nvSpPr>
         <p:spPr>
           <a:xfrm>
-            <a:off x="6523200" y="1872000"/>
+            <a:off x="6523200" y="1944000"/>
             <a:ext cx="1418400" cy="1224000"/>
           </a:xfrm>
           <a:prstGeom prst="rect">
@@ -6476,7 +6476,7 @@
               </a:spcAft>
             </a:pPr>
             <a:r>
-              <a:rPr sz="800" b="0" spc="100">
+              <a:rPr sz="940" b="0" spc="100">
                 <a:solidFill>
                   <a:srgbClr val="7A6030"/>
                 </a:solidFill>
@@ -6496,7 +6496,7 @@
               </a:spcAft>
             </a:pPr>
             <a:r>
-              <a:rPr sz="1050" b="1">
+              <a:rPr sz="1240" b="1">
                 <a:solidFill>
                   <a:srgbClr val="1A1D29"/>
                 </a:solidFill>
@@ -6513,7 +6513,7 @@
               </a:lnSpc>
             </a:pPr>
             <a:r>
-              <a:rPr sz="780" b="0">
+              <a:rPr sz="919" b="0">
                 <a:solidFill>
                   <a:srgbClr val="3A3F4D"/>
                 </a:solidFill>
@@ -6533,7 +6533,7 @@
         </p:nvSpPr>
         <p:spPr>
           <a:xfrm>
-            <a:off x="8229600" y="1656000"/>
+            <a:off x="8229600" y="1728000"/>
             <a:ext cx="1778400" cy="1584000"/>
           </a:xfrm>
           <a:prstGeom prst="rect">
@@ -6579,7 +6579,7 @@
         </p:nvSpPr>
         <p:spPr>
           <a:xfrm>
-            <a:off x="8229600" y="1656000"/>
+            <a:off x="8229600" y="1728000"/>
             <a:ext cx="1778400" cy="32400"/>
           </a:xfrm>
           <a:prstGeom prst="rect">
@@ -6623,7 +6623,7 @@
         </p:nvSpPr>
         <p:spPr>
           <a:xfrm>
-            <a:off x="8409600" y="1872000"/>
+            <a:off x="8409600" y="1944000"/>
             <a:ext cx="1418400" cy="1224000"/>
           </a:xfrm>
           <a:prstGeom prst="rect">
@@ -6646,7 +6646,7 @@
               </a:spcAft>
             </a:pPr>
             <a:r>
-              <a:rPr sz="800" b="0" spc="100">
+              <a:rPr sz="940" b="0" spc="100">
                 <a:solidFill>
                   <a:srgbClr val="7A6030"/>
                 </a:solidFill>
@@ -6666,7 +6666,7 @@
               </a:spcAft>
             </a:pPr>
             <a:r>
-              <a:rPr sz="1050" b="1">
+              <a:rPr sz="1240" b="1">
                 <a:solidFill>
                   <a:srgbClr val="1A1D29"/>
                 </a:solidFill>
@@ -6683,7 +6683,7 @@
               </a:lnSpc>
             </a:pPr>
             <a:r>
-              <a:rPr sz="780" b="0">
+              <a:rPr sz="919" b="0">
                 <a:solidFill>
                   <a:srgbClr val="3A3F4D"/>
                 </a:solidFill>
@@ -6703,7 +6703,7 @@
         </p:nvSpPr>
         <p:spPr>
           <a:xfrm>
-            <a:off x="684000" y="3528000"/>
+            <a:off x="684000" y="3600000"/>
             <a:ext cx="1224000" cy="237600"/>
           </a:xfrm>
           <a:prstGeom prst="rect">
@@ -6747,7 +6747,7 @@
         </p:nvSpPr>
         <p:spPr>
           <a:xfrm>
-            <a:off x="684000" y="3585600"/>
+            <a:off x="684000" y="3657600"/>
             <a:ext cx="1224000" cy="144000"/>
           </a:xfrm>
           <a:prstGeom prst="rect">
@@ -6767,7 +6767,7 @@
               </a:lnSpc>
             </a:pPr>
             <a:r>
-              <a:rPr sz="700" b="0" spc="100">
+              <a:rPr sz="830" b="0" spc="100">
                 <a:solidFill>
                   <a:srgbClr val="7A6030"/>
                 </a:solidFill>
@@ -6787,7 +6787,7 @@
         </p:nvSpPr>
         <p:spPr>
           <a:xfrm>
-            <a:off x="2088000" y="3549600"/>
+            <a:off x="2088000" y="3621600"/>
             <a:ext cx="7920000" cy="432000"/>
           </a:xfrm>
           <a:prstGeom prst="rect">
@@ -6807,7 +6807,7 @@
               </a:lnSpc>
             </a:pPr>
             <a:r>
-              <a:rPr sz="800" b="0">
+              <a:rPr sz="940" b="0">
                 <a:solidFill>
                   <a:srgbClr val="5F6672"/>
                 </a:solidFill>
@@ -6827,7 +6827,7 @@
         </p:nvSpPr>
         <p:spPr>
           <a:xfrm>
-            <a:off x="684000" y="4068000"/>
+            <a:off x="684000" y="4140000"/>
             <a:ext cx="1224000" cy="237600"/>
           </a:xfrm>
           <a:prstGeom prst="rect">
@@ -6871,7 +6871,7 @@
         </p:nvSpPr>
         <p:spPr>
           <a:xfrm>
-            <a:off x="684000" y="4125600"/>
+            <a:off x="684000" y="4197600"/>
             <a:ext cx="1224000" cy="144000"/>
           </a:xfrm>
           <a:prstGeom prst="rect">
@@ -6891,7 +6891,7 @@
               </a:lnSpc>
             </a:pPr>
             <a:r>
-              <a:rPr sz="700" b="0" spc="100">
+              <a:rPr sz="830" b="0" spc="100">
                 <a:solidFill>
                   <a:srgbClr val="7A6030"/>
                 </a:solidFill>
@@ -6911,7 +6911,7 @@
         </p:nvSpPr>
         <p:spPr>
           <a:xfrm>
-            <a:off x="2088000" y="4089600"/>
+            <a:off x="2088000" y="4161600"/>
             <a:ext cx="7920000" cy="432000"/>
           </a:xfrm>
           <a:prstGeom prst="rect">
@@ -6931,7 +6931,7 @@
               </a:lnSpc>
             </a:pPr>
             <a:r>
-              <a:rPr sz="800" b="0">
+              <a:rPr sz="940" b="0">
                 <a:solidFill>
                   <a:srgbClr val="5F6672"/>
                 </a:solidFill>
@@ -6971,7 +6971,7 @@
               </a:lnSpc>
             </a:pPr>
             <a:r>
-              <a:rPr sz="900" b="1">
+              <a:rPr sz="1060" b="1">
                 <a:solidFill>
                   <a:srgbClr val="7A6030"/>
                 </a:solidFill>
@@ -6981,7 +6981,7 @@
               <a:t>MarkGate</a:t>
             </a:r>
             <a:r>
-              <a:rPr sz="700" b="0">
+              <a:rPr sz="830" b="0">
                 <a:solidFill>
                   <a:srgbClr val="5F6672"/>
                 </a:solidFill>
@@ -7021,7 +7021,7 @@
               </a:lnSpc>
             </a:pPr>
             <a:r>
-              <a:rPr sz="900" b="0" spc="100">
+              <a:rPr sz="1060" b="0" spc="100">
                 <a:solidFill>
                   <a:srgbClr val="5F6672"/>
                 </a:solidFill>
@@ -7123,7 +7123,7 @@
               </a:lnSpc>
             </a:pPr>
             <a:r>
-              <a:rPr sz="1700" b="0">
+              <a:rPr sz="2010" b="0">
                 <a:solidFill>
                   <a:srgbClr val="C6A15B"/>
                 </a:solidFill>
@@ -7163,7 +7163,7 @@
               </a:lnSpc>
             </a:pPr>
             <a:r>
-              <a:rPr sz="750" b="0" spc="300">
+              <a:rPr sz="880" b="0" spc="300">
                 <a:solidFill>
                   <a:srgbClr val="7A6030"/>
                 </a:solidFill>
@@ -7184,7 +7184,7 @@
         <p:spPr>
           <a:xfrm>
             <a:off x="684000" y="792000"/>
-            <a:ext cx="9324000" cy="432000"/>
+            <a:ext cx="9324000" cy="504000"/>
           </a:xfrm>
           <a:prstGeom prst="rect">
             <a:avLst/>
@@ -7203,7 +7203,7 @@
               </a:lnSpc>
             </a:pPr>
             <a:r>
-              <a:rPr sz="2200" b="1">
+              <a:rPr sz="2600" b="1">
                 <a:solidFill>
                   <a:srgbClr val="1A1D29"/>
                 </a:solidFill>
@@ -7223,7 +7223,7 @@
         </p:nvSpPr>
         <p:spPr>
           <a:xfrm>
-            <a:off x="684000" y="1296000"/>
+            <a:off x="684000" y="1368000"/>
             <a:ext cx="504000" cy="25200"/>
           </a:xfrm>
           <a:prstGeom prst="rect">
@@ -7267,7 +7267,7 @@
         </p:nvSpPr>
         <p:spPr>
           <a:xfrm>
-            <a:off x="684000" y="1620000"/>
+            <a:off x="684000" y="1692000"/>
             <a:ext cx="4554000" cy="1296000"/>
           </a:xfrm>
           <a:prstGeom prst="rect">
@@ -7313,7 +7313,7 @@
         </p:nvSpPr>
         <p:spPr>
           <a:xfrm>
-            <a:off x="900000" y="1764000"/>
+            <a:off x="900000" y="1836000"/>
             <a:ext cx="4122000" cy="1008000"/>
           </a:xfrm>
           <a:prstGeom prst="rect">
@@ -7336,7 +7336,7 @@
               </a:spcAft>
             </a:pPr>
             <a:r>
-              <a:rPr sz="950" b="1">
+              <a:rPr sz="1120" b="1">
                 <a:solidFill>
                   <a:srgbClr val="7A6030"/>
                 </a:solidFill>
@@ -7346,7 +7346,7 @@
               <a:t>Q. </a:t>
             </a:r>
             <a:r>
-              <a:rPr sz="950" b="1">
+              <a:rPr sz="1120" b="1">
                 <a:solidFill>
                   <a:srgbClr val="1A1D29"/>
                 </a:solidFill>
@@ -7363,7 +7363,7 @@
               </a:lnSpc>
             </a:pPr>
             <a:r>
-              <a:rPr sz="800" b="0">
+              <a:rPr sz="940" b="0">
                 <a:solidFill>
                   <a:srgbClr val="5F6672"/>
                 </a:solidFill>
@@ -7373,7 +7373,7 @@
               <a:t>A. </a:t>
             </a:r>
             <a:r>
-              <a:rPr sz="800" b="0">
+              <a:rPr sz="940" b="0">
                 <a:solidFill>
                   <a:srgbClr val="3A3F4D"/>
                 </a:solidFill>
@@ -7393,7 +7393,7 @@
         </p:nvSpPr>
         <p:spPr>
           <a:xfrm>
-            <a:off x="5418000" y="1620000"/>
+            <a:off x="5418000" y="1692000"/>
             <a:ext cx="4554000" cy="1296000"/>
           </a:xfrm>
           <a:prstGeom prst="rect">
@@ -7439,7 +7439,7 @@
         </p:nvSpPr>
         <p:spPr>
           <a:xfrm>
-            <a:off x="5634000" y="1764000"/>
+            <a:off x="5634000" y="1836000"/>
             <a:ext cx="4122000" cy="1008000"/>
           </a:xfrm>
           <a:prstGeom prst="rect">
@@ -7462,7 +7462,7 @@
               </a:spcAft>
             </a:pPr>
             <a:r>
-              <a:rPr sz="950" b="1">
+              <a:rPr sz="1120" b="1">
                 <a:solidFill>
                   <a:srgbClr val="7A6030"/>
                 </a:solidFill>
@@ -7472,7 +7472,7 @@
               <a:t>Q. </a:t>
             </a:r>
             <a:r>
-              <a:rPr sz="950" b="1">
+              <a:rPr sz="1120" b="1">
                 <a:solidFill>
                   <a:srgbClr val="1A1D29"/>
                 </a:solidFill>
@@ -7489,7 +7489,7 @@
               </a:lnSpc>
             </a:pPr>
             <a:r>
-              <a:rPr sz="800" b="0">
+              <a:rPr sz="940" b="0">
                 <a:solidFill>
                   <a:srgbClr val="5F6672"/>
                 </a:solidFill>
@@ -7499,7 +7499,7 @@
               <a:t>A. </a:t>
             </a:r>
             <a:r>
-              <a:rPr sz="800" b="0">
+              <a:rPr sz="940" b="0">
                 <a:solidFill>
                   <a:srgbClr val="3A3F4D"/>
                 </a:solidFill>
@@ -7519,7 +7519,7 @@
         </p:nvSpPr>
         <p:spPr>
           <a:xfrm>
-            <a:off x="684000" y="3096000"/>
+            <a:off x="684000" y="3168000"/>
             <a:ext cx="4554000" cy="1296000"/>
           </a:xfrm>
           <a:prstGeom prst="rect">
@@ -7565,7 +7565,7 @@
         </p:nvSpPr>
         <p:spPr>
           <a:xfrm>
-            <a:off x="900000" y="3240000"/>
+            <a:off x="900000" y="3312000"/>
             <a:ext cx="4122000" cy="1008000"/>
           </a:xfrm>
           <a:prstGeom prst="rect">
@@ -7588,7 +7588,7 @@
               </a:spcAft>
             </a:pPr>
             <a:r>
-              <a:rPr sz="950" b="1">
+              <a:rPr sz="1120" b="1">
                 <a:solidFill>
                   <a:srgbClr val="7A6030"/>
                 </a:solidFill>
@@ -7598,7 +7598,7 @@
               <a:t>Q. </a:t>
             </a:r>
             <a:r>
-              <a:rPr sz="950" b="1">
+              <a:rPr sz="1120" b="1">
                 <a:solidFill>
                   <a:srgbClr val="1A1D29"/>
                 </a:solidFill>
@@ -7615,7 +7615,7 @@
               </a:lnSpc>
             </a:pPr>
             <a:r>
-              <a:rPr sz="800" b="0">
+              <a:rPr sz="940" b="0">
                 <a:solidFill>
                   <a:srgbClr val="5F6672"/>
                 </a:solidFill>
@@ -7625,7 +7625,7 @@
               <a:t>A. </a:t>
             </a:r>
             <a:r>
-              <a:rPr sz="800" b="0">
+              <a:rPr sz="940" b="0">
                 <a:solidFill>
                   <a:srgbClr val="3A3F4D"/>
                 </a:solidFill>
@@ -7645,7 +7645,7 @@
         </p:nvSpPr>
         <p:spPr>
           <a:xfrm>
-            <a:off x="5418000" y="3096000"/>
+            <a:off x="5418000" y="3168000"/>
             <a:ext cx="4554000" cy="1296000"/>
           </a:xfrm>
           <a:prstGeom prst="rect">
@@ -7691,7 +7691,7 @@
         </p:nvSpPr>
         <p:spPr>
           <a:xfrm>
-            <a:off x="5634000" y="3240000"/>
+            <a:off x="5634000" y="3312000"/>
             <a:ext cx="4122000" cy="1008000"/>
           </a:xfrm>
           <a:prstGeom prst="rect">
@@ -7714,7 +7714,7 @@
               </a:spcAft>
             </a:pPr>
             <a:r>
-              <a:rPr sz="950" b="1">
+              <a:rPr sz="1120" b="1">
                 <a:solidFill>
                   <a:srgbClr val="7A6030"/>
                 </a:solidFill>
@@ -7724,7 +7724,7 @@
               <a:t>Q. </a:t>
             </a:r>
             <a:r>
-              <a:rPr sz="950" b="1">
+              <a:rPr sz="1120" b="1">
                 <a:solidFill>
                   <a:srgbClr val="1A1D29"/>
                 </a:solidFill>
@@ -7741,7 +7741,7 @@
               </a:lnSpc>
             </a:pPr>
             <a:r>
-              <a:rPr sz="800" b="0">
+              <a:rPr sz="940" b="0">
                 <a:solidFill>
                   <a:srgbClr val="5F6672"/>
                 </a:solidFill>
@@ -7751,7 +7751,7 @@
               <a:t>A. </a:t>
             </a:r>
             <a:r>
-              <a:rPr sz="800" b="0">
+              <a:rPr sz="940" b="0">
                 <a:solidFill>
                   <a:srgbClr val="3A3F4D"/>
                 </a:solidFill>
@@ -7771,7 +7771,7 @@
         </p:nvSpPr>
         <p:spPr>
           <a:xfrm>
-            <a:off x="684000" y="4572000"/>
+            <a:off x="684000" y="4644000"/>
             <a:ext cx="4554000" cy="1296000"/>
           </a:xfrm>
           <a:prstGeom prst="rect">
@@ -7817,7 +7817,7 @@
         </p:nvSpPr>
         <p:spPr>
           <a:xfrm>
-            <a:off x="900000" y="4716000"/>
+            <a:off x="900000" y="4788000"/>
             <a:ext cx="4122000" cy="1008000"/>
           </a:xfrm>
           <a:prstGeom prst="rect">
@@ -7840,7 +7840,7 @@
               </a:spcAft>
             </a:pPr>
             <a:r>
-              <a:rPr sz="950" b="1">
+              <a:rPr sz="1120" b="1">
                 <a:solidFill>
                   <a:srgbClr val="7A6030"/>
                 </a:solidFill>
@@ -7850,7 +7850,7 @@
               <a:t>Q. </a:t>
             </a:r>
             <a:r>
-              <a:rPr sz="950" b="1">
+              <a:rPr sz="1120" b="1">
                 <a:solidFill>
                   <a:srgbClr val="1A1D29"/>
                 </a:solidFill>
@@ -7867,7 +7867,7 @@
               </a:lnSpc>
             </a:pPr>
             <a:r>
-              <a:rPr sz="800" b="0">
+              <a:rPr sz="940" b="0">
                 <a:solidFill>
                   <a:srgbClr val="5F6672"/>
                 </a:solidFill>
@@ -7877,7 +7877,7 @@
               <a:t>A. </a:t>
             </a:r>
             <a:r>
-              <a:rPr sz="800" b="0">
+              <a:rPr sz="940" b="0">
                 <a:solidFill>
                   <a:srgbClr val="3A3F4D"/>
                 </a:solidFill>
@@ -7897,7 +7897,7 @@
         </p:nvSpPr>
         <p:spPr>
           <a:xfrm>
-            <a:off x="5418000" y="4572000"/>
+            <a:off x="5418000" y="4644000"/>
             <a:ext cx="4554000" cy="1296000"/>
           </a:xfrm>
           <a:prstGeom prst="rect">
@@ -7943,7 +7943,7 @@
         </p:nvSpPr>
         <p:spPr>
           <a:xfrm>
-            <a:off x="5634000" y="4716000"/>
+            <a:off x="5634000" y="4788000"/>
             <a:ext cx="4122000" cy="1008000"/>
           </a:xfrm>
           <a:prstGeom prst="rect">
@@ -7966,7 +7966,7 @@
               </a:spcAft>
             </a:pPr>
             <a:r>
-              <a:rPr sz="950" b="1">
+              <a:rPr sz="1120" b="1">
                 <a:solidFill>
                   <a:srgbClr val="7A6030"/>
                 </a:solidFill>
@@ -7976,7 +7976,7 @@
               <a:t>Q. </a:t>
             </a:r>
             <a:r>
-              <a:rPr sz="950" b="1">
+              <a:rPr sz="1120" b="1">
                 <a:solidFill>
                   <a:srgbClr val="1A1D29"/>
                 </a:solidFill>
@@ -7993,7 +7993,7 @@
               </a:lnSpc>
             </a:pPr>
             <a:r>
-              <a:rPr sz="800" b="0">
+              <a:rPr sz="940" b="0">
                 <a:solidFill>
                   <a:srgbClr val="5F6672"/>
                 </a:solidFill>
@@ -8003,7 +8003,7 @@
               <a:t>A. </a:t>
             </a:r>
             <a:r>
-              <a:rPr sz="800" b="0">
+              <a:rPr sz="940" b="0">
                 <a:solidFill>
                   <a:srgbClr val="3A3F4D"/>
                 </a:solidFill>
@@ -8043,7 +8043,7 @@
               </a:lnSpc>
             </a:pPr>
             <a:r>
-              <a:rPr sz="900" b="1">
+              <a:rPr sz="1060" b="1">
                 <a:solidFill>
                   <a:srgbClr val="7A6030"/>
                 </a:solidFill>
@@ -8053,7 +8053,7 @@
               <a:t>MarkGate</a:t>
             </a:r>
             <a:r>
-              <a:rPr sz="700" b="0">
+              <a:rPr sz="830" b="0">
                 <a:solidFill>
                   <a:srgbClr val="5F6672"/>
                 </a:solidFill>
@@ -8093,7 +8093,7 @@
               </a:lnSpc>
             </a:pPr>
             <a:r>
-              <a:rPr sz="900" b="0" spc="100">
+              <a:rPr sz="1060" b="0" spc="100">
                 <a:solidFill>
                   <a:srgbClr val="5F6672"/>
                 </a:solidFill>
@@ -8195,7 +8195,7 @@
               </a:lnSpc>
             </a:pPr>
             <a:r>
-              <a:rPr sz="1700" b="0">
+              <a:rPr sz="2010" b="0">
                 <a:solidFill>
                   <a:srgbClr val="C6A15B"/>
                 </a:solidFill>
@@ -8235,7 +8235,7 @@
               </a:lnSpc>
             </a:pPr>
             <a:r>
-              <a:rPr sz="750" b="0" spc="300">
+              <a:rPr sz="880" b="0" spc="300">
                 <a:solidFill>
                   <a:srgbClr val="7A6030"/>
                 </a:solidFill>
@@ -8256,7 +8256,7 @@
         <p:spPr>
           <a:xfrm>
             <a:off x="684000" y="792000"/>
-            <a:ext cx="9324000" cy="432000"/>
+            <a:ext cx="9324000" cy="504000"/>
           </a:xfrm>
           <a:prstGeom prst="rect">
             <a:avLst/>
@@ -8275,7 +8275,7 @@
               </a:lnSpc>
             </a:pPr>
             <a:r>
-              <a:rPr sz="2200" b="1">
+              <a:rPr sz="2600" b="1">
                 <a:solidFill>
                   <a:srgbClr val="1A1D29"/>
                 </a:solidFill>
@@ -8295,7 +8295,7 @@
         </p:nvSpPr>
         <p:spPr>
           <a:xfrm>
-            <a:off x="684000" y="1296000"/>
+            <a:off x="684000" y="1368000"/>
             <a:ext cx="504000" cy="25200"/>
           </a:xfrm>
           <a:prstGeom prst="rect">
@@ -8339,7 +8339,7 @@
         </p:nvSpPr>
         <p:spPr>
           <a:xfrm>
-            <a:off x="684000" y="1656000"/>
+            <a:off x="684000" y="1728000"/>
             <a:ext cx="4554000" cy="1728000"/>
           </a:xfrm>
           <a:prstGeom prst="rect">
@@ -8385,7 +8385,7 @@
         </p:nvSpPr>
         <p:spPr>
           <a:xfrm>
-            <a:off x="900000" y="1836000"/>
+            <a:off x="900000" y="1908000"/>
             <a:ext cx="4122000" cy="1368000"/>
           </a:xfrm>
           <a:prstGeom prst="rect">
@@ -8408,7 +8408,7 @@
               </a:spcAft>
             </a:pPr>
             <a:r>
-              <a:rPr sz="950" b="1">
+              <a:rPr sz="1120" b="1">
                 <a:solidFill>
                   <a:srgbClr val="7A6030"/>
                 </a:solidFill>
@@ -8418,7 +8418,7 @@
               <a:t>Q. </a:t>
             </a:r>
             <a:r>
-              <a:rPr sz="950" b="1">
+              <a:rPr sz="1120" b="1">
                 <a:solidFill>
                   <a:srgbClr val="1A1D29"/>
                 </a:solidFill>
@@ -8435,7 +8435,7 @@
               </a:lnSpc>
             </a:pPr>
             <a:r>
-              <a:rPr sz="800" b="0">
+              <a:rPr sz="940" b="0">
                 <a:solidFill>
                   <a:srgbClr val="5F6672"/>
                 </a:solidFill>
@@ -8445,7 +8445,7 @@
               <a:t>A. </a:t>
             </a:r>
             <a:r>
-              <a:rPr sz="800" b="0">
+              <a:rPr sz="940" b="0">
                 <a:solidFill>
                   <a:srgbClr val="3A3F4D"/>
                 </a:solidFill>
@@ -8465,7 +8465,7 @@
         </p:nvSpPr>
         <p:spPr>
           <a:xfrm>
-            <a:off x="5454000" y="1656000"/>
+            <a:off x="5454000" y="1728000"/>
             <a:ext cx="4554000" cy="1728000"/>
           </a:xfrm>
           <a:prstGeom prst="rect">
@@ -8511,7 +8511,7 @@
         </p:nvSpPr>
         <p:spPr>
           <a:xfrm>
-            <a:off x="5670000" y="1836000"/>
+            <a:off x="5670000" y="1908000"/>
             <a:ext cx="4122000" cy="1368000"/>
           </a:xfrm>
           <a:prstGeom prst="rect">
@@ -8534,7 +8534,7 @@
               </a:spcAft>
             </a:pPr>
             <a:r>
-              <a:rPr sz="950" b="1">
+              <a:rPr sz="1120" b="1">
                 <a:solidFill>
                   <a:srgbClr val="7A6030"/>
                 </a:solidFill>
@@ -8544,7 +8544,7 @@
               <a:t>Q. </a:t>
             </a:r>
             <a:r>
-              <a:rPr sz="950" b="1">
+              <a:rPr sz="1120" b="1">
                 <a:solidFill>
                   <a:srgbClr val="1A1D29"/>
                 </a:solidFill>
@@ -8561,7 +8561,7 @@
               </a:lnSpc>
             </a:pPr>
             <a:r>
-              <a:rPr sz="800" b="0">
+              <a:rPr sz="940" b="0">
                 <a:solidFill>
                   <a:srgbClr val="5F6672"/>
                 </a:solidFill>
@@ -8571,7 +8571,7 @@
               <a:t>A. </a:t>
             </a:r>
             <a:r>
-              <a:rPr sz="800" b="0">
+              <a:rPr sz="940" b="0">
                 <a:solidFill>
                   <a:srgbClr val="3A3F4D"/>
                 </a:solidFill>
@@ -8591,7 +8591,7 @@
         </p:nvSpPr>
         <p:spPr>
           <a:xfrm>
-            <a:off x="684000" y="3600000"/>
+            <a:off x="684000" y="3672000"/>
             <a:ext cx="4554000" cy="1728000"/>
           </a:xfrm>
           <a:prstGeom prst="rect">
@@ -8637,7 +8637,7 @@
         </p:nvSpPr>
         <p:spPr>
           <a:xfrm>
-            <a:off x="900000" y="3780000"/>
+            <a:off x="900000" y="3852000"/>
             <a:ext cx="4122000" cy="1368000"/>
           </a:xfrm>
           <a:prstGeom prst="rect">
@@ -8660,7 +8660,7 @@
               </a:spcAft>
             </a:pPr>
             <a:r>
-              <a:rPr sz="950" b="1">
+              <a:rPr sz="1120" b="1">
                 <a:solidFill>
                   <a:srgbClr val="7A6030"/>
                 </a:solidFill>
@@ -8670,7 +8670,7 @@
               <a:t>Q. </a:t>
             </a:r>
             <a:r>
-              <a:rPr sz="950" b="1">
+              <a:rPr sz="1120" b="1">
                 <a:solidFill>
                   <a:srgbClr val="1A1D29"/>
                 </a:solidFill>
@@ -8687,7 +8687,7 @@
               </a:lnSpc>
             </a:pPr>
             <a:r>
-              <a:rPr sz="800" b="0">
+              <a:rPr sz="940" b="0">
                 <a:solidFill>
                   <a:srgbClr val="5F6672"/>
                 </a:solidFill>
@@ -8697,7 +8697,7 @@
               <a:t>A. </a:t>
             </a:r>
             <a:r>
-              <a:rPr sz="800" b="0">
+              <a:rPr sz="940" b="0">
                 <a:solidFill>
                   <a:srgbClr val="3A3F4D"/>
                 </a:solidFill>
@@ -8717,7 +8717,7 @@
         </p:nvSpPr>
         <p:spPr>
           <a:xfrm>
-            <a:off x="5454000" y="3600000"/>
+            <a:off x="5454000" y="3672000"/>
             <a:ext cx="4554000" cy="1728000"/>
           </a:xfrm>
           <a:prstGeom prst="rect">
@@ -8763,7 +8763,7 @@
         </p:nvSpPr>
         <p:spPr>
           <a:xfrm>
-            <a:off x="5670000" y="3780000"/>
+            <a:off x="5670000" y="3852000"/>
             <a:ext cx="4122000" cy="1368000"/>
           </a:xfrm>
           <a:prstGeom prst="rect">
@@ -8786,7 +8786,7 @@
               </a:spcAft>
             </a:pPr>
             <a:r>
-              <a:rPr sz="950" b="1">
+              <a:rPr sz="1120" b="1">
                 <a:solidFill>
                   <a:srgbClr val="7A6030"/>
                 </a:solidFill>
@@ -8796,7 +8796,7 @@
               <a:t>Q. </a:t>
             </a:r>
             <a:r>
-              <a:rPr sz="950" b="1">
+              <a:rPr sz="1120" b="1">
                 <a:solidFill>
                   <a:srgbClr val="1A1D29"/>
                 </a:solidFill>
@@ -8813,7 +8813,7 @@
               </a:lnSpc>
             </a:pPr>
             <a:r>
-              <a:rPr sz="800" b="0">
+              <a:rPr sz="940" b="0">
                 <a:solidFill>
                   <a:srgbClr val="5F6672"/>
                 </a:solidFill>
@@ -8823,7 +8823,7 @@
               <a:t>A. </a:t>
             </a:r>
             <a:r>
-              <a:rPr sz="800" b="0">
+              <a:rPr sz="940" b="0">
                 <a:solidFill>
                   <a:srgbClr val="3A3F4D"/>
                 </a:solidFill>
@@ -8843,7 +8843,7 @@
         </p:nvSpPr>
         <p:spPr>
           <a:xfrm>
-            <a:off x="684000" y="5616000"/>
+            <a:off x="684000" y="5688000"/>
             <a:ext cx="9324000" cy="216000"/>
           </a:xfrm>
           <a:prstGeom prst="rect">
@@ -8863,7 +8863,7 @@
               </a:lnSpc>
             </a:pPr>
             <a:r>
-              <a:rPr sz="750" b="0">
+              <a:rPr sz="880" b="0">
                 <a:solidFill>
                   <a:srgbClr val="5F6672"/>
                 </a:solidFill>
@@ -8903,7 +8903,7 @@
               </a:lnSpc>
             </a:pPr>
             <a:r>
-              <a:rPr sz="900" b="1">
+              <a:rPr sz="1060" b="1">
                 <a:solidFill>
                   <a:srgbClr val="7A6030"/>
                 </a:solidFill>
@@ -8913,7 +8913,7 @@
               <a:t>MarkGate</a:t>
             </a:r>
             <a:r>
-              <a:rPr sz="700" b="0">
+              <a:rPr sz="830" b="0">
                 <a:solidFill>
                   <a:srgbClr val="5F6672"/>
                 </a:solidFill>
@@ -8953,7 +8953,7 @@
               </a:lnSpc>
             </a:pPr>
             <a:r>
-              <a:rPr sz="900" b="0" spc="100">
+              <a:rPr sz="1060" b="0" spc="100">
                 <a:solidFill>
                   <a:srgbClr val="5F6672"/>
                 </a:solidFill>
@@ -9055,7 +9055,7 @@
               </a:lnSpc>
             </a:pPr>
             <a:r>
-              <a:rPr sz="850" b="0" spc="300">
+              <a:rPr sz="1000" b="0" spc="300">
                 <a:solidFill>
                   <a:srgbClr val="E2C88A"/>
                 </a:solidFill>
@@ -9095,7 +9095,7 @@
               </a:lnSpc>
             </a:pPr>
             <a:r>
-              <a:rPr sz="2500" b="1">
+              <a:rPr sz="2950" b="1">
                 <a:solidFill>
                   <a:srgbClr val="FFFFFF"/>
                 </a:solidFill>
@@ -9112,7 +9112,7 @@
               </a:lnSpc>
             </a:pPr>
             <a:r>
-              <a:rPr sz="2500" b="1">
+              <a:rPr sz="2950" b="1">
                 <a:solidFill>
                   <a:srgbClr val="E2C88A"/>
                 </a:solidFill>
@@ -9152,7 +9152,7 @@
               </a:lnSpc>
             </a:pPr>
             <a:r>
-              <a:rPr sz="950" b="0">
+              <a:rPr sz="1120" b="0">
                 <a:solidFill>
                   <a:srgbClr val="D5D9E2"/>
                 </a:solidFill>
@@ -9169,7 +9169,7 @@
               </a:lnSpc>
             </a:pPr>
             <a:r>
-              <a:rPr sz="950" b="0">
+              <a:rPr sz="1120" b="0">
                 <a:solidFill>
                   <a:srgbClr val="D5D9E2"/>
                 </a:solidFill>
@@ -9186,7 +9186,7 @@
               </a:lnSpc>
             </a:pPr>
             <a:r>
-              <a:rPr sz="950" b="0">
+              <a:rPr sz="1120" b="0">
                 <a:solidFill>
                   <a:srgbClr val="D5D9E2"/>
                 </a:solidFill>
@@ -9203,7 +9203,7 @@
               </a:lnSpc>
             </a:pPr>
             <a:r>
-              <a:rPr sz="950" b="0">
+              <a:rPr sz="1120" b="0">
                 <a:solidFill>
                   <a:srgbClr val="D5D9E2"/>
                 </a:solidFill>
@@ -9287,7 +9287,7 @@
               </a:lnSpc>
             </a:pPr>
             <a:r>
-              <a:rPr sz="950" b="1" spc="100">
+              <a:rPr sz="1120" b="1" spc="100">
                 <a:solidFill>
                   <a:srgbClr val="0A0E1A"/>
                 </a:solidFill>
@@ -9327,7 +9327,7 @@
               </a:lnSpc>
             </a:pPr>
             <a:r>
-              <a:rPr sz="750" b="0">
+              <a:rPr sz="880" b="0">
                 <a:solidFill>
                   <a:srgbClr val="8E96A8"/>
                 </a:solidFill>
@@ -9344,7 +9344,7 @@
               </a:lnSpc>
             </a:pPr>
             <a:r>
-              <a:rPr sz="750" b="0">
+              <a:rPr sz="880" b="0">
                 <a:solidFill>
                   <a:srgbClr val="8E96A8"/>
                 </a:solidFill>
@@ -9384,7 +9384,7 @@
               </a:lnSpc>
             </a:pPr>
             <a:r>
-              <a:rPr sz="850" b="0" spc="100">
+              <a:rPr sz="1000" b="0" spc="100">
                 <a:solidFill>
                   <a:srgbClr val="E2C88A"/>
                 </a:solidFill>
@@ -9424,7 +9424,7 @@
               </a:lnSpc>
             </a:pPr>
             <a:r>
-              <a:rPr sz="850" b="0">
+              <a:rPr sz="1000" b="0">
                 <a:solidFill>
                   <a:srgbClr val="DADDE4"/>
                 </a:solidFill>
@@ -9508,7 +9508,7 @@
               </a:lnSpc>
             </a:pPr>
             <a:r>
-              <a:rPr sz="850" b="0" spc="100">
+              <a:rPr sz="1000" b="0" spc="100">
                 <a:solidFill>
                   <a:srgbClr val="E2C88A"/>
                 </a:solidFill>
@@ -9548,7 +9548,7 @@
               </a:lnSpc>
             </a:pPr>
             <a:r>
-              <a:rPr sz="850" b="0">
+              <a:rPr sz="1000" b="0">
                 <a:solidFill>
                   <a:srgbClr val="DADDE4"/>
                 </a:solidFill>
@@ -9632,7 +9632,7 @@
               </a:lnSpc>
             </a:pPr>
             <a:r>
-              <a:rPr sz="850" b="0" spc="100">
+              <a:rPr sz="1000" b="0" spc="100">
                 <a:solidFill>
                   <a:srgbClr val="E2C88A"/>
                 </a:solidFill>
@@ -9672,7 +9672,7 @@
               </a:lnSpc>
             </a:pPr>
             <a:r>
-              <a:rPr sz="850" b="0">
+              <a:rPr sz="1000" b="0">
                 <a:solidFill>
                   <a:srgbClr val="DADDE4"/>
                 </a:solidFill>
@@ -9756,7 +9756,7 @@
               </a:lnSpc>
             </a:pPr>
             <a:r>
-              <a:rPr sz="850" b="0" spc="100">
+              <a:rPr sz="1000" b="0" spc="100">
                 <a:solidFill>
                   <a:srgbClr val="E2C88A"/>
                 </a:solidFill>
@@ -9796,7 +9796,7 @@
               </a:lnSpc>
             </a:pPr>
             <a:r>
-              <a:rPr sz="850" b="0">
+              <a:rPr sz="1000" b="0">
                 <a:solidFill>
                   <a:srgbClr val="DADDE4"/>
                 </a:solidFill>
@@ -9880,7 +9880,7 @@
               </a:lnSpc>
             </a:pPr>
             <a:r>
-              <a:rPr sz="700" b="0">
+              <a:rPr sz="830" b="0">
                 <a:solidFill>
                   <a:srgbClr val="8E96A8"/>
                 </a:solidFill>
@@ -9897,7 +9897,7 @@
               </a:lnSpc>
             </a:pPr>
             <a:r>
-              <a:rPr sz="700" b="0">
+              <a:rPr sz="830" b="0">
                 <a:solidFill>
                   <a:srgbClr val="8E96A8"/>
                 </a:solidFill>
@@ -9914,7 +9914,7 @@
               </a:lnSpc>
             </a:pPr>
             <a:r>
-              <a:rPr sz="700" b="0">
+              <a:rPr sz="830" b="0">
                 <a:solidFill>
                   <a:srgbClr val="8E96A8"/>
                 </a:solidFill>
@@ -9954,7 +9954,7 @@
               </a:lnSpc>
             </a:pPr>
             <a:r>
-              <a:rPr sz="900" b="1">
+              <a:rPr sz="1060" b="1">
                 <a:solidFill>
                   <a:srgbClr val="E2C88A"/>
                 </a:solidFill>
@@ -9964,7 +9964,7 @@
               <a:t>MarkGate</a:t>
             </a:r>
             <a:r>
-              <a:rPr sz="700" b="0">
+              <a:rPr sz="830" b="0">
                 <a:solidFill>
                   <a:srgbClr val="8E96A8"/>
                 </a:solidFill>
@@ -10004,7 +10004,7 @@
               </a:lnSpc>
             </a:pPr>
             <a:r>
-              <a:rPr sz="900" b="0" spc="100">
+              <a:rPr sz="1060" b="0" spc="100">
                 <a:solidFill>
                   <a:srgbClr val="8E96A8"/>
                 </a:solidFill>
@@ -10106,7 +10106,7 @@
               </a:lnSpc>
             </a:pPr>
             <a:r>
-              <a:rPr sz="1700" b="0">
+              <a:rPr sz="2010" b="0">
                 <a:solidFill>
                   <a:srgbClr val="C6A15B"/>
                 </a:solidFill>
@@ -10146,7 +10146,7 @@
               </a:lnSpc>
             </a:pPr>
             <a:r>
-              <a:rPr sz="750" b="0" spc="300">
+              <a:rPr sz="880" b="0" spc="300">
                 <a:solidFill>
                   <a:srgbClr val="7A6030"/>
                 </a:solidFill>
@@ -10167,7 +10167,7 @@
         <p:spPr>
           <a:xfrm>
             <a:off x="684000" y="792000"/>
-            <a:ext cx="9324000" cy="432000"/>
+            <a:ext cx="9324000" cy="504000"/>
           </a:xfrm>
           <a:prstGeom prst="rect">
             <a:avLst/>
@@ -10186,7 +10186,7 @@
               </a:lnSpc>
             </a:pPr>
             <a:r>
-              <a:rPr sz="2200" b="1">
+              <a:rPr sz="2600" b="1">
                 <a:solidFill>
                   <a:srgbClr val="1A1D29"/>
                 </a:solidFill>
@@ -10206,7 +10206,7 @@
         </p:nvSpPr>
         <p:spPr>
           <a:xfrm>
-            <a:off x="684000" y="1296000"/>
+            <a:off x="684000" y="1368000"/>
             <a:ext cx="504000" cy="25200"/>
           </a:xfrm>
           <a:prstGeom prst="rect">
@@ -10250,7 +10250,7 @@
         </p:nvSpPr>
         <p:spPr>
           <a:xfrm>
-            <a:off x="684000" y="1656000"/>
+            <a:off x="684000" y="1728000"/>
             <a:ext cx="2962800" cy="3168000"/>
           </a:xfrm>
           <a:prstGeom prst="rect">
@@ -10296,7 +10296,7 @@
         </p:nvSpPr>
         <p:spPr>
           <a:xfrm>
-            <a:off x="684000" y="1656000"/>
+            <a:off x="684000" y="1728000"/>
             <a:ext cx="2962800" cy="32400"/>
           </a:xfrm>
           <a:prstGeom prst="rect">
@@ -10340,7 +10340,7 @@
         </p:nvSpPr>
         <p:spPr>
           <a:xfrm>
-            <a:off x="936000" y="1908000"/>
+            <a:off x="936000" y="1980000"/>
             <a:ext cx="2458800" cy="2664000"/>
           </a:xfrm>
           <a:prstGeom prst="rect">
@@ -10363,7 +10363,7 @@
               </a:spcAft>
             </a:pPr>
             <a:r>
-              <a:rPr sz="1500" b="0">
+              <a:rPr sz="1770" b="0">
                 <a:solidFill>
                   <a:srgbClr val="C6A15B"/>
                 </a:solidFill>
@@ -10380,7 +10380,7 @@
               </a:lnSpc>
             </a:pPr>
             <a:r>
-              <a:rPr sz="1250" b="1">
+              <a:rPr sz="1480" b="1">
                 <a:solidFill>
                   <a:srgbClr val="1A1D29"/>
                 </a:solidFill>
@@ -10397,7 +10397,7 @@
               </a:lnSpc>
             </a:pPr>
             <a:r>
-              <a:rPr sz="1250" b="1">
+              <a:rPr sz="1480" b="1">
                 <a:solidFill>
                   <a:srgbClr val="1A1D29"/>
                 </a:solidFill>
@@ -10414,7 +10414,7 @@
               </a:lnSpc>
             </a:pPr>
             <a:r>
-              <a:rPr sz="1250" b="1">
+              <a:rPr sz="1480" b="1">
                 <a:solidFill>
                   <a:srgbClr val="1A1D29"/>
                 </a:solidFill>
@@ -10434,7 +10434,7 @@
               </a:spcBef>
             </a:pPr>
             <a:r>
-              <a:rPr sz="850" b="0">
+              <a:rPr sz="1000" b="0">
                 <a:solidFill>
                   <a:srgbClr val="3A3F4D"/>
                 </a:solidFill>
@@ -10454,7 +10454,7 @@
         </p:nvSpPr>
         <p:spPr>
           <a:xfrm>
-            <a:off x="3862800" y="1656000"/>
+            <a:off x="3862800" y="1728000"/>
             <a:ext cx="2962800" cy="3168000"/>
           </a:xfrm>
           <a:prstGeom prst="rect">
@@ -10500,7 +10500,7 @@
         </p:nvSpPr>
         <p:spPr>
           <a:xfrm>
-            <a:off x="3862800" y="1656000"/>
+            <a:off x="3862800" y="1728000"/>
             <a:ext cx="2962800" cy="32400"/>
           </a:xfrm>
           <a:prstGeom prst="rect">
@@ -10544,7 +10544,7 @@
         </p:nvSpPr>
         <p:spPr>
           <a:xfrm>
-            <a:off x="4114800" y="1908000"/>
+            <a:off x="4114800" y="1980000"/>
             <a:ext cx="2458800" cy="2664000"/>
           </a:xfrm>
           <a:prstGeom prst="rect">
@@ -10567,7 +10567,7 @@
               </a:spcAft>
             </a:pPr>
             <a:r>
-              <a:rPr sz="1500" b="0">
+              <a:rPr sz="1770" b="0">
                 <a:solidFill>
                   <a:srgbClr val="C6A15B"/>
                 </a:solidFill>
@@ -10584,7 +10584,7 @@
               </a:lnSpc>
             </a:pPr>
             <a:r>
-              <a:rPr sz="1250" b="1">
+              <a:rPr sz="1480" b="1">
                 <a:solidFill>
                   <a:srgbClr val="1A1D29"/>
                 </a:solidFill>
@@ -10601,7 +10601,7 @@
               </a:lnSpc>
             </a:pPr>
             <a:r>
-              <a:rPr sz="1250" b="1">
+              <a:rPr sz="1480" b="1">
                 <a:solidFill>
                   <a:srgbClr val="1A1D29"/>
                 </a:solidFill>
@@ -10618,7 +10618,7 @@
               </a:lnSpc>
             </a:pPr>
             <a:r>
-              <a:rPr sz="1250" b="1">
+              <a:rPr sz="1480" b="1">
                 <a:solidFill>
                   <a:srgbClr val="1A1D29"/>
                 </a:solidFill>
@@ -10638,7 +10638,7 @@
               </a:spcBef>
             </a:pPr>
             <a:r>
-              <a:rPr sz="850" b="0">
+              <a:rPr sz="1000" b="0">
                 <a:solidFill>
                   <a:srgbClr val="3A3F4D"/>
                 </a:solidFill>
@@ -10658,7 +10658,7 @@
         </p:nvSpPr>
         <p:spPr>
           <a:xfrm>
-            <a:off x="7041600" y="1656000"/>
+            <a:off x="7041600" y="1728000"/>
             <a:ext cx="2962800" cy="3168000"/>
           </a:xfrm>
           <a:prstGeom prst="rect">
@@ -10704,7 +10704,7 @@
         </p:nvSpPr>
         <p:spPr>
           <a:xfrm>
-            <a:off x="7041600" y="1656000"/>
+            <a:off x="7041600" y="1728000"/>
             <a:ext cx="2962800" cy="32400"/>
           </a:xfrm>
           <a:prstGeom prst="rect">
@@ -10748,7 +10748,7 @@
         </p:nvSpPr>
         <p:spPr>
           <a:xfrm>
-            <a:off x="7293600" y="1908000"/>
+            <a:off x="7293600" y="1980000"/>
             <a:ext cx="2458800" cy="2664000"/>
           </a:xfrm>
           <a:prstGeom prst="rect">
@@ -10771,7 +10771,7 @@
               </a:spcAft>
             </a:pPr>
             <a:r>
-              <a:rPr sz="1500" b="0">
+              <a:rPr sz="1770" b="0">
                 <a:solidFill>
                   <a:srgbClr val="C6A15B"/>
                 </a:solidFill>
@@ -10788,7 +10788,7 @@
               </a:lnSpc>
             </a:pPr>
             <a:r>
-              <a:rPr sz="1250" b="1">
+              <a:rPr sz="1480" b="1">
                 <a:solidFill>
                   <a:srgbClr val="1A1D29"/>
                 </a:solidFill>
@@ -10805,7 +10805,7 @@
               </a:lnSpc>
             </a:pPr>
             <a:r>
-              <a:rPr sz="1250" b="1">
+              <a:rPr sz="1480" b="1">
                 <a:solidFill>
                   <a:srgbClr val="1A1D29"/>
                 </a:solidFill>
@@ -10822,7 +10822,7 @@
               </a:lnSpc>
             </a:pPr>
             <a:r>
-              <a:rPr sz="1250" b="1">
+              <a:rPr sz="1480" b="1">
                 <a:solidFill>
                   <a:srgbClr val="1A1D29"/>
                 </a:solidFill>
@@ -10842,7 +10842,7 @@
               </a:spcBef>
             </a:pPr>
             <a:r>
-              <a:rPr sz="850" b="0">
+              <a:rPr sz="1000" b="0">
                 <a:solidFill>
                   <a:srgbClr val="3A3F4D"/>
                 </a:solidFill>
@@ -10862,7 +10862,7 @@
         </p:nvSpPr>
         <p:spPr>
           <a:xfrm>
-            <a:off x="684000" y="5076000"/>
+            <a:off x="684000" y="5148000"/>
             <a:ext cx="9324000" cy="612000"/>
           </a:xfrm>
           <a:prstGeom prst="rect">
@@ -10906,7 +10906,7 @@
         </p:nvSpPr>
         <p:spPr>
           <a:xfrm>
-            <a:off x="972000" y="5263200"/>
+            <a:off x="972000" y="5335200"/>
             <a:ext cx="864000" cy="237600"/>
           </a:xfrm>
           <a:prstGeom prst="rect">
@@ -10950,7 +10950,7 @@
         </p:nvSpPr>
         <p:spPr>
           <a:xfrm>
-            <a:off x="972000" y="5313600"/>
+            <a:off x="972000" y="5385600"/>
             <a:ext cx="864000" cy="144000"/>
           </a:xfrm>
           <a:prstGeom prst="rect">
@@ -10970,7 +10970,7 @@
               </a:lnSpc>
             </a:pPr>
             <a:r>
-              <a:rPr sz="700" b="0" spc="200">
+              <a:rPr sz="830" b="0" spc="200">
                 <a:solidFill>
                   <a:srgbClr val="E2C88A"/>
                 </a:solidFill>
@@ -10990,7 +10990,7 @@
         </p:nvSpPr>
         <p:spPr>
           <a:xfrm>
-            <a:off x="2052000" y="5076000"/>
+            <a:off x="2052000" y="5148000"/>
             <a:ext cx="7704000" cy="612000"/>
           </a:xfrm>
           <a:prstGeom prst="rect">
@@ -11010,7 +11010,7 @@
               </a:lnSpc>
             </a:pPr>
             <a:r>
-              <a:rPr sz="1200" b="0">
+              <a:rPr sz="1420" b="0">
                 <a:solidFill>
                   <a:srgbClr val="FFFFFF"/>
                 </a:solidFill>
@@ -11020,7 +11020,7 @@
               <a:t>貴社の</a:t>
             </a:r>
             <a:r>
-              <a:rPr sz="1200" b="0">
+              <a:rPr sz="1420" b="0">
                 <a:solidFill>
                   <a:srgbClr val="E2C88A"/>
                 </a:solidFill>
@@ -11030,7 +11030,7 @@
               <a:t>トップキャリアアドバイザー</a:t>
             </a:r>
             <a:r>
-              <a:rPr sz="1200" b="0">
+              <a:rPr sz="1420" b="0">
                 <a:solidFill>
                   <a:srgbClr val="FFFFFF"/>
                 </a:solidFill>
@@ -11070,7 +11070,7 @@
               </a:lnSpc>
             </a:pPr>
             <a:r>
-              <a:rPr sz="900" b="1">
+              <a:rPr sz="1060" b="1">
                 <a:solidFill>
                   <a:srgbClr val="7A6030"/>
                 </a:solidFill>
@@ -11080,7 +11080,7 @@
               <a:t>MarkGate</a:t>
             </a:r>
             <a:r>
-              <a:rPr sz="700" b="0">
+              <a:rPr sz="830" b="0">
                 <a:solidFill>
                   <a:srgbClr val="5F6672"/>
                 </a:solidFill>
@@ -11120,7 +11120,7 @@
               </a:lnSpc>
             </a:pPr>
             <a:r>
-              <a:rPr sz="900" b="0" spc="100">
+              <a:rPr sz="1060" b="0" spc="100">
                 <a:solidFill>
                   <a:srgbClr val="5F6672"/>
                 </a:solidFill>
@@ -11222,7 +11222,7 @@
               </a:lnSpc>
             </a:pPr>
             <a:r>
-              <a:rPr sz="1700" b="0">
+              <a:rPr sz="2010" b="0">
                 <a:solidFill>
                   <a:srgbClr val="C6A15B"/>
                 </a:solidFill>
@@ -11262,7 +11262,7 @@
               </a:lnSpc>
             </a:pPr>
             <a:r>
-              <a:rPr sz="750" b="0" spc="300">
+              <a:rPr sz="880" b="0" spc="300">
                 <a:solidFill>
                   <a:srgbClr val="E2C88A"/>
                 </a:solidFill>
@@ -11283,7 +11283,7 @@
         <p:spPr>
           <a:xfrm>
             <a:off x="684000" y="792000"/>
-            <a:ext cx="9324000" cy="864000"/>
+            <a:ext cx="9324000" cy="1008000"/>
           </a:xfrm>
           <a:prstGeom prst="rect">
             <a:avLst/>
@@ -11302,7 +11302,7 @@
               </a:lnSpc>
             </a:pPr>
             <a:r>
-              <a:rPr sz="2200" b="1">
+              <a:rPr sz="2600" b="1">
                 <a:solidFill>
                   <a:srgbClr val="FFFFFF"/>
                 </a:solidFill>
@@ -11319,7 +11319,7 @@
               </a:lnSpc>
             </a:pPr>
             <a:r>
-              <a:rPr sz="2200" b="1">
+              <a:rPr sz="2600" b="1">
                 <a:solidFill>
                   <a:srgbClr val="FFFFFF"/>
                 </a:solidFill>
@@ -11339,7 +11339,7 @@
         </p:nvSpPr>
         <p:spPr>
           <a:xfrm>
-            <a:off x="684000" y="1728000"/>
+            <a:off x="684000" y="1872000"/>
             <a:ext cx="504000" cy="25200"/>
           </a:xfrm>
           <a:prstGeom prst="rect">
@@ -11383,7 +11383,7 @@
         </p:nvSpPr>
         <p:spPr>
           <a:xfrm>
-            <a:off x="684000" y="2088000"/>
+            <a:off x="684000" y="2232000"/>
             <a:ext cx="4554000" cy="1584000"/>
           </a:xfrm>
           <a:prstGeom prst="rect">
@@ -11429,7 +11429,7 @@
         </p:nvSpPr>
         <p:spPr>
           <a:xfrm>
-            <a:off x="936000" y="2304000"/>
+            <a:off x="936000" y="2448000"/>
             <a:ext cx="360000" cy="360000"/>
           </a:xfrm>
           <a:prstGeom prst="rect">
@@ -11449,7 +11449,7 @@
               </a:lnSpc>
             </a:pPr>
             <a:r>
-              <a:rPr sz="1400" b="0">
+              <a:rPr sz="1650" b="0">
                 <a:solidFill>
                   <a:srgbClr val="E2C88A"/>
                 </a:solidFill>
@@ -11469,7 +11469,7 @@
         </p:nvSpPr>
         <p:spPr>
           <a:xfrm>
-            <a:off x="1368000" y="2304000"/>
+            <a:off x="1368000" y="2448000"/>
             <a:ext cx="3618000" cy="1152000"/>
           </a:xfrm>
           <a:prstGeom prst="rect">
@@ -11492,7 +11492,7 @@
               </a:spcAft>
             </a:pPr>
             <a:r>
-              <a:rPr sz="1150" b="1">
+              <a:rPr sz="1360" b="1">
                 <a:solidFill>
                   <a:srgbClr val="FFFFFF"/>
                 </a:solidFill>
@@ -11509,7 +11509,7 @@
               </a:lnSpc>
             </a:pPr>
             <a:r>
-              <a:rPr sz="850" b="0">
+              <a:rPr sz="1000" b="0">
                 <a:solidFill>
                   <a:srgbClr val="B9BFCC"/>
                 </a:solidFill>
@@ -11529,7 +11529,7 @@
         </p:nvSpPr>
         <p:spPr>
           <a:xfrm>
-            <a:off x="5454000" y="2088000"/>
+            <a:off x="5454000" y="2232000"/>
             <a:ext cx="4554000" cy="1584000"/>
           </a:xfrm>
           <a:prstGeom prst="rect">
@@ -11575,7 +11575,7 @@
         </p:nvSpPr>
         <p:spPr>
           <a:xfrm>
-            <a:off x="5706000" y="2304000"/>
+            <a:off x="5706000" y="2448000"/>
             <a:ext cx="360000" cy="360000"/>
           </a:xfrm>
           <a:prstGeom prst="rect">
@@ -11595,7 +11595,7 @@
               </a:lnSpc>
             </a:pPr>
             <a:r>
-              <a:rPr sz="1400" b="0">
+              <a:rPr sz="1650" b="0">
                 <a:solidFill>
                   <a:srgbClr val="E2C88A"/>
                 </a:solidFill>
@@ -11615,7 +11615,7 @@
         </p:nvSpPr>
         <p:spPr>
           <a:xfrm>
-            <a:off x="6138000" y="2304000"/>
+            <a:off x="6138000" y="2448000"/>
             <a:ext cx="3618000" cy="1152000"/>
           </a:xfrm>
           <a:prstGeom prst="rect">
@@ -11638,7 +11638,7 @@
               </a:spcAft>
             </a:pPr>
             <a:r>
-              <a:rPr sz="1150" b="1">
+              <a:rPr sz="1360" b="1">
                 <a:solidFill>
                   <a:srgbClr val="FFFFFF"/>
                 </a:solidFill>
@@ -11655,7 +11655,7 @@
               </a:lnSpc>
             </a:pPr>
             <a:r>
-              <a:rPr sz="850" b="0">
+              <a:rPr sz="1000" b="0">
                 <a:solidFill>
                   <a:srgbClr val="B9BFCC"/>
                 </a:solidFill>
@@ -11675,7 +11675,7 @@
         </p:nvSpPr>
         <p:spPr>
           <a:xfrm>
-            <a:off x="684000" y="3888000"/>
+            <a:off x="684000" y="4032000"/>
             <a:ext cx="4554000" cy="1584000"/>
           </a:xfrm>
           <a:prstGeom prst="rect">
@@ -11721,7 +11721,7 @@
         </p:nvSpPr>
         <p:spPr>
           <a:xfrm>
-            <a:off x="936000" y="4104000"/>
+            <a:off x="936000" y="4248000"/>
             <a:ext cx="360000" cy="360000"/>
           </a:xfrm>
           <a:prstGeom prst="rect">
@@ -11741,7 +11741,7 @@
               </a:lnSpc>
             </a:pPr>
             <a:r>
-              <a:rPr sz="1400" b="0">
+              <a:rPr sz="1650" b="0">
                 <a:solidFill>
                   <a:srgbClr val="E2C88A"/>
                 </a:solidFill>
@@ -11761,7 +11761,7 @@
         </p:nvSpPr>
         <p:spPr>
           <a:xfrm>
-            <a:off x="1368000" y="4104000"/>
+            <a:off x="1368000" y="4248000"/>
             <a:ext cx="3618000" cy="1152000"/>
           </a:xfrm>
           <a:prstGeom prst="rect">
@@ -11784,7 +11784,7 @@
               </a:spcAft>
             </a:pPr>
             <a:r>
-              <a:rPr sz="1150" b="1">
+              <a:rPr sz="1360" b="1">
                 <a:solidFill>
                   <a:srgbClr val="FFFFFF"/>
                 </a:solidFill>
@@ -11801,7 +11801,7 @@
               </a:lnSpc>
             </a:pPr>
             <a:r>
-              <a:rPr sz="850" b="0">
+              <a:rPr sz="1000" b="0">
                 <a:solidFill>
                   <a:srgbClr val="B9BFCC"/>
                 </a:solidFill>
@@ -11821,7 +11821,7 @@
         </p:nvSpPr>
         <p:spPr>
           <a:xfrm>
-            <a:off x="5454000" y="3888000"/>
+            <a:off x="5454000" y="4032000"/>
             <a:ext cx="4554000" cy="1584000"/>
           </a:xfrm>
           <a:prstGeom prst="rect">
@@ -11867,7 +11867,7 @@
         </p:nvSpPr>
         <p:spPr>
           <a:xfrm>
-            <a:off x="5706000" y="4104000"/>
+            <a:off x="5706000" y="4248000"/>
             <a:ext cx="360000" cy="360000"/>
           </a:xfrm>
           <a:prstGeom prst="rect">
@@ -11887,7 +11887,7 @@
               </a:lnSpc>
             </a:pPr>
             <a:r>
-              <a:rPr sz="1400" b="0">
+              <a:rPr sz="1650" b="0">
                 <a:solidFill>
                   <a:srgbClr val="E2C88A"/>
                 </a:solidFill>
@@ -11907,7 +11907,7 @@
         </p:nvSpPr>
         <p:spPr>
           <a:xfrm>
-            <a:off x="6138000" y="4104000"/>
+            <a:off x="6138000" y="4248000"/>
             <a:ext cx="3618000" cy="1152000"/>
           </a:xfrm>
           <a:prstGeom prst="rect">
@@ -11930,7 +11930,7 @@
               </a:spcAft>
             </a:pPr>
             <a:r>
-              <a:rPr sz="1150" b="1">
+              <a:rPr sz="1360" b="1">
                 <a:solidFill>
                   <a:srgbClr val="FFFFFF"/>
                 </a:solidFill>
@@ -11947,7 +11947,7 @@
               </a:lnSpc>
             </a:pPr>
             <a:r>
-              <a:rPr sz="850" b="0">
+              <a:rPr sz="1000" b="0">
                 <a:solidFill>
                   <a:srgbClr val="B9BFCC"/>
                 </a:solidFill>
@@ -11967,7 +11967,7 @@
         </p:nvSpPr>
         <p:spPr>
           <a:xfrm>
-            <a:off x="684000" y="5760000"/>
+            <a:off x="684000" y="5904000"/>
             <a:ext cx="9324000" cy="216000"/>
           </a:xfrm>
           <a:prstGeom prst="rect">
@@ -11987,7 +11987,7 @@
               </a:lnSpc>
             </a:pPr>
             <a:r>
-              <a:rPr sz="750" b="0">
+              <a:rPr sz="880" b="0">
                 <a:solidFill>
                   <a:srgbClr val="8E96A8"/>
                 </a:solidFill>
@@ -12027,7 +12027,7 @@
               </a:lnSpc>
             </a:pPr>
             <a:r>
-              <a:rPr sz="900" b="1">
+              <a:rPr sz="1060" b="1">
                 <a:solidFill>
                   <a:srgbClr val="E2C88A"/>
                 </a:solidFill>
@@ -12037,7 +12037,7 @@
               <a:t>MarkGate</a:t>
             </a:r>
             <a:r>
-              <a:rPr sz="700" b="0">
+              <a:rPr sz="830" b="0">
                 <a:solidFill>
                   <a:srgbClr val="8E96A8"/>
                 </a:solidFill>
@@ -12077,7 +12077,7 @@
               </a:lnSpc>
             </a:pPr>
             <a:r>
-              <a:rPr sz="900" b="0" spc="100">
+              <a:rPr sz="1060" b="0" spc="100">
                 <a:solidFill>
                   <a:srgbClr val="8E96A8"/>
                 </a:solidFill>
@@ -12179,7 +12179,7 @@
               </a:lnSpc>
             </a:pPr>
             <a:r>
-              <a:rPr sz="1700" b="0">
+              <a:rPr sz="2010" b="0">
                 <a:solidFill>
                   <a:srgbClr val="C6A15B"/>
                 </a:solidFill>
@@ -12219,7 +12219,7 @@
               </a:lnSpc>
             </a:pPr>
             <a:r>
-              <a:rPr sz="750" b="0" spc="300">
+              <a:rPr sz="880" b="0" spc="300">
                 <a:solidFill>
                   <a:srgbClr val="7A6030"/>
                 </a:solidFill>
@@ -12240,7 +12240,7 @@
         <p:spPr>
           <a:xfrm>
             <a:off x="684000" y="792000"/>
-            <a:ext cx="9324000" cy="432000"/>
+            <a:ext cx="9324000" cy="504000"/>
           </a:xfrm>
           <a:prstGeom prst="rect">
             <a:avLst/>
@@ -12259,7 +12259,7 @@
               </a:lnSpc>
             </a:pPr>
             <a:r>
-              <a:rPr sz="2200" b="1">
+              <a:rPr sz="2600" b="1">
                 <a:solidFill>
                   <a:srgbClr val="1A1D29"/>
                 </a:solidFill>
@@ -12269,7 +12269,7 @@
               <a:t>「探して、送る」から、</a:t>
             </a:r>
             <a:r>
-              <a:rPr sz="2200" b="1">
+              <a:rPr sz="2600" b="1">
                 <a:solidFill>
                   <a:srgbClr val="7A6030"/>
                 </a:solidFill>
@@ -12279,7 +12279,7 @@
               <a:t>「選ばれて、届く」</a:t>
             </a:r>
             <a:r>
-              <a:rPr sz="2200" b="1">
+              <a:rPr sz="2600" b="1">
                 <a:solidFill>
                   <a:srgbClr val="1A1D29"/>
                 </a:solidFill>
@@ -12299,7 +12299,7 @@
         </p:nvSpPr>
         <p:spPr>
           <a:xfrm>
-            <a:off x="684000" y="1296000"/>
+            <a:off x="684000" y="1368000"/>
             <a:ext cx="504000" cy="25200"/>
           </a:xfrm>
           <a:prstGeom prst="rect">
@@ -12343,7 +12343,7 @@
         </p:nvSpPr>
         <p:spPr>
           <a:xfrm>
-            <a:off x="684000" y="1728000"/>
+            <a:off x="684000" y="1800000"/>
             <a:ext cx="4284000" cy="3312000"/>
           </a:xfrm>
           <a:prstGeom prst="rect">
@@ -12389,7 +12389,7 @@
         </p:nvSpPr>
         <p:spPr>
           <a:xfrm>
-            <a:off x="5724000" y="1728000"/>
+            <a:off x="5724000" y="1800000"/>
             <a:ext cx="4284000" cy="3312000"/>
           </a:xfrm>
           <a:prstGeom prst="rect">
@@ -12435,7 +12435,7 @@
         </p:nvSpPr>
         <p:spPr>
           <a:xfrm>
-            <a:off x="5040000" y="1728000"/>
+            <a:off x="5040000" y="1800000"/>
             <a:ext cx="612000" cy="3312000"/>
           </a:xfrm>
           <a:prstGeom prst="rect">
@@ -12455,7 +12455,7 @@
               </a:lnSpc>
             </a:pPr>
             <a:r>
-              <a:rPr sz="2000" b="0">
+              <a:rPr sz="2360" b="0">
                 <a:solidFill>
                   <a:srgbClr val="C6A15B"/>
                 </a:solidFill>
@@ -12475,7 +12475,7 @@
         </p:nvSpPr>
         <p:spPr>
           <a:xfrm>
-            <a:off x="936000" y="1944000"/>
+            <a:off x="936000" y="2016000"/>
             <a:ext cx="1080000" cy="230400"/>
           </a:xfrm>
           <a:prstGeom prst="rect">
@@ -12519,7 +12519,7 @@
         </p:nvSpPr>
         <p:spPr>
           <a:xfrm>
-            <a:off x="936000" y="1998000"/>
+            <a:off x="936000" y="2070000"/>
             <a:ext cx="1080000" cy="144000"/>
           </a:xfrm>
           <a:prstGeom prst="rect">
@@ -12539,7 +12539,7 @@
               </a:lnSpc>
             </a:pPr>
             <a:r>
-              <a:rPr sz="700" b="0" spc="150">
+              <a:rPr sz="830" b="0" spc="150">
                 <a:solidFill>
                   <a:srgbClr val="5F6672"/>
                 </a:solidFill>
@@ -12559,7 +12559,7 @@
         </p:nvSpPr>
         <p:spPr>
           <a:xfrm>
-            <a:off x="936000" y="2268000"/>
+            <a:off x="936000" y="2340000"/>
             <a:ext cx="3780000" cy="288000"/>
           </a:xfrm>
           <a:prstGeom prst="rect">
@@ -12579,7 +12579,7 @@
               </a:lnSpc>
             </a:pPr>
             <a:r>
-              <a:rPr sz="1300" b="1">
+              <a:rPr sz="1530" b="1">
                 <a:solidFill>
                   <a:srgbClr val="1A1D29"/>
                 </a:solidFill>
@@ -12599,7 +12599,7 @@
         </p:nvSpPr>
         <p:spPr>
           <a:xfrm>
-            <a:off x="936000" y="2628000"/>
+            <a:off x="936000" y="2700000"/>
             <a:ext cx="1195200" cy="306000"/>
           </a:xfrm>
           <a:prstGeom prst="rect">
@@ -12645,7 +12645,7 @@
         </p:nvSpPr>
         <p:spPr>
           <a:xfrm>
-            <a:off x="936000" y="2671200"/>
+            <a:off x="936000" y="2743200"/>
             <a:ext cx="1195200" cy="216000"/>
           </a:xfrm>
           <a:prstGeom prst="rect">
@@ -12665,7 +12665,7 @@
               </a:lnSpc>
             </a:pPr>
             <a:r>
-              <a:rPr sz="850" b="0">
+              <a:rPr sz="1000" b="0">
                 <a:solidFill>
                   <a:srgbClr val="1A1D29"/>
                 </a:solidFill>
@@ -12685,7 +12685,7 @@
         </p:nvSpPr>
         <p:spPr>
           <a:xfrm>
-            <a:off x="2167200" y="2678400"/>
+            <a:off x="2167200" y="2750400"/>
             <a:ext cx="216000" cy="216000"/>
           </a:xfrm>
           <a:prstGeom prst="rect">
@@ -12705,7 +12705,7 @@
               </a:lnSpc>
             </a:pPr>
             <a:r>
-              <a:rPr sz="900" b="0">
+              <a:rPr sz="1060" b="0">
                 <a:solidFill>
                   <a:srgbClr val="7A6030"/>
                 </a:solidFill>
@@ -12725,7 +12725,7 @@
         </p:nvSpPr>
         <p:spPr>
           <a:xfrm>
-            <a:off x="2383200" y="2628000"/>
+            <a:off x="2383200" y="2700000"/>
             <a:ext cx="1195200" cy="306000"/>
           </a:xfrm>
           <a:prstGeom prst="rect">
@@ -12771,7 +12771,7 @@
         </p:nvSpPr>
         <p:spPr>
           <a:xfrm>
-            <a:off x="2383200" y="2671200"/>
+            <a:off x="2383200" y="2743200"/>
             <a:ext cx="1195200" cy="216000"/>
           </a:xfrm>
           <a:prstGeom prst="rect">
@@ -12791,7 +12791,7 @@
               </a:lnSpc>
             </a:pPr>
             <a:r>
-              <a:rPr sz="850" b="0">
+              <a:rPr sz="1000" b="0">
                 <a:solidFill>
                   <a:srgbClr val="1A1D29"/>
                 </a:solidFill>
@@ -12811,7 +12811,7 @@
         </p:nvSpPr>
         <p:spPr>
           <a:xfrm>
-            <a:off x="3614400" y="2678400"/>
+            <a:off x="3614400" y="2750400"/>
             <a:ext cx="216000" cy="216000"/>
           </a:xfrm>
           <a:prstGeom prst="rect">
@@ -12831,7 +12831,7 @@
               </a:lnSpc>
             </a:pPr>
             <a:r>
-              <a:rPr sz="900" b="0">
+              <a:rPr sz="1060" b="0">
                 <a:solidFill>
                   <a:srgbClr val="7A6030"/>
                 </a:solidFill>
@@ -12851,7 +12851,7 @@
         </p:nvSpPr>
         <p:spPr>
           <a:xfrm>
-            <a:off x="3830400" y="2628000"/>
+            <a:off x="3830400" y="2700000"/>
             <a:ext cx="741600" cy="306000"/>
           </a:xfrm>
           <a:prstGeom prst="rect">
@@ -12897,7 +12897,7 @@
         </p:nvSpPr>
         <p:spPr>
           <a:xfrm>
-            <a:off x="3830400" y="2671200"/>
+            <a:off x="3830400" y="2743200"/>
             <a:ext cx="741600" cy="216000"/>
           </a:xfrm>
           <a:prstGeom prst="rect">
@@ -12917,7 +12917,7 @@
               </a:lnSpc>
             </a:pPr>
             <a:r>
-              <a:rPr sz="850" b="0">
+              <a:rPr sz="1000" b="0">
                 <a:solidFill>
                   <a:srgbClr val="1A1D29"/>
                 </a:solidFill>
@@ -12937,7 +12937,7 @@
         </p:nvSpPr>
         <p:spPr>
           <a:xfrm>
-            <a:off x="936000" y="3060000"/>
+            <a:off x="936000" y="3132000"/>
             <a:ext cx="3780000" cy="504000"/>
           </a:xfrm>
           <a:prstGeom prst="rect">
@@ -12957,7 +12957,7 @@
               </a:lnSpc>
             </a:pPr>
             <a:r>
-              <a:rPr sz="850" b="0">
+              <a:rPr sz="1000" b="0">
                 <a:solidFill>
                   <a:srgbClr val="3A3F4D"/>
                 </a:solidFill>
@@ -12977,7 +12977,7 @@
         </p:nvSpPr>
         <p:spPr>
           <a:xfrm>
-            <a:off x="936000" y="3708000"/>
+            <a:off x="936000" y="3780000"/>
             <a:ext cx="3780000" cy="1080000"/>
           </a:xfrm>
           <a:prstGeom prst="rect">
@@ -12997,7 +12997,7 @@
               </a:lnSpc>
             </a:pPr>
             <a:r>
-              <a:rPr sz="850" b="0">
+              <a:rPr sz="1000" b="0">
                 <a:solidFill>
                   <a:srgbClr val="5F6672"/>
                 </a:solidFill>
@@ -13007,7 +13007,7 @@
               <a:t>－ </a:t>
             </a:r>
             <a:r>
-              <a:rPr sz="850" b="0">
+              <a:rPr sz="1000" b="0">
                 <a:solidFill>
                   <a:srgbClr val="3A3F4D"/>
                 </a:solidFill>
@@ -13024,7 +13024,7 @@
               </a:lnSpc>
             </a:pPr>
             <a:r>
-              <a:rPr sz="850" b="0">
+              <a:rPr sz="1000" b="0">
                 <a:solidFill>
                   <a:srgbClr val="5F6672"/>
                 </a:solidFill>
@@ -13034,7 +13034,7 @@
               <a:t>－ </a:t>
             </a:r>
             <a:r>
-              <a:rPr sz="850" b="0">
+              <a:rPr sz="1000" b="0">
                 <a:solidFill>
                   <a:srgbClr val="3A3F4D"/>
                 </a:solidFill>
@@ -13051,7 +13051,7 @@
               </a:lnSpc>
             </a:pPr>
             <a:r>
-              <a:rPr sz="850" b="0">
+              <a:rPr sz="1000" b="0">
                 <a:solidFill>
                   <a:srgbClr val="5F6672"/>
                 </a:solidFill>
@@ -13061,7 +13061,7 @@
               <a:t>－ </a:t>
             </a:r>
             <a:r>
-              <a:rPr sz="850" b="0">
+              <a:rPr sz="1000" b="0">
                 <a:solidFill>
                   <a:srgbClr val="3A3F4D"/>
                 </a:solidFill>
@@ -13081,7 +13081,7 @@
         </p:nvSpPr>
         <p:spPr>
           <a:xfrm>
-            <a:off x="5976000" y="1944000"/>
+            <a:off x="5976000" y="2016000"/>
             <a:ext cx="1224000" cy="230400"/>
           </a:xfrm>
           <a:prstGeom prst="rect">
@@ -13125,7 +13125,7 @@
         </p:nvSpPr>
         <p:spPr>
           <a:xfrm>
-            <a:off x="5976000" y="1998000"/>
+            <a:off x="5976000" y="2070000"/>
             <a:ext cx="1224000" cy="144000"/>
           </a:xfrm>
           <a:prstGeom prst="rect">
@@ -13145,7 +13145,7 @@
               </a:lnSpc>
             </a:pPr>
             <a:r>
-              <a:rPr sz="700" b="0" spc="150">
+              <a:rPr sz="830" b="0" spc="150">
                 <a:solidFill>
                   <a:srgbClr val="E2C88A"/>
                 </a:solidFill>
@@ -13165,7 +13165,7 @@
         </p:nvSpPr>
         <p:spPr>
           <a:xfrm>
-            <a:off x="5976000" y="2268000"/>
+            <a:off x="5976000" y="2340000"/>
             <a:ext cx="3780000" cy="288000"/>
           </a:xfrm>
           <a:prstGeom prst="rect">
@@ -13185,7 +13185,7 @@
               </a:lnSpc>
             </a:pPr>
             <a:r>
-              <a:rPr sz="1300" b="1">
+              <a:rPr sz="1530" b="1">
                 <a:solidFill>
                   <a:srgbClr val="1A1D29"/>
                 </a:solidFill>
@@ -13205,7 +13205,7 @@
         </p:nvSpPr>
         <p:spPr>
           <a:xfrm>
-            <a:off x="5976000" y="2628000"/>
+            <a:off x="5976000" y="2700000"/>
             <a:ext cx="741600" cy="306000"/>
           </a:xfrm>
           <a:prstGeom prst="rect">
@@ -13251,7 +13251,7 @@
         </p:nvSpPr>
         <p:spPr>
           <a:xfrm>
-            <a:off x="5976000" y="2671200"/>
+            <a:off x="5976000" y="2743200"/>
             <a:ext cx="741600" cy="216000"/>
           </a:xfrm>
           <a:prstGeom prst="rect">
@@ -13271,7 +13271,7 @@
               </a:lnSpc>
             </a:pPr>
             <a:r>
-              <a:rPr sz="850" b="0">
+              <a:rPr sz="1000" b="0">
                 <a:solidFill>
                   <a:srgbClr val="1A1D29"/>
                 </a:solidFill>
@@ -13291,7 +13291,7 @@
         </p:nvSpPr>
         <p:spPr>
           <a:xfrm>
-            <a:off x="6753600" y="2678400"/>
+            <a:off x="6753600" y="2750400"/>
             <a:ext cx="216000" cy="216000"/>
           </a:xfrm>
           <a:prstGeom prst="rect">
@@ -13311,7 +13311,7 @@
               </a:lnSpc>
             </a:pPr>
             <a:r>
-              <a:rPr sz="900" b="0">
+              <a:rPr sz="1060" b="0">
                 <a:solidFill>
                   <a:srgbClr val="7A6030"/>
                 </a:solidFill>
@@ -13331,7 +13331,7 @@
         </p:nvSpPr>
         <p:spPr>
           <a:xfrm>
-            <a:off x="6969600" y="2628000"/>
+            <a:off x="6969600" y="2700000"/>
             <a:ext cx="1497600" cy="306000"/>
           </a:xfrm>
           <a:prstGeom prst="rect">
@@ -13377,7 +13377,7 @@
         </p:nvSpPr>
         <p:spPr>
           <a:xfrm>
-            <a:off x="6969600" y="2671200"/>
+            <a:off x="6969600" y="2743200"/>
             <a:ext cx="1497600" cy="216000"/>
           </a:xfrm>
           <a:prstGeom prst="rect">
@@ -13397,7 +13397,7 @@
               </a:lnSpc>
             </a:pPr>
             <a:r>
-              <a:rPr sz="850" b="0">
+              <a:rPr sz="1000" b="0">
                 <a:solidFill>
                   <a:srgbClr val="E2C88A"/>
                 </a:solidFill>
@@ -13417,7 +13417,7 @@
         </p:nvSpPr>
         <p:spPr>
           <a:xfrm>
-            <a:off x="8503200" y="2678400"/>
+            <a:off x="8503200" y="2750400"/>
             <a:ext cx="216000" cy="216000"/>
           </a:xfrm>
           <a:prstGeom prst="rect">
@@ -13437,7 +13437,7 @@
               </a:lnSpc>
             </a:pPr>
             <a:r>
-              <a:rPr sz="900" b="0">
+              <a:rPr sz="1060" b="0">
                 <a:solidFill>
                   <a:srgbClr val="7A6030"/>
                 </a:solidFill>
@@ -13457,7 +13457,7 @@
         </p:nvSpPr>
         <p:spPr>
           <a:xfrm>
-            <a:off x="8719200" y="2628000"/>
+            <a:off x="8719200" y="2700000"/>
             <a:ext cx="1044000" cy="306000"/>
           </a:xfrm>
           <a:prstGeom prst="rect">
@@ -13503,7 +13503,7 @@
         </p:nvSpPr>
         <p:spPr>
           <a:xfrm>
-            <a:off x="8719200" y="2671200"/>
+            <a:off x="8719200" y="2743200"/>
             <a:ext cx="1044000" cy="216000"/>
           </a:xfrm>
           <a:prstGeom prst="rect">
@@ -13523,7 +13523,7 @@
               </a:lnSpc>
             </a:pPr>
             <a:r>
-              <a:rPr sz="850" b="0">
+              <a:rPr sz="1000" b="0">
                 <a:solidFill>
                   <a:srgbClr val="1A1D29"/>
                 </a:solidFill>
@@ -13543,7 +13543,7 @@
         </p:nvSpPr>
         <p:spPr>
           <a:xfrm>
-            <a:off x="5976000" y="3060000"/>
+            <a:off x="5976000" y="3132000"/>
             <a:ext cx="3780000" cy="504000"/>
           </a:xfrm>
           <a:prstGeom prst="rect">
@@ -13563,7 +13563,7 @@
               </a:lnSpc>
             </a:pPr>
             <a:r>
-              <a:rPr sz="850" b="0">
+              <a:rPr sz="1000" b="0">
                 <a:solidFill>
                   <a:srgbClr val="3A3F4D"/>
                 </a:solidFill>
@@ -13583,7 +13583,7 @@
         </p:nvSpPr>
         <p:spPr>
           <a:xfrm>
-            <a:off x="5976000" y="3708000"/>
+            <a:off x="5976000" y="3780000"/>
             <a:ext cx="3780000" cy="1152000"/>
           </a:xfrm>
           <a:prstGeom prst="rect">
@@ -13603,7 +13603,7 @@
               </a:lnSpc>
             </a:pPr>
             <a:r>
-              <a:rPr sz="850" b="0">
+              <a:rPr sz="1000" b="0">
                 <a:solidFill>
                   <a:srgbClr val="7A6030"/>
                 </a:solidFill>
@@ -13613,7 +13613,7 @@
               <a:t>－ </a:t>
             </a:r>
             <a:r>
-              <a:rPr sz="850" b="0">
+              <a:rPr sz="1000" b="0">
                 <a:solidFill>
                   <a:srgbClr val="3A3F4D"/>
                 </a:solidFill>
@@ -13630,7 +13630,7 @@
               </a:lnSpc>
             </a:pPr>
             <a:r>
-              <a:rPr sz="850" b="0">
+              <a:rPr sz="1000" b="0">
                 <a:solidFill>
                   <a:srgbClr val="7A6030"/>
                 </a:solidFill>
@@ -13640,7 +13640,7 @@
               <a:t>－ </a:t>
             </a:r>
             <a:r>
-              <a:rPr sz="850" b="0">
+              <a:rPr sz="1000" b="0">
                 <a:solidFill>
                   <a:srgbClr val="3A3F4D"/>
                 </a:solidFill>
@@ -13657,7 +13657,7 @@
               </a:lnSpc>
             </a:pPr>
             <a:r>
-              <a:rPr sz="850" b="0">
+              <a:rPr sz="1000" b="0">
                 <a:solidFill>
                   <a:srgbClr val="7A6030"/>
                 </a:solidFill>
@@ -13667,7 +13667,7 @@
               <a:t>－ </a:t>
             </a:r>
             <a:r>
-              <a:rPr sz="850" b="0">
+              <a:rPr sz="1000" b="0">
                 <a:solidFill>
                   <a:srgbClr val="3A3F4D"/>
                 </a:solidFill>
@@ -13707,7 +13707,7 @@
               </a:lnSpc>
             </a:pPr>
             <a:r>
-              <a:rPr sz="900" b="1">
+              <a:rPr sz="1060" b="1">
                 <a:solidFill>
                   <a:srgbClr val="7A6030"/>
                 </a:solidFill>
@@ -13717,7 +13717,7 @@
               <a:t>MarkGate</a:t>
             </a:r>
             <a:r>
-              <a:rPr sz="700" b="0">
+              <a:rPr sz="830" b="0">
                 <a:solidFill>
                   <a:srgbClr val="5F6672"/>
                 </a:solidFill>
@@ -13757,7 +13757,7 @@
               </a:lnSpc>
             </a:pPr>
             <a:r>
-              <a:rPr sz="900" b="0" spc="100">
+              <a:rPr sz="1060" b="0" spc="100">
                 <a:solidFill>
                   <a:srgbClr val="5F6672"/>
                 </a:solidFill>
@@ -13859,7 +13859,7 @@
               </a:lnSpc>
             </a:pPr>
             <a:r>
-              <a:rPr sz="1700" b="0">
+              <a:rPr sz="2010" b="0">
                 <a:solidFill>
                   <a:srgbClr val="C6A15B"/>
                 </a:solidFill>
@@ -13899,7 +13899,7 @@
               </a:lnSpc>
             </a:pPr>
             <a:r>
-              <a:rPr sz="750" b="0" spc="300">
+              <a:rPr sz="880" b="0" spc="300">
                 <a:solidFill>
                   <a:srgbClr val="7A6030"/>
                 </a:solidFill>
@@ -13920,7 +13920,7 @@
         <p:spPr>
           <a:xfrm>
             <a:off x="684000" y="792000"/>
-            <a:ext cx="9324000" cy="432000"/>
+            <a:ext cx="9324000" cy="504000"/>
           </a:xfrm>
           <a:prstGeom prst="rect">
             <a:avLst/>
@@ -13939,7 +13939,7 @@
               </a:lnSpc>
             </a:pPr>
             <a:r>
-              <a:rPr sz="2200" b="1">
+              <a:rPr sz="2600" b="1">
                 <a:solidFill>
                   <a:srgbClr val="1A1D29"/>
                 </a:solidFill>
@@ -13959,8 +13959,8 @@
         </p:nvSpPr>
         <p:spPr>
           <a:xfrm>
-            <a:off x="684000" y="1260000"/>
-            <a:ext cx="9000000" cy="360000"/>
+            <a:off x="684000" y="1332000"/>
+            <a:ext cx="9180000" cy="504000"/>
           </a:xfrm>
           <a:prstGeom prst="rect">
             <a:avLst/>
@@ -13979,7 +13979,7 @@
               </a:lnSpc>
             </a:pPr>
             <a:r>
-              <a:rPr sz="1000" b="0">
+              <a:rPr sz="1180" b="0">
                 <a:solidFill>
                   <a:srgbClr val="3A3F4D"/>
                 </a:solidFill>
@@ -13999,7 +13999,7 @@
         </p:nvSpPr>
         <p:spPr>
           <a:xfrm>
-            <a:off x="684000" y="1656000"/>
+            <a:off x="684000" y="1908000"/>
             <a:ext cx="504000" cy="25200"/>
           </a:xfrm>
           <a:prstGeom prst="rect">
@@ -14043,7 +14043,7 @@
         </p:nvSpPr>
         <p:spPr>
           <a:xfrm>
-            <a:off x="684000" y="1980000"/>
+            <a:off x="684000" y="2232000"/>
             <a:ext cx="2962800" cy="2664000"/>
           </a:xfrm>
           <a:prstGeom prst="rect">
@@ -14089,7 +14089,7 @@
         </p:nvSpPr>
         <p:spPr>
           <a:xfrm>
-            <a:off x="936000" y="4600800"/>
+            <a:off x="936000" y="4852800"/>
             <a:ext cx="2458800" cy="28800"/>
           </a:xfrm>
           <a:prstGeom prst="rect">
@@ -14133,7 +14133,7 @@
         </p:nvSpPr>
         <p:spPr>
           <a:xfrm>
-            <a:off x="936000" y="2196000"/>
+            <a:off x="936000" y="2448000"/>
             <a:ext cx="2458800" cy="2232000"/>
           </a:xfrm>
           <a:prstGeom prst="rect">
@@ -14156,7 +14156,7 @@
               </a:spcAft>
             </a:pPr>
             <a:r>
-              <a:rPr sz="1500" b="0">
+              <a:rPr sz="1770" b="0">
                 <a:solidFill>
                   <a:srgbClr val="C6A15B"/>
                 </a:solidFill>
@@ -14173,7 +14173,7 @@
               </a:lnSpc>
             </a:pPr>
             <a:r>
-              <a:rPr sz="1200" b="1">
+              <a:rPr sz="1420" b="1">
                 <a:solidFill>
                   <a:srgbClr val="1A1D29"/>
                 </a:solidFill>
@@ -14190,7 +14190,7 @@
               </a:lnSpc>
             </a:pPr>
             <a:r>
-              <a:rPr sz="1200" b="1">
+              <a:rPr sz="1420" b="1">
                 <a:solidFill>
                   <a:srgbClr val="1A1D29"/>
                 </a:solidFill>
@@ -14210,7 +14210,7 @@
               </a:spcBef>
             </a:pPr>
             <a:r>
-              <a:rPr sz="850" b="0">
+              <a:rPr sz="1000" b="0">
                 <a:solidFill>
                   <a:srgbClr val="3A3F4D"/>
                 </a:solidFill>
@@ -14230,7 +14230,7 @@
         </p:nvSpPr>
         <p:spPr>
           <a:xfrm>
-            <a:off x="3862800" y="1980000"/>
+            <a:off x="3862800" y="2232000"/>
             <a:ext cx="2962800" cy="2664000"/>
           </a:xfrm>
           <a:prstGeom prst="rect">
@@ -14276,7 +14276,7 @@
         </p:nvSpPr>
         <p:spPr>
           <a:xfrm>
-            <a:off x="4114800" y="4600800"/>
+            <a:off x="4114800" y="4852800"/>
             <a:ext cx="2458800" cy="28800"/>
           </a:xfrm>
           <a:prstGeom prst="rect">
@@ -14320,7 +14320,7 @@
         </p:nvSpPr>
         <p:spPr>
           <a:xfrm>
-            <a:off x="4114800" y="2196000"/>
+            <a:off x="4114800" y="2448000"/>
             <a:ext cx="2458800" cy="2232000"/>
           </a:xfrm>
           <a:prstGeom prst="rect">
@@ -14343,7 +14343,7 @@
               </a:spcAft>
             </a:pPr>
             <a:r>
-              <a:rPr sz="1500" b="0">
+              <a:rPr sz="1770" b="0">
                 <a:solidFill>
                   <a:srgbClr val="C6A15B"/>
                 </a:solidFill>
@@ -14360,7 +14360,7 @@
               </a:lnSpc>
             </a:pPr>
             <a:r>
-              <a:rPr sz="1200" b="1">
+              <a:rPr sz="1420" b="1">
                 <a:solidFill>
                   <a:srgbClr val="1A1D29"/>
                 </a:solidFill>
@@ -14377,7 +14377,7 @@
               </a:lnSpc>
             </a:pPr>
             <a:r>
-              <a:rPr sz="1200" b="1">
+              <a:rPr sz="1420" b="1">
                 <a:solidFill>
                   <a:srgbClr val="1A1D29"/>
                 </a:solidFill>
@@ -14397,7 +14397,7 @@
               </a:spcBef>
             </a:pPr>
             <a:r>
-              <a:rPr sz="850" b="0">
+              <a:rPr sz="1000" b="0">
                 <a:solidFill>
                   <a:srgbClr val="3A3F4D"/>
                 </a:solidFill>
@@ -14417,7 +14417,7 @@
         </p:nvSpPr>
         <p:spPr>
           <a:xfrm>
-            <a:off x="7041600" y="1980000"/>
+            <a:off x="7041600" y="2232000"/>
             <a:ext cx="2962800" cy="2664000"/>
           </a:xfrm>
           <a:prstGeom prst="rect">
@@ -14463,7 +14463,7 @@
         </p:nvSpPr>
         <p:spPr>
           <a:xfrm>
-            <a:off x="7293600" y="4600800"/>
+            <a:off x="7293600" y="4852800"/>
             <a:ext cx="2458800" cy="28800"/>
           </a:xfrm>
           <a:prstGeom prst="rect">
@@ -14507,7 +14507,7 @@
         </p:nvSpPr>
         <p:spPr>
           <a:xfrm>
-            <a:off x="7293600" y="2196000"/>
+            <a:off x="7293600" y="2448000"/>
             <a:ext cx="2458800" cy="2232000"/>
           </a:xfrm>
           <a:prstGeom prst="rect">
@@ -14530,7 +14530,7 @@
               </a:spcAft>
             </a:pPr>
             <a:r>
-              <a:rPr sz="1500" b="0">
+              <a:rPr sz="1770" b="0">
                 <a:solidFill>
                   <a:srgbClr val="C6A15B"/>
                 </a:solidFill>
@@ -14547,7 +14547,7 @@
               </a:lnSpc>
             </a:pPr>
             <a:r>
-              <a:rPr sz="1200" b="1">
+              <a:rPr sz="1420" b="1">
                 <a:solidFill>
                   <a:srgbClr val="1A1D29"/>
                 </a:solidFill>
@@ -14564,7 +14564,7 @@
               </a:lnSpc>
             </a:pPr>
             <a:r>
-              <a:rPr sz="1200" b="1">
+              <a:rPr sz="1420" b="1">
                 <a:solidFill>
                   <a:srgbClr val="1A1D29"/>
                 </a:solidFill>
@@ -14584,7 +14584,7 @@
               </a:spcBef>
             </a:pPr>
             <a:r>
-              <a:rPr sz="850" b="0">
+              <a:rPr sz="1000" b="0">
                 <a:solidFill>
                   <a:srgbClr val="3A3F4D"/>
                 </a:solidFill>
@@ -14604,7 +14604,7 @@
         </p:nvSpPr>
         <p:spPr>
           <a:xfrm>
-            <a:off x="684000" y="4896000"/>
+            <a:off x="684000" y="5148000"/>
             <a:ext cx="9324000" cy="792000"/>
           </a:xfrm>
           <a:prstGeom prst="rect">
@@ -14648,7 +14648,7 @@
         </p:nvSpPr>
         <p:spPr>
           <a:xfrm>
-            <a:off x="684000" y="4896000"/>
+            <a:off x="684000" y="5148000"/>
             <a:ext cx="43200" cy="792000"/>
           </a:xfrm>
           <a:prstGeom prst="rect">
@@ -14692,7 +14692,7 @@
         </p:nvSpPr>
         <p:spPr>
           <a:xfrm>
-            <a:off x="972000" y="4896000"/>
+            <a:off x="972000" y="5148000"/>
             <a:ext cx="8820000" cy="792000"/>
           </a:xfrm>
           <a:prstGeom prst="rect">
@@ -14712,7 +14712,7 @@
               </a:lnSpc>
             </a:pPr>
             <a:r>
-              <a:rPr sz="1150" b="0">
+              <a:rPr sz="1360" b="0">
                 <a:solidFill>
                   <a:srgbClr val="1A1D29"/>
                 </a:solidFill>
@@ -14722,7 +14722,7 @@
               <a:t>“</a:t>
             </a:r>
             <a:r>
-              <a:rPr sz="1150" b="1">
+              <a:rPr sz="1360" b="1">
                 <a:solidFill>
                   <a:srgbClr val="7A6030"/>
                 </a:solidFill>
@@ -14732,7 +14732,7 @@
               <a:t>Mark</a:t>
             </a:r>
             <a:r>
-              <a:rPr sz="1150" b="0">
+              <a:rPr sz="1360" b="0">
                 <a:solidFill>
                   <a:srgbClr val="1A1D29"/>
                 </a:solidFill>
@@ -14742,7 +14742,7 @@
               <a:t>（一流の証）”を持つ者だけが立つ、キャリアの“</a:t>
             </a:r>
             <a:r>
-              <a:rPr sz="1150" b="1">
+              <a:rPr sz="1360" b="1">
                 <a:solidFill>
                   <a:srgbClr val="7A6030"/>
                 </a:solidFill>
@@ -14752,7 +14752,7 @@
               <a:t>Gate</a:t>
             </a:r>
             <a:r>
-              <a:rPr sz="1150" b="0">
+              <a:rPr sz="1360" b="0">
                 <a:solidFill>
                   <a:srgbClr val="1A1D29"/>
                 </a:solidFill>
@@ -14769,7 +14769,7 @@
               </a:lnSpc>
             </a:pPr>
             <a:r>
-              <a:rPr sz="1150" b="0">
+              <a:rPr sz="1360" b="0">
                 <a:solidFill>
                   <a:srgbClr val="1A1D29"/>
                 </a:solidFill>
@@ -14809,7 +14809,7 @@
               </a:lnSpc>
             </a:pPr>
             <a:r>
-              <a:rPr sz="900" b="1">
+              <a:rPr sz="1060" b="1">
                 <a:solidFill>
                   <a:srgbClr val="7A6030"/>
                 </a:solidFill>
@@ -14819,7 +14819,7 @@
               <a:t>MarkGate</a:t>
             </a:r>
             <a:r>
-              <a:rPr sz="700" b="0">
+              <a:rPr sz="830" b="0">
                 <a:solidFill>
                   <a:srgbClr val="5F6672"/>
                 </a:solidFill>
@@ -14859,7 +14859,7 @@
               </a:lnSpc>
             </a:pPr>
             <a:r>
-              <a:rPr sz="900" b="0" spc="100">
+              <a:rPr sz="1060" b="0" spc="100">
                 <a:solidFill>
                   <a:srgbClr val="5F6672"/>
                 </a:solidFill>
@@ -14961,7 +14961,7 @@
               </a:lnSpc>
             </a:pPr>
             <a:r>
-              <a:rPr sz="1700" b="0">
+              <a:rPr sz="2010" b="0">
                 <a:solidFill>
                   <a:srgbClr val="C6A15B"/>
                 </a:solidFill>
@@ -15001,7 +15001,7 @@
               </a:lnSpc>
             </a:pPr>
             <a:r>
-              <a:rPr sz="750" b="0" spc="300">
+              <a:rPr sz="880" b="0" spc="300">
                 <a:solidFill>
                   <a:srgbClr val="7A6030"/>
                 </a:solidFill>
@@ -15022,7 +15022,7 @@
         <p:spPr>
           <a:xfrm>
             <a:off x="684000" y="792000"/>
-            <a:ext cx="9324000" cy="432000"/>
+            <a:ext cx="9324000" cy="504000"/>
           </a:xfrm>
           <a:prstGeom prst="rect">
             <a:avLst/>
@@ -15041,7 +15041,7 @@
               </a:lnSpc>
             </a:pPr>
             <a:r>
-              <a:rPr sz="2200" b="1">
+              <a:rPr sz="2600" b="1">
                 <a:solidFill>
                   <a:srgbClr val="1A1D29"/>
                 </a:solidFill>
@@ -15061,7 +15061,7 @@
         </p:nvSpPr>
         <p:spPr>
           <a:xfrm>
-            <a:off x="684000" y="1296000"/>
+            <a:off x="684000" y="1368000"/>
             <a:ext cx="504000" cy="25200"/>
           </a:xfrm>
           <a:prstGeom prst="rect">
@@ -15105,7 +15105,7 @@
         </p:nvSpPr>
         <p:spPr>
           <a:xfrm>
-            <a:off x="684000" y="1584000"/>
+            <a:off x="684000" y="1656000"/>
             <a:ext cx="1080000" cy="230400"/>
           </a:xfrm>
           <a:prstGeom prst="rect">
@@ -15149,7 +15149,7 @@
         </p:nvSpPr>
         <p:spPr>
           <a:xfrm>
-            <a:off x="684000" y="1638000"/>
+            <a:off x="684000" y="1710000"/>
             <a:ext cx="1080000" cy="144000"/>
           </a:xfrm>
           <a:prstGeom prst="rect">
@@ -15169,7 +15169,7 @@
               </a:lnSpc>
             </a:pPr>
             <a:r>
-              <a:rPr sz="700" b="0" spc="150">
+              <a:rPr sz="830" b="0" spc="150">
                 <a:solidFill>
                   <a:srgbClr val="E2C88A"/>
                 </a:solidFill>
@@ -15189,8 +15189,8 @@
         </p:nvSpPr>
         <p:spPr>
           <a:xfrm>
-            <a:off x="684000" y="1908000"/>
-            <a:ext cx="1778400" cy="1080000"/>
+            <a:off x="684000" y="1980000"/>
+            <a:ext cx="1778400" cy="1188000"/>
           </a:xfrm>
           <a:prstGeom prst="rect">
             <a:avLst/>
@@ -15235,8 +15235,8 @@
         </p:nvSpPr>
         <p:spPr>
           <a:xfrm>
-            <a:off x="828000" y="2016000"/>
-            <a:ext cx="1490400" cy="864000"/>
+            <a:off x="828000" y="2088000"/>
+            <a:ext cx="1490400" cy="972000"/>
           </a:xfrm>
           <a:prstGeom prst="rect">
             <a:avLst/>
@@ -15258,7 +15258,7 @@
               </a:spcAft>
             </a:pPr>
             <a:r>
-              <a:rPr sz="750" b="0" spc="100">
+              <a:rPr sz="880" b="0" spc="100">
                 <a:solidFill>
                   <a:srgbClr val="7A6030"/>
                 </a:solidFill>
@@ -15278,7 +15278,7 @@
               </a:spcAft>
             </a:pPr>
             <a:r>
-              <a:rPr sz="950" b="1">
+              <a:rPr sz="1120" b="1">
                 <a:solidFill>
                   <a:srgbClr val="1A1D29"/>
                 </a:solidFill>
@@ -15295,7 +15295,7 @@
               </a:lnSpc>
             </a:pPr>
             <a:r>
-              <a:rPr sz="720" b="0">
+              <a:rPr sz="850" b="0">
                 <a:solidFill>
                   <a:srgbClr val="3A3F4D"/>
                 </a:solidFill>
@@ -15315,7 +15315,7 @@
         </p:nvSpPr>
         <p:spPr>
           <a:xfrm>
-            <a:off x="2419200" y="2340000"/>
+            <a:off x="2419200" y="2466000"/>
             <a:ext cx="216000" cy="216000"/>
           </a:xfrm>
           <a:prstGeom prst="rect">
@@ -15335,7 +15335,7 @@
               </a:lnSpc>
             </a:pPr>
             <a:r>
-              <a:rPr sz="1200" b="0">
+              <a:rPr sz="1420" b="0">
                 <a:solidFill>
                   <a:srgbClr val="C6A15B"/>
                 </a:solidFill>
@@ -15355,8 +15355,8 @@
         </p:nvSpPr>
         <p:spPr>
           <a:xfrm>
-            <a:off x="2570400" y="1908000"/>
-            <a:ext cx="1778400" cy="1080000"/>
+            <a:off x="2570400" y="1980000"/>
+            <a:ext cx="1778400" cy="1188000"/>
           </a:xfrm>
           <a:prstGeom prst="rect">
             <a:avLst/>
@@ -15401,8 +15401,8 @@
         </p:nvSpPr>
         <p:spPr>
           <a:xfrm>
-            <a:off x="2714400" y="2016000"/>
-            <a:ext cx="1490400" cy="864000"/>
+            <a:off x="2714400" y="2088000"/>
+            <a:ext cx="1490400" cy="972000"/>
           </a:xfrm>
           <a:prstGeom prst="rect">
             <a:avLst/>
@@ -15424,7 +15424,7 @@
               </a:spcAft>
             </a:pPr>
             <a:r>
-              <a:rPr sz="750" b="0" spc="100">
+              <a:rPr sz="880" b="0" spc="100">
                 <a:solidFill>
                   <a:srgbClr val="7A6030"/>
                 </a:solidFill>
@@ -15444,7 +15444,7 @@
               </a:spcAft>
             </a:pPr>
             <a:r>
-              <a:rPr sz="950" b="1">
+              <a:rPr sz="1120" b="1">
                 <a:solidFill>
                   <a:srgbClr val="1A1D29"/>
                 </a:solidFill>
@@ -15461,7 +15461,7 @@
               </a:lnSpc>
             </a:pPr>
             <a:r>
-              <a:rPr sz="720" b="0">
+              <a:rPr sz="850" b="0">
                 <a:solidFill>
                   <a:srgbClr val="3A3F4D"/>
                 </a:solidFill>
@@ -15481,7 +15481,7 @@
         </p:nvSpPr>
         <p:spPr>
           <a:xfrm>
-            <a:off x="4305600" y="2340000"/>
+            <a:off x="4305600" y="2466000"/>
             <a:ext cx="216000" cy="216000"/>
           </a:xfrm>
           <a:prstGeom prst="rect">
@@ -15501,7 +15501,7 @@
               </a:lnSpc>
             </a:pPr>
             <a:r>
-              <a:rPr sz="1200" b="0">
+              <a:rPr sz="1420" b="0">
                 <a:solidFill>
                   <a:srgbClr val="C6A15B"/>
                 </a:solidFill>
@@ -15521,8 +15521,8 @@
         </p:nvSpPr>
         <p:spPr>
           <a:xfrm>
-            <a:off x="4456800" y="1908000"/>
-            <a:ext cx="1778400" cy="1080000"/>
+            <a:off x="4456800" y="1980000"/>
+            <a:ext cx="1778400" cy="1188000"/>
           </a:xfrm>
           <a:prstGeom prst="rect">
             <a:avLst/>
@@ -15567,8 +15567,8 @@
         </p:nvSpPr>
         <p:spPr>
           <a:xfrm>
-            <a:off x="4600800" y="2016000"/>
-            <a:ext cx="1490400" cy="864000"/>
+            <a:off x="4600800" y="2088000"/>
+            <a:ext cx="1490400" cy="972000"/>
           </a:xfrm>
           <a:prstGeom prst="rect">
             <a:avLst/>
@@ -15590,7 +15590,7 @@
               </a:spcAft>
             </a:pPr>
             <a:r>
-              <a:rPr sz="750" b="0" spc="100">
+              <a:rPr sz="880" b="0" spc="100">
                 <a:solidFill>
                   <a:srgbClr val="7A6030"/>
                 </a:solidFill>
@@ -15610,7 +15610,7 @@
               </a:spcAft>
             </a:pPr>
             <a:r>
-              <a:rPr sz="950" b="1">
+              <a:rPr sz="1120" b="1">
                 <a:solidFill>
                   <a:srgbClr val="1A1D29"/>
                 </a:solidFill>
@@ -15627,7 +15627,7 @@
               </a:lnSpc>
             </a:pPr>
             <a:r>
-              <a:rPr sz="720" b="0">
+              <a:rPr sz="850" b="0">
                 <a:solidFill>
                   <a:srgbClr val="3A3F4D"/>
                 </a:solidFill>
@@ -15647,7 +15647,7 @@
         </p:nvSpPr>
         <p:spPr>
           <a:xfrm>
-            <a:off x="6192000" y="2340000"/>
+            <a:off x="6192000" y="2466000"/>
             <a:ext cx="216000" cy="216000"/>
           </a:xfrm>
           <a:prstGeom prst="rect">
@@ -15667,7 +15667,7 @@
               </a:lnSpc>
             </a:pPr>
             <a:r>
-              <a:rPr sz="1200" b="0">
+              <a:rPr sz="1420" b="0">
                 <a:solidFill>
                   <a:srgbClr val="C6A15B"/>
                 </a:solidFill>
@@ -15687,8 +15687,8 @@
         </p:nvSpPr>
         <p:spPr>
           <a:xfrm>
-            <a:off x="6343200" y="1908000"/>
-            <a:ext cx="1778400" cy="1080000"/>
+            <a:off x="6343200" y="1980000"/>
+            <a:ext cx="1778400" cy="1188000"/>
           </a:xfrm>
           <a:prstGeom prst="rect">
             <a:avLst/>
@@ -15733,8 +15733,8 @@
         </p:nvSpPr>
         <p:spPr>
           <a:xfrm>
-            <a:off x="6487200" y="2016000"/>
-            <a:ext cx="1490400" cy="864000"/>
+            <a:off x="6487200" y="2088000"/>
+            <a:ext cx="1490400" cy="972000"/>
           </a:xfrm>
           <a:prstGeom prst="rect">
             <a:avLst/>
@@ -15756,7 +15756,7 @@
               </a:spcAft>
             </a:pPr>
             <a:r>
-              <a:rPr sz="750" b="0" spc="100">
+              <a:rPr sz="880" b="0" spc="100">
                 <a:solidFill>
                   <a:srgbClr val="7A6030"/>
                 </a:solidFill>
@@ -15776,7 +15776,7 @@
               </a:spcAft>
             </a:pPr>
             <a:r>
-              <a:rPr sz="950" b="1">
+              <a:rPr sz="1120" b="1">
                 <a:solidFill>
                   <a:srgbClr val="1A1D29"/>
                 </a:solidFill>
@@ -15793,7 +15793,7 @@
               </a:lnSpc>
             </a:pPr>
             <a:r>
-              <a:rPr sz="720" b="0">
+              <a:rPr sz="850" b="0">
                 <a:solidFill>
                   <a:srgbClr val="3A3F4D"/>
                 </a:solidFill>
@@ -15813,7 +15813,7 @@
         </p:nvSpPr>
         <p:spPr>
           <a:xfrm>
-            <a:off x="8078400" y="2340000"/>
+            <a:off x="8078400" y="2466000"/>
             <a:ext cx="216000" cy="216000"/>
           </a:xfrm>
           <a:prstGeom prst="rect">
@@ -15833,7 +15833,7 @@
               </a:lnSpc>
             </a:pPr>
             <a:r>
-              <a:rPr sz="1200" b="0">
+              <a:rPr sz="1420" b="0">
                 <a:solidFill>
                   <a:srgbClr val="C6A15B"/>
                 </a:solidFill>
@@ -15853,8 +15853,8 @@
         </p:nvSpPr>
         <p:spPr>
           <a:xfrm>
-            <a:off x="8229600" y="1908000"/>
-            <a:ext cx="1778400" cy="1080000"/>
+            <a:off x="8229600" y="1980000"/>
+            <a:ext cx="1778400" cy="1188000"/>
           </a:xfrm>
           <a:prstGeom prst="rect">
             <a:avLst/>
@@ -15899,8 +15899,8 @@
         </p:nvSpPr>
         <p:spPr>
           <a:xfrm>
-            <a:off x="8373600" y="2016000"/>
-            <a:ext cx="1490400" cy="864000"/>
+            <a:off x="8373600" y="2088000"/>
+            <a:ext cx="1490400" cy="972000"/>
           </a:xfrm>
           <a:prstGeom prst="rect">
             <a:avLst/>
@@ -15922,7 +15922,7 @@
               </a:spcAft>
             </a:pPr>
             <a:r>
-              <a:rPr sz="750" b="0" spc="100">
+              <a:rPr sz="880" b="0" spc="100">
                 <a:solidFill>
                   <a:srgbClr val="7A6030"/>
                 </a:solidFill>
@@ -15942,7 +15942,7 @@
               </a:spcAft>
             </a:pPr>
             <a:r>
-              <a:rPr sz="950" b="1">
+              <a:rPr sz="1120" b="1">
                 <a:solidFill>
                   <a:srgbClr val="1A1D29"/>
                 </a:solidFill>
@@ -15959,7 +15959,7 @@
               </a:lnSpc>
             </a:pPr>
             <a:r>
-              <a:rPr sz="720" b="0">
+              <a:rPr sz="850" b="0">
                 <a:solidFill>
                   <a:srgbClr val="3A3F4D"/>
                 </a:solidFill>
@@ -15979,7 +15979,7 @@
         </p:nvSpPr>
         <p:spPr>
           <a:xfrm>
-            <a:off x="684000" y="3312000"/>
+            <a:off x="684000" y="3528000"/>
             <a:ext cx="1440000" cy="230400"/>
           </a:xfrm>
           <a:prstGeom prst="rect">
@@ -16025,7 +16025,7 @@
         </p:nvSpPr>
         <p:spPr>
           <a:xfrm>
-            <a:off x="684000" y="3366000"/>
+            <a:off x="684000" y="3582000"/>
             <a:ext cx="1440000" cy="144000"/>
           </a:xfrm>
           <a:prstGeom prst="rect">
@@ -16045,7 +16045,7 @@
               </a:lnSpc>
             </a:pPr>
             <a:r>
-              <a:rPr sz="700" b="0" spc="150">
+              <a:rPr sz="830" b="0" spc="150">
                 <a:solidFill>
                   <a:srgbClr val="7A6030"/>
                 </a:solidFill>
@@ -16065,8 +16065,8 @@
         </p:nvSpPr>
         <p:spPr>
           <a:xfrm>
-            <a:off x="684000" y="3636000"/>
-            <a:ext cx="1778400" cy="1080000"/>
+            <a:off x="684000" y="3852000"/>
+            <a:ext cx="1778400" cy="1188000"/>
           </a:xfrm>
           <a:prstGeom prst="rect">
             <a:avLst/>
@@ -16111,8 +16111,8 @@
         </p:nvSpPr>
         <p:spPr>
           <a:xfrm>
-            <a:off x="828000" y="3744000"/>
-            <a:ext cx="1490400" cy="864000"/>
+            <a:off x="828000" y="3960000"/>
+            <a:ext cx="1490400" cy="972000"/>
           </a:xfrm>
           <a:prstGeom prst="rect">
             <a:avLst/>
@@ -16134,7 +16134,7 @@
               </a:spcAft>
             </a:pPr>
             <a:r>
-              <a:rPr sz="750" b="0" spc="100">
+              <a:rPr sz="880" b="0" spc="100">
                 <a:solidFill>
                   <a:srgbClr val="7A6030"/>
                 </a:solidFill>
@@ -16154,7 +16154,7 @@
               </a:spcAft>
             </a:pPr>
             <a:r>
-              <a:rPr sz="950" b="1">
+              <a:rPr sz="1120" b="1">
                 <a:solidFill>
                   <a:srgbClr val="1A1D29"/>
                 </a:solidFill>
@@ -16171,7 +16171,7 @@
               </a:lnSpc>
             </a:pPr>
             <a:r>
-              <a:rPr sz="720" b="0">
+              <a:rPr sz="850" b="0">
                 <a:solidFill>
                   <a:srgbClr val="3A3F4D"/>
                 </a:solidFill>
@@ -16191,7 +16191,7 @@
         </p:nvSpPr>
         <p:spPr>
           <a:xfrm>
-            <a:off x="2419200" y="4068000"/>
+            <a:off x="2419200" y="4338000"/>
             <a:ext cx="216000" cy="216000"/>
           </a:xfrm>
           <a:prstGeom prst="rect">
@@ -16211,7 +16211,7 @@
               </a:lnSpc>
             </a:pPr>
             <a:r>
-              <a:rPr sz="1200" b="0">
+              <a:rPr sz="1420" b="0">
                 <a:solidFill>
                   <a:srgbClr val="C6A15B"/>
                 </a:solidFill>
@@ -16231,8 +16231,8 @@
         </p:nvSpPr>
         <p:spPr>
           <a:xfrm>
-            <a:off x="2570400" y="3636000"/>
-            <a:ext cx="1778400" cy="1080000"/>
+            <a:off x="2570400" y="3852000"/>
+            <a:ext cx="1778400" cy="1188000"/>
           </a:xfrm>
           <a:prstGeom prst="rect">
             <a:avLst/>
@@ -16277,8 +16277,8 @@
         </p:nvSpPr>
         <p:spPr>
           <a:xfrm>
-            <a:off x="2714400" y="3744000"/>
-            <a:ext cx="1490400" cy="864000"/>
+            <a:off x="2714400" y="3960000"/>
+            <a:ext cx="1490400" cy="972000"/>
           </a:xfrm>
           <a:prstGeom prst="rect">
             <a:avLst/>
@@ -16300,7 +16300,7 @@
               </a:spcAft>
             </a:pPr>
             <a:r>
-              <a:rPr sz="750" b="0" spc="100">
+              <a:rPr sz="880" b="0" spc="100">
                 <a:solidFill>
                   <a:srgbClr val="7A6030"/>
                 </a:solidFill>
@@ -16320,7 +16320,7 @@
               </a:spcAft>
             </a:pPr>
             <a:r>
-              <a:rPr sz="950" b="1">
+              <a:rPr sz="1120" b="1">
                 <a:solidFill>
                   <a:srgbClr val="1A1D29"/>
                 </a:solidFill>
@@ -16337,7 +16337,7 @@
               </a:lnSpc>
             </a:pPr>
             <a:r>
-              <a:rPr sz="720" b="0">
+              <a:rPr sz="850" b="0">
                 <a:solidFill>
                   <a:srgbClr val="3A3F4D"/>
                 </a:solidFill>
@@ -16357,7 +16357,7 @@
         </p:nvSpPr>
         <p:spPr>
           <a:xfrm>
-            <a:off x="4305600" y="4068000"/>
+            <a:off x="4305600" y="4338000"/>
             <a:ext cx="216000" cy="216000"/>
           </a:xfrm>
           <a:prstGeom prst="rect">
@@ -16377,7 +16377,7 @@
               </a:lnSpc>
             </a:pPr>
             <a:r>
-              <a:rPr sz="1200" b="0">
+              <a:rPr sz="1420" b="0">
                 <a:solidFill>
                   <a:srgbClr val="C6A15B"/>
                 </a:solidFill>
@@ -16397,8 +16397,8 @@
         </p:nvSpPr>
         <p:spPr>
           <a:xfrm>
-            <a:off x="4456800" y="3636000"/>
-            <a:ext cx="1778400" cy="1080000"/>
+            <a:off x="4456800" y="3852000"/>
+            <a:ext cx="1778400" cy="1188000"/>
           </a:xfrm>
           <a:prstGeom prst="rect">
             <a:avLst/>
@@ -16443,8 +16443,8 @@
         </p:nvSpPr>
         <p:spPr>
           <a:xfrm>
-            <a:off x="4600800" y="3744000"/>
-            <a:ext cx="1490400" cy="864000"/>
+            <a:off x="4600800" y="3960000"/>
+            <a:ext cx="1490400" cy="972000"/>
           </a:xfrm>
           <a:prstGeom prst="rect">
             <a:avLst/>
@@ -16466,7 +16466,7 @@
               </a:spcAft>
             </a:pPr>
             <a:r>
-              <a:rPr sz="750" b="0" spc="100">
+              <a:rPr sz="880" b="0" spc="100">
                 <a:solidFill>
                   <a:srgbClr val="7A6030"/>
                 </a:solidFill>
@@ -16486,7 +16486,7 @@
               </a:spcAft>
             </a:pPr>
             <a:r>
-              <a:rPr sz="950" b="1">
+              <a:rPr sz="1120" b="1">
                 <a:solidFill>
                   <a:srgbClr val="1A1D29"/>
                 </a:solidFill>
@@ -16503,7 +16503,7 @@
               </a:lnSpc>
             </a:pPr>
             <a:r>
-              <a:rPr sz="720" b="0">
+              <a:rPr sz="850" b="0">
                 <a:solidFill>
                   <a:srgbClr val="3A3F4D"/>
                 </a:solidFill>
@@ -16523,7 +16523,7 @@
         </p:nvSpPr>
         <p:spPr>
           <a:xfrm>
-            <a:off x="6192000" y="4068000"/>
+            <a:off x="6192000" y="4338000"/>
             <a:ext cx="216000" cy="216000"/>
           </a:xfrm>
           <a:prstGeom prst="rect">
@@ -16543,7 +16543,7 @@
               </a:lnSpc>
             </a:pPr>
             <a:r>
-              <a:rPr sz="1200" b="0">
+              <a:rPr sz="1420" b="0">
                 <a:solidFill>
                   <a:srgbClr val="C6A15B"/>
                 </a:solidFill>
@@ -16563,8 +16563,8 @@
         </p:nvSpPr>
         <p:spPr>
           <a:xfrm>
-            <a:off x="6343200" y="3636000"/>
-            <a:ext cx="1778400" cy="1080000"/>
+            <a:off x="6343200" y="3852000"/>
+            <a:ext cx="1778400" cy="1188000"/>
           </a:xfrm>
           <a:prstGeom prst="rect">
             <a:avLst/>
@@ -16609,8 +16609,8 @@
         </p:nvSpPr>
         <p:spPr>
           <a:xfrm>
-            <a:off x="6487200" y="3744000"/>
-            <a:ext cx="1490400" cy="864000"/>
+            <a:off x="6487200" y="3960000"/>
+            <a:ext cx="1490400" cy="972000"/>
           </a:xfrm>
           <a:prstGeom prst="rect">
             <a:avLst/>
@@ -16632,7 +16632,7 @@
               </a:spcAft>
             </a:pPr>
             <a:r>
-              <a:rPr sz="750" b="0" spc="100">
+              <a:rPr sz="880" b="0" spc="100">
                 <a:solidFill>
                   <a:srgbClr val="7A6030"/>
                 </a:solidFill>
@@ -16652,7 +16652,7 @@
               </a:spcAft>
             </a:pPr>
             <a:r>
-              <a:rPr sz="950" b="1">
+              <a:rPr sz="1120" b="1">
                 <a:solidFill>
                   <a:srgbClr val="1A1D29"/>
                 </a:solidFill>
@@ -16669,7 +16669,7 @@
               </a:lnSpc>
             </a:pPr>
             <a:r>
-              <a:rPr sz="720" b="0">
+              <a:rPr sz="850" b="0">
                 <a:solidFill>
                   <a:srgbClr val="3A3F4D"/>
                 </a:solidFill>
@@ -16689,7 +16689,7 @@
         </p:nvSpPr>
         <p:spPr>
           <a:xfrm>
-            <a:off x="8078400" y="4068000"/>
+            <a:off x="8078400" y="4338000"/>
             <a:ext cx="216000" cy="216000"/>
           </a:xfrm>
           <a:prstGeom prst="rect">
@@ -16709,7 +16709,7 @@
               </a:lnSpc>
             </a:pPr>
             <a:r>
-              <a:rPr sz="1200" b="0">
+              <a:rPr sz="1420" b="0">
                 <a:solidFill>
                   <a:srgbClr val="C6A15B"/>
                 </a:solidFill>
@@ -16729,8 +16729,8 @@
         </p:nvSpPr>
         <p:spPr>
           <a:xfrm>
-            <a:off x="8229600" y="3636000"/>
-            <a:ext cx="1778400" cy="1080000"/>
+            <a:off x="8229600" y="3852000"/>
+            <a:ext cx="1778400" cy="1188000"/>
           </a:xfrm>
           <a:prstGeom prst="rect">
             <a:avLst/>
@@ -16775,8 +16775,8 @@
         </p:nvSpPr>
         <p:spPr>
           <a:xfrm>
-            <a:off x="8373600" y="3744000"/>
-            <a:ext cx="1490400" cy="864000"/>
+            <a:off x="8373600" y="3960000"/>
+            <a:ext cx="1490400" cy="972000"/>
           </a:xfrm>
           <a:prstGeom prst="rect">
             <a:avLst/>
@@ -16798,7 +16798,7 @@
               </a:spcAft>
             </a:pPr>
             <a:r>
-              <a:rPr sz="750" b="0" spc="100">
+              <a:rPr sz="880" b="0" spc="100">
                 <a:solidFill>
                   <a:srgbClr val="7A6030"/>
                 </a:solidFill>
@@ -16818,7 +16818,7 @@
               </a:spcAft>
             </a:pPr>
             <a:r>
-              <a:rPr sz="950" b="1">
+              <a:rPr sz="1120" b="1">
                 <a:solidFill>
                   <a:srgbClr val="1A1D29"/>
                 </a:solidFill>
@@ -16835,7 +16835,7 @@
               </a:lnSpc>
             </a:pPr>
             <a:r>
-              <a:rPr sz="720" b="0">
+              <a:rPr sz="850" b="0">
                 <a:solidFill>
                   <a:srgbClr val="3A3F4D"/>
                 </a:solidFill>
@@ -16855,7 +16855,7 @@
         </p:nvSpPr>
         <p:spPr>
           <a:xfrm>
-            <a:off x="684000" y="5040000"/>
+            <a:off x="684000" y="5364000"/>
             <a:ext cx="9324000" cy="360000"/>
           </a:xfrm>
           <a:prstGeom prst="rect">
@@ -16875,7 +16875,7 @@
               </a:lnSpc>
             </a:pPr>
             <a:r>
-              <a:rPr sz="750" b="0">
+              <a:rPr sz="880" b="0">
                 <a:solidFill>
                   <a:srgbClr val="5F6672"/>
                 </a:solidFill>
@@ -16915,7 +16915,7 @@
               </a:lnSpc>
             </a:pPr>
             <a:r>
-              <a:rPr sz="900" b="1">
+              <a:rPr sz="1060" b="1">
                 <a:solidFill>
                   <a:srgbClr val="7A6030"/>
                 </a:solidFill>
@@ -16925,7 +16925,7 @@
               <a:t>MarkGate</a:t>
             </a:r>
             <a:r>
-              <a:rPr sz="700" b="0">
+              <a:rPr sz="830" b="0">
                 <a:solidFill>
                   <a:srgbClr val="5F6672"/>
                 </a:solidFill>
@@ -16965,7 +16965,7 @@
               </a:lnSpc>
             </a:pPr>
             <a:r>
-              <a:rPr sz="900" b="0" spc="100">
+              <a:rPr sz="1060" b="0" spc="100">
                 <a:solidFill>
                   <a:srgbClr val="5F6672"/>
                 </a:solidFill>
@@ -17067,7 +17067,7 @@
               </a:lnSpc>
             </a:pPr>
             <a:r>
-              <a:rPr sz="1700" b="0">
+              <a:rPr sz="2010" b="0">
                 <a:solidFill>
                   <a:srgbClr val="C6A15B"/>
                 </a:solidFill>
@@ -17107,7 +17107,7 @@
               </a:lnSpc>
             </a:pPr>
             <a:r>
-              <a:rPr sz="750" b="0" spc="300">
+              <a:rPr sz="880" b="0" spc="300">
                 <a:solidFill>
                   <a:srgbClr val="7A6030"/>
                 </a:solidFill>
@@ -17128,7 +17128,7 @@
         <p:spPr>
           <a:xfrm>
             <a:off x="684000" y="792000"/>
-            <a:ext cx="9324000" cy="432000"/>
+            <a:ext cx="9324000" cy="504000"/>
           </a:xfrm>
           <a:prstGeom prst="rect">
             <a:avLst/>
@@ -17147,7 +17147,7 @@
               </a:lnSpc>
             </a:pPr>
             <a:r>
-              <a:rPr sz="2200" b="1">
+              <a:rPr sz="2600" b="1">
                 <a:solidFill>
                   <a:srgbClr val="1A1D29"/>
                 </a:solidFill>
@@ -17167,7 +17167,7 @@
         </p:nvSpPr>
         <p:spPr>
           <a:xfrm>
-            <a:off x="684000" y="1296000"/>
+            <a:off x="684000" y="1368000"/>
             <a:ext cx="504000" cy="25200"/>
           </a:xfrm>
           <a:prstGeom prst="rect">
@@ -17211,7 +17211,7 @@
         </p:nvSpPr>
         <p:spPr>
           <a:xfrm>
-            <a:off x="684000" y="1656000"/>
+            <a:off x="684000" y="1728000"/>
             <a:ext cx="4554000" cy="1656000"/>
           </a:xfrm>
           <a:prstGeom prst="rect">
@@ -17257,7 +17257,7 @@
         </p:nvSpPr>
         <p:spPr>
           <a:xfrm>
-            <a:off x="900000" y="1872000"/>
+            <a:off x="900000" y="1944000"/>
             <a:ext cx="360000" cy="360000"/>
           </a:xfrm>
           <a:prstGeom prst="ellipse">
@@ -17301,7 +17301,7 @@
         </p:nvSpPr>
         <p:spPr>
           <a:xfrm>
-            <a:off x="900000" y="1944000"/>
+            <a:off x="900000" y="2016000"/>
             <a:ext cx="360000" cy="216000"/>
           </a:xfrm>
           <a:prstGeom prst="rect">
@@ -17321,7 +17321,7 @@
               </a:lnSpc>
             </a:pPr>
             <a:r>
-              <a:rPr sz="1100" b="0">
+              <a:rPr sz="1300" b="0">
                 <a:solidFill>
                   <a:srgbClr val="7A6030"/>
                 </a:solidFill>
@@ -17341,7 +17341,7 @@
         </p:nvSpPr>
         <p:spPr>
           <a:xfrm>
-            <a:off x="1404000" y="1872000"/>
+            <a:off x="1404000" y="1944000"/>
             <a:ext cx="3582000" cy="1260000"/>
           </a:xfrm>
           <a:prstGeom prst="rect">
@@ -17364,7 +17364,7 @@
               </a:spcAft>
             </a:pPr>
             <a:r>
-              <a:rPr sz="1150" b="1">
+              <a:rPr sz="1360" b="1">
                 <a:solidFill>
                   <a:srgbClr val="1A1D29"/>
                 </a:solidFill>
@@ -17381,7 +17381,7 @@
               </a:lnSpc>
             </a:pPr>
             <a:r>
-              <a:rPr sz="850" b="0">
+              <a:rPr sz="1000" b="0">
                 <a:solidFill>
                   <a:srgbClr val="3A3F4D"/>
                 </a:solidFill>
@@ -17401,7 +17401,7 @@
         </p:nvSpPr>
         <p:spPr>
           <a:xfrm>
-            <a:off x="5454000" y="1656000"/>
+            <a:off x="5454000" y="1728000"/>
             <a:ext cx="4554000" cy="1656000"/>
           </a:xfrm>
           <a:prstGeom prst="rect">
@@ -17447,7 +17447,7 @@
         </p:nvSpPr>
         <p:spPr>
           <a:xfrm>
-            <a:off x="5670000" y="1872000"/>
+            <a:off x="5670000" y="1944000"/>
             <a:ext cx="360000" cy="360000"/>
           </a:xfrm>
           <a:prstGeom prst="ellipse">
@@ -17491,7 +17491,7 @@
         </p:nvSpPr>
         <p:spPr>
           <a:xfrm>
-            <a:off x="5670000" y="1944000"/>
+            <a:off x="5670000" y="2016000"/>
             <a:ext cx="360000" cy="216000"/>
           </a:xfrm>
           <a:prstGeom prst="rect">
@@ -17511,7 +17511,7 @@
               </a:lnSpc>
             </a:pPr>
             <a:r>
-              <a:rPr sz="1100" b="0">
+              <a:rPr sz="1300" b="0">
                 <a:solidFill>
                   <a:srgbClr val="7A6030"/>
                 </a:solidFill>
@@ -17531,7 +17531,7 @@
         </p:nvSpPr>
         <p:spPr>
           <a:xfrm>
-            <a:off x="6174000" y="1872000"/>
+            <a:off x="6174000" y="1944000"/>
             <a:ext cx="3582000" cy="1260000"/>
           </a:xfrm>
           <a:prstGeom prst="rect">
@@ -17554,7 +17554,7 @@
               </a:spcAft>
             </a:pPr>
             <a:r>
-              <a:rPr sz="1150" b="1">
+              <a:rPr sz="1360" b="1">
                 <a:solidFill>
                   <a:srgbClr val="1A1D29"/>
                 </a:solidFill>
@@ -17571,7 +17571,7 @@
               </a:lnSpc>
             </a:pPr>
             <a:r>
-              <a:rPr sz="850" b="0">
+              <a:rPr sz="1000" b="0">
                 <a:solidFill>
                   <a:srgbClr val="3A3F4D"/>
                 </a:solidFill>
@@ -17591,7 +17591,7 @@
         </p:nvSpPr>
         <p:spPr>
           <a:xfrm>
-            <a:off x="684000" y="3528000"/>
+            <a:off x="684000" y="3600000"/>
             <a:ext cx="4554000" cy="1656000"/>
           </a:xfrm>
           <a:prstGeom prst="rect">
@@ -17637,7 +17637,7 @@
         </p:nvSpPr>
         <p:spPr>
           <a:xfrm>
-            <a:off x="900000" y="3744000"/>
+            <a:off x="900000" y="3816000"/>
             <a:ext cx="360000" cy="360000"/>
           </a:xfrm>
           <a:prstGeom prst="ellipse">
@@ -17681,7 +17681,7 @@
         </p:nvSpPr>
         <p:spPr>
           <a:xfrm>
-            <a:off x="900000" y="3816000"/>
+            <a:off x="900000" y="3888000"/>
             <a:ext cx="360000" cy="216000"/>
           </a:xfrm>
           <a:prstGeom prst="rect">
@@ -17701,7 +17701,7 @@
               </a:lnSpc>
             </a:pPr>
             <a:r>
-              <a:rPr sz="1100" b="0">
+              <a:rPr sz="1300" b="0">
                 <a:solidFill>
                   <a:srgbClr val="7A6030"/>
                 </a:solidFill>
@@ -17721,7 +17721,7 @@
         </p:nvSpPr>
         <p:spPr>
           <a:xfrm>
-            <a:off x="1404000" y="3744000"/>
+            <a:off x="1404000" y="3816000"/>
             <a:ext cx="3582000" cy="1260000"/>
           </a:xfrm>
           <a:prstGeom prst="rect">
@@ -17744,7 +17744,7 @@
               </a:spcAft>
             </a:pPr>
             <a:r>
-              <a:rPr sz="1150" b="1">
+              <a:rPr sz="1360" b="1">
                 <a:solidFill>
                   <a:srgbClr val="1A1D29"/>
                 </a:solidFill>
@@ -17761,7 +17761,7 @@
               </a:lnSpc>
             </a:pPr>
             <a:r>
-              <a:rPr sz="850" b="0">
+              <a:rPr sz="1000" b="0">
                 <a:solidFill>
                   <a:srgbClr val="3A3F4D"/>
                 </a:solidFill>
@@ -17781,7 +17781,7 @@
         </p:nvSpPr>
         <p:spPr>
           <a:xfrm>
-            <a:off x="5454000" y="3528000"/>
+            <a:off x="5454000" y="3600000"/>
             <a:ext cx="4554000" cy="1656000"/>
           </a:xfrm>
           <a:prstGeom prst="rect">
@@ -17827,7 +17827,7 @@
         </p:nvSpPr>
         <p:spPr>
           <a:xfrm>
-            <a:off x="5670000" y="3744000"/>
+            <a:off x="5670000" y="3816000"/>
             <a:ext cx="360000" cy="360000"/>
           </a:xfrm>
           <a:prstGeom prst="ellipse">
@@ -17871,7 +17871,7 @@
         </p:nvSpPr>
         <p:spPr>
           <a:xfrm>
-            <a:off x="5670000" y="3816000"/>
+            <a:off x="5670000" y="3888000"/>
             <a:ext cx="360000" cy="216000"/>
           </a:xfrm>
           <a:prstGeom prst="rect">
@@ -17891,7 +17891,7 @@
               </a:lnSpc>
             </a:pPr>
             <a:r>
-              <a:rPr sz="1100" b="0">
+              <a:rPr sz="1300" b="0">
                 <a:solidFill>
                   <a:srgbClr val="7A6030"/>
                 </a:solidFill>
@@ -17911,7 +17911,7 @@
         </p:nvSpPr>
         <p:spPr>
           <a:xfrm>
-            <a:off x="6174000" y="3744000"/>
+            <a:off x="6174000" y="3816000"/>
             <a:ext cx="3582000" cy="1260000"/>
           </a:xfrm>
           <a:prstGeom prst="rect">
@@ -17934,7 +17934,7 @@
               </a:spcAft>
             </a:pPr>
             <a:r>
-              <a:rPr sz="1150" b="1">
+              <a:rPr sz="1360" b="1">
                 <a:solidFill>
                   <a:srgbClr val="1A1D29"/>
                 </a:solidFill>
@@ -17951,7 +17951,7 @@
               </a:lnSpc>
             </a:pPr>
             <a:r>
-              <a:rPr sz="850" b="0">
+              <a:rPr sz="1000" b="0">
                 <a:solidFill>
                   <a:srgbClr val="3A3F4D"/>
                 </a:solidFill>
@@ -17971,7 +17971,7 @@
         </p:nvSpPr>
         <p:spPr>
           <a:xfrm>
-            <a:off x="684000" y="5472000"/>
+            <a:off x="684000" y="5544000"/>
             <a:ext cx="9324000" cy="216000"/>
           </a:xfrm>
           <a:prstGeom prst="rect">
@@ -17991,7 +17991,7 @@
               </a:lnSpc>
             </a:pPr>
             <a:r>
-              <a:rPr sz="750" b="0">
+              <a:rPr sz="880" b="0">
                 <a:solidFill>
                   <a:srgbClr val="5F6672"/>
                 </a:solidFill>
@@ -18031,7 +18031,7 @@
               </a:lnSpc>
             </a:pPr>
             <a:r>
-              <a:rPr sz="900" b="1">
+              <a:rPr sz="1060" b="1">
                 <a:solidFill>
                   <a:srgbClr val="7A6030"/>
                 </a:solidFill>
@@ -18041,7 +18041,7 @@
               <a:t>MarkGate</a:t>
             </a:r>
             <a:r>
-              <a:rPr sz="700" b="0">
+              <a:rPr sz="830" b="0">
                 <a:solidFill>
                   <a:srgbClr val="5F6672"/>
                 </a:solidFill>
@@ -18081,7 +18081,7 @@
               </a:lnSpc>
             </a:pPr>
             <a:r>
-              <a:rPr sz="900" b="0" spc="100">
+              <a:rPr sz="1060" b="0" spc="100">
                 <a:solidFill>
                   <a:srgbClr val="5F6672"/>
                 </a:solidFill>
@@ -18183,7 +18183,7 @@
               </a:lnSpc>
             </a:pPr>
             <a:r>
-              <a:rPr sz="1700" b="0">
+              <a:rPr sz="2010" b="0">
                 <a:solidFill>
                   <a:srgbClr val="C6A15B"/>
                 </a:solidFill>
@@ -18223,7 +18223,7 @@
               </a:lnSpc>
             </a:pPr>
             <a:r>
-              <a:rPr sz="750" b="0" spc="300">
+              <a:rPr sz="880" b="0" spc="300">
                 <a:solidFill>
                   <a:srgbClr val="7A6030"/>
                 </a:solidFill>
@@ -18244,7 +18244,7 @@
         <p:spPr>
           <a:xfrm>
             <a:off x="684000" y="792000"/>
-            <a:ext cx="9324000" cy="432000"/>
+            <a:ext cx="9324000" cy="504000"/>
           </a:xfrm>
           <a:prstGeom prst="rect">
             <a:avLst/>
@@ -18263,7 +18263,7 @@
               </a:lnSpc>
             </a:pPr>
             <a:r>
-              <a:rPr sz="2200" b="1">
+              <a:rPr sz="2600" b="1">
                 <a:solidFill>
                   <a:srgbClr val="1A1D29"/>
                 </a:solidFill>
@@ -18273,7 +18273,7 @@
               <a:t>既存チャネルと競合せず、</a:t>
             </a:r>
             <a:r>
-              <a:rPr sz="2200" b="1">
+              <a:rPr sz="2600" b="1">
                 <a:solidFill>
                   <a:srgbClr val="7A6030"/>
                 </a:solidFill>
@@ -18283,7 +18283,7 @@
               <a:t>補完</a:t>
             </a:r>
             <a:r>
-              <a:rPr sz="2200" b="1">
+              <a:rPr sz="2600" b="1">
                 <a:solidFill>
                   <a:srgbClr val="1A1D29"/>
                 </a:solidFill>
@@ -18303,7 +18303,7 @@
         </p:nvSpPr>
         <p:spPr>
           <a:xfrm>
-            <a:off x="684000" y="1296000"/>
+            <a:off x="684000" y="1368000"/>
             <a:ext cx="504000" cy="25200"/>
           </a:xfrm>
           <a:prstGeom prst="rect">
@@ -18347,8 +18347,8 @@
         </p:nvSpPr>
         <p:spPr>
           <a:xfrm>
-            <a:off x="684000" y="1620000"/>
-            <a:ext cx="1224000" cy="360000"/>
+            <a:off x="684000" y="1692000"/>
+            <a:ext cx="1368000" cy="360000"/>
           </a:xfrm>
           <a:prstGeom prst="rect">
             <a:avLst/>
@@ -18391,8 +18391,8 @@
         </p:nvSpPr>
         <p:spPr>
           <a:xfrm>
-            <a:off x="1908000" y="1620000"/>
-            <a:ext cx="2520000" cy="360000"/>
+            <a:off x="2052000" y="1692000"/>
+            <a:ext cx="2448000" cy="360000"/>
           </a:xfrm>
           <a:prstGeom prst="rect">
             <a:avLst/>
@@ -18435,8 +18435,8 @@
         </p:nvSpPr>
         <p:spPr>
           <a:xfrm>
-            <a:off x="2016000" y="1620000"/>
-            <a:ext cx="2304000" cy="360000"/>
+            <a:off x="2160000" y="1692000"/>
+            <a:ext cx="2232000" cy="360000"/>
           </a:xfrm>
           <a:prstGeom prst="rect">
             <a:avLst/>
@@ -18455,7 +18455,7 @@
               </a:lnSpc>
             </a:pPr>
             <a:r>
-              <a:rPr sz="950" b="1">
+              <a:rPr sz="1120" b="1">
                 <a:solidFill>
                   <a:srgbClr val="FFFFFF"/>
                 </a:solidFill>
@@ -18475,8 +18475,8 @@
         </p:nvSpPr>
         <p:spPr>
           <a:xfrm>
-            <a:off x="4428000" y="1620000"/>
-            <a:ext cx="2520000" cy="360000"/>
+            <a:off x="4500000" y="1692000"/>
+            <a:ext cx="2448000" cy="360000"/>
           </a:xfrm>
           <a:prstGeom prst="rect">
             <a:avLst/>
@@ -18519,8 +18519,8 @@
         </p:nvSpPr>
         <p:spPr>
           <a:xfrm>
-            <a:off x="4536000" y="1620000"/>
-            <a:ext cx="2304000" cy="360000"/>
+            <a:off x="4608000" y="1692000"/>
+            <a:ext cx="2232000" cy="360000"/>
           </a:xfrm>
           <a:prstGeom prst="rect">
             <a:avLst/>
@@ -18539,7 +18539,7 @@
               </a:lnSpc>
             </a:pPr>
             <a:r>
-              <a:rPr sz="950" b="1">
+              <a:rPr sz="1120" b="1">
                 <a:solidFill>
                   <a:srgbClr val="FFFFFF"/>
                 </a:solidFill>
@@ -18559,7 +18559,7 @@
         </p:nvSpPr>
         <p:spPr>
           <a:xfrm>
-            <a:off x="6948000" y="1620000"/>
+            <a:off x="6948000" y="1692000"/>
             <a:ext cx="3060000" cy="360000"/>
           </a:xfrm>
           <a:prstGeom prst="rect">
@@ -18603,7 +18603,7 @@
         </p:nvSpPr>
         <p:spPr>
           <a:xfrm>
-            <a:off x="7056000" y="1620000"/>
+            <a:off x="7056000" y="1692000"/>
             <a:ext cx="2844000" cy="360000"/>
           </a:xfrm>
           <a:prstGeom prst="rect">
@@ -18623,7 +18623,7 @@
               </a:lnSpc>
             </a:pPr>
             <a:r>
-              <a:rPr sz="950" b="1">
+              <a:rPr sz="1120" b="1">
                 <a:solidFill>
                   <a:srgbClr val="0A0E1A"/>
                 </a:solidFill>
@@ -18643,8 +18643,8 @@
         </p:nvSpPr>
         <p:spPr>
           <a:xfrm>
-            <a:off x="684000" y="1980000"/>
-            <a:ext cx="1224000" cy="468000"/>
+            <a:off x="684000" y="2052000"/>
+            <a:ext cx="1368000" cy="468000"/>
           </a:xfrm>
           <a:prstGeom prst="rect">
             <a:avLst/>
@@ -18689,8 +18689,8 @@
         </p:nvSpPr>
         <p:spPr>
           <a:xfrm>
-            <a:off x="792000" y="1980000"/>
-            <a:ext cx="1008000" cy="468000"/>
+            <a:off x="792000" y="2052000"/>
+            <a:ext cx="1152000" cy="468000"/>
           </a:xfrm>
           <a:prstGeom prst="rect">
             <a:avLst/>
@@ -18709,7 +18709,7 @@
               </a:lnSpc>
             </a:pPr>
             <a:r>
-              <a:rPr sz="850" b="1">
+              <a:rPr sz="1000" b="1">
                 <a:solidFill>
                   <a:srgbClr val="1A1D29"/>
                 </a:solidFill>
@@ -18729,8 +18729,8 @@
         </p:nvSpPr>
         <p:spPr>
           <a:xfrm>
-            <a:off x="1908000" y="1980000"/>
-            <a:ext cx="2520000" cy="468000"/>
+            <a:off x="2052000" y="2052000"/>
+            <a:ext cx="2448000" cy="468000"/>
           </a:xfrm>
           <a:prstGeom prst="rect">
             <a:avLst/>
@@ -18775,8 +18775,8 @@
         </p:nvSpPr>
         <p:spPr>
           <a:xfrm>
-            <a:off x="2016000" y="1980000"/>
-            <a:ext cx="2304000" cy="468000"/>
+            <a:off x="2160000" y="2052000"/>
+            <a:ext cx="2232000" cy="468000"/>
           </a:xfrm>
           <a:prstGeom prst="rect">
             <a:avLst/>
@@ -18795,7 +18795,7 @@
               </a:lnSpc>
             </a:pPr>
             <a:r>
-              <a:rPr sz="850" b="0">
+              <a:rPr sz="1000" b="0">
                 <a:solidFill>
                   <a:srgbClr val="3A3F4D"/>
                 </a:solidFill>
@@ -18815,8 +18815,8 @@
         </p:nvSpPr>
         <p:spPr>
           <a:xfrm>
-            <a:off x="4428000" y="1980000"/>
-            <a:ext cx="2520000" cy="468000"/>
+            <a:off x="4500000" y="2052000"/>
+            <a:ext cx="2448000" cy="468000"/>
           </a:xfrm>
           <a:prstGeom prst="rect">
             <a:avLst/>
@@ -18861,8 +18861,8 @@
         </p:nvSpPr>
         <p:spPr>
           <a:xfrm>
-            <a:off x="4536000" y="1980000"/>
-            <a:ext cx="2304000" cy="468000"/>
+            <a:off x="4608000" y="2052000"/>
+            <a:ext cx="2232000" cy="468000"/>
           </a:xfrm>
           <a:prstGeom prst="rect">
             <a:avLst/>
@@ -18881,7 +18881,7 @@
               </a:lnSpc>
             </a:pPr>
             <a:r>
-              <a:rPr sz="850" b="0">
+              <a:rPr sz="1000" b="0">
                 <a:solidFill>
                   <a:srgbClr val="3A3F4D"/>
                 </a:solidFill>
@@ -18901,7 +18901,7 @@
         </p:nvSpPr>
         <p:spPr>
           <a:xfrm>
-            <a:off x="6948000" y="1980000"/>
+            <a:off x="6948000" y="2052000"/>
             <a:ext cx="3060000" cy="468000"/>
           </a:xfrm>
           <a:prstGeom prst="rect">
@@ -18947,7 +18947,7 @@
         </p:nvSpPr>
         <p:spPr>
           <a:xfrm>
-            <a:off x="7056000" y="1980000"/>
+            <a:off x="7056000" y="2052000"/>
             <a:ext cx="2844000" cy="468000"/>
           </a:xfrm>
           <a:prstGeom prst="rect">
@@ -18967,7 +18967,7 @@
               </a:lnSpc>
             </a:pPr>
             <a:r>
-              <a:rPr sz="850" b="0">
+              <a:rPr sz="1000" b="0">
                 <a:solidFill>
                   <a:srgbClr val="1A1D29"/>
                 </a:solidFill>
@@ -18987,8 +18987,8 @@
         </p:nvSpPr>
         <p:spPr>
           <a:xfrm>
-            <a:off x="684000" y="2448000"/>
-            <a:ext cx="1224000" cy="468000"/>
+            <a:off x="684000" y="2520000"/>
+            <a:ext cx="1368000" cy="468000"/>
           </a:xfrm>
           <a:prstGeom prst="rect">
             <a:avLst/>
@@ -19033,8 +19033,8 @@
         </p:nvSpPr>
         <p:spPr>
           <a:xfrm>
-            <a:off x="792000" y="2448000"/>
-            <a:ext cx="1008000" cy="468000"/>
+            <a:off x="792000" y="2520000"/>
+            <a:ext cx="1152000" cy="468000"/>
           </a:xfrm>
           <a:prstGeom prst="rect">
             <a:avLst/>
@@ -19053,7 +19053,7 @@
               </a:lnSpc>
             </a:pPr>
             <a:r>
-              <a:rPr sz="850" b="1">
+              <a:rPr sz="1000" b="1">
                 <a:solidFill>
                   <a:srgbClr val="1A1D29"/>
                 </a:solidFill>
@@ -19073,8 +19073,8 @@
         </p:nvSpPr>
         <p:spPr>
           <a:xfrm>
-            <a:off x="1908000" y="2448000"/>
-            <a:ext cx="2520000" cy="468000"/>
+            <a:off x="2052000" y="2520000"/>
+            <a:ext cx="2448000" cy="468000"/>
           </a:xfrm>
           <a:prstGeom prst="rect">
             <a:avLst/>
@@ -19119,8 +19119,8 @@
         </p:nvSpPr>
         <p:spPr>
           <a:xfrm>
-            <a:off x="2016000" y="2448000"/>
-            <a:ext cx="2304000" cy="468000"/>
+            <a:off x="2160000" y="2520000"/>
+            <a:ext cx="2232000" cy="468000"/>
           </a:xfrm>
           <a:prstGeom prst="rect">
             <a:avLst/>
@@ -19139,7 +19139,7 @@
               </a:lnSpc>
             </a:pPr>
             <a:r>
-              <a:rPr sz="850" b="0">
+              <a:rPr sz="1000" b="0">
                 <a:solidFill>
                   <a:srgbClr val="3A3F4D"/>
                 </a:solidFill>
@@ -19159,8 +19159,8 @@
         </p:nvSpPr>
         <p:spPr>
           <a:xfrm>
-            <a:off x="4428000" y="2448000"/>
-            <a:ext cx="2520000" cy="468000"/>
+            <a:off x="4500000" y="2520000"/>
+            <a:ext cx="2448000" cy="468000"/>
           </a:xfrm>
           <a:prstGeom prst="rect">
             <a:avLst/>
@@ -19205,8 +19205,8 @@
         </p:nvSpPr>
         <p:spPr>
           <a:xfrm>
-            <a:off x="4536000" y="2448000"/>
-            <a:ext cx="2304000" cy="468000"/>
+            <a:off x="4608000" y="2520000"/>
+            <a:ext cx="2232000" cy="468000"/>
           </a:xfrm>
           <a:prstGeom prst="rect">
             <a:avLst/>
@@ -19225,7 +19225,7 @@
               </a:lnSpc>
             </a:pPr>
             <a:r>
-              <a:rPr sz="850" b="0">
+              <a:rPr sz="1000" b="0">
                 <a:solidFill>
                   <a:srgbClr val="3A3F4D"/>
                 </a:solidFill>
@@ -19245,7 +19245,7 @@
         </p:nvSpPr>
         <p:spPr>
           <a:xfrm>
-            <a:off x="6948000" y="2448000"/>
+            <a:off x="6948000" y="2520000"/>
             <a:ext cx="3060000" cy="468000"/>
           </a:xfrm>
           <a:prstGeom prst="rect">
@@ -19291,7 +19291,7 @@
         </p:nvSpPr>
         <p:spPr>
           <a:xfrm>
-            <a:off x="7056000" y="2448000"/>
+            <a:off x="7056000" y="2520000"/>
             <a:ext cx="2844000" cy="468000"/>
           </a:xfrm>
           <a:prstGeom prst="rect">
@@ -19311,7 +19311,7 @@
               </a:lnSpc>
             </a:pPr>
             <a:r>
-              <a:rPr sz="850" b="0">
+              <a:rPr sz="1000" b="0">
                 <a:solidFill>
                   <a:srgbClr val="1A1D29"/>
                 </a:solidFill>
@@ -19331,8 +19331,8 @@
         </p:nvSpPr>
         <p:spPr>
           <a:xfrm>
-            <a:off x="684000" y="2916000"/>
-            <a:ext cx="1224000" cy="468000"/>
+            <a:off x="684000" y="2988000"/>
+            <a:ext cx="1368000" cy="468000"/>
           </a:xfrm>
           <a:prstGeom prst="rect">
             <a:avLst/>
@@ -19377,8 +19377,8 @@
         </p:nvSpPr>
         <p:spPr>
           <a:xfrm>
-            <a:off x="792000" y="2916000"/>
-            <a:ext cx="1008000" cy="468000"/>
+            <a:off x="792000" y="2988000"/>
+            <a:ext cx="1152000" cy="468000"/>
           </a:xfrm>
           <a:prstGeom prst="rect">
             <a:avLst/>
@@ -19397,7 +19397,7 @@
               </a:lnSpc>
             </a:pPr>
             <a:r>
-              <a:rPr sz="850" b="1">
+              <a:rPr sz="1000" b="1">
                 <a:solidFill>
                   <a:srgbClr val="1A1D29"/>
                 </a:solidFill>
@@ -19417,8 +19417,8 @@
         </p:nvSpPr>
         <p:spPr>
           <a:xfrm>
-            <a:off x="1908000" y="2916000"/>
-            <a:ext cx="2520000" cy="468000"/>
+            <a:off x="2052000" y="2988000"/>
+            <a:ext cx="2448000" cy="468000"/>
           </a:xfrm>
           <a:prstGeom prst="rect">
             <a:avLst/>
@@ -19463,8 +19463,8 @@
         </p:nvSpPr>
         <p:spPr>
           <a:xfrm>
-            <a:off x="2016000" y="2916000"/>
-            <a:ext cx="2304000" cy="468000"/>
+            <a:off x="2160000" y="2988000"/>
+            <a:ext cx="2232000" cy="468000"/>
           </a:xfrm>
           <a:prstGeom prst="rect">
             <a:avLst/>
@@ -19483,7 +19483,7 @@
               </a:lnSpc>
             </a:pPr>
             <a:r>
-              <a:rPr sz="850" b="0">
+              <a:rPr sz="1000" b="0">
                 <a:solidFill>
                   <a:srgbClr val="3A3F4D"/>
                 </a:solidFill>
@@ -19503,8 +19503,8 @@
         </p:nvSpPr>
         <p:spPr>
           <a:xfrm>
-            <a:off x="4428000" y="2916000"/>
-            <a:ext cx="2520000" cy="468000"/>
+            <a:off x="4500000" y="2988000"/>
+            <a:ext cx="2448000" cy="468000"/>
           </a:xfrm>
           <a:prstGeom prst="rect">
             <a:avLst/>
@@ -19549,8 +19549,8 @@
         </p:nvSpPr>
         <p:spPr>
           <a:xfrm>
-            <a:off x="4536000" y="2916000"/>
-            <a:ext cx="2304000" cy="468000"/>
+            <a:off x="4608000" y="2988000"/>
+            <a:ext cx="2232000" cy="468000"/>
           </a:xfrm>
           <a:prstGeom prst="rect">
             <a:avLst/>
@@ -19569,7 +19569,7 @@
               </a:lnSpc>
             </a:pPr>
             <a:r>
-              <a:rPr sz="850" b="0">
+              <a:rPr sz="1000" b="0">
                 <a:solidFill>
                   <a:srgbClr val="3A3F4D"/>
                 </a:solidFill>
@@ -19589,7 +19589,7 @@
         </p:nvSpPr>
         <p:spPr>
           <a:xfrm>
-            <a:off x="6948000" y="2916000"/>
+            <a:off x="6948000" y="2988000"/>
             <a:ext cx="3060000" cy="468000"/>
           </a:xfrm>
           <a:prstGeom prst="rect">
@@ -19635,7 +19635,7 @@
         </p:nvSpPr>
         <p:spPr>
           <a:xfrm>
-            <a:off x="7056000" y="2916000"/>
+            <a:off x="7056000" y="2988000"/>
             <a:ext cx="2844000" cy="468000"/>
           </a:xfrm>
           <a:prstGeom prst="rect">
@@ -19655,7 +19655,7 @@
               </a:lnSpc>
             </a:pPr>
             <a:r>
-              <a:rPr sz="850" b="0">
+              <a:rPr sz="1000" b="0">
                 <a:solidFill>
                   <a:srgbClr val="1A1D29"/>
                 </a:solidFill>
@@ -19675,8 +19675,8 @@
         </p:nvSpPr>
         <p:spPr>
           <a:xfrm>
-            <a:off x="684000" y="3384000"/>
-            <a:ext cx="1224000" cy="540000"/>
+            <a:off x="684000" y="3456000"/>
+            <a:ext cx="1368000" cy="540000"/>
           </a:xfrm>
           <a:prstGeom prst="rect">
             <a:avLst/>
@@ -19721,8 +19721,8 @@
         </p:nvSpPr>
         <p:spPr>
           <a:xfrm>
-            <a:off x="792000" y="3384000"/>
-            <a:ext cx="1008000" cy="540000"/>
+            <a:off x="792000" y="3456000"/>
+            <a:ext cx="1152000" cy="540000"/>
           </a:xfrm>
           <a:prstGeom prst="rect">
             <a:avLst/>
@@ -19741,7 +19741,7 @@
               </a:lnSpc>
             </a:pPr>
             <a:r>
-              <a:rPr sz="850" b="1">
+              <a:rPr sz="1000" b="1">
                 <a:solidFill>
                   <a:srgbClr val="1A1D29"/>
                 </a:solidFill>
@@ -19761,8 +19761,8 @@
         </p:nvSpPr>
         <p:spPr>
           <a:xfrm>
-            <a:off x="1908000" y="3384000"/>
-            <a:ext cx="2520000" cy="540000"/>
+            <a:off x="2052000" y="3456000"/>
+            <a:ext cx="2448000" cy="540000"/>
           </a:xfrm>
           <a:prstGeom prst="rect">
             <a:avLst/>
@@ -19807,8 +19807,8 @@
         </p:nvSpPr>
         <p:spPr>
           <a:xfrm>
-            <a:off x="2016000" y="3384000"/>
-            <a:ext cx="2304000" cy="540000"/>
+            <a:off x="2160000" y="3456000"/>
+            <a:ext cx="2232000" cy="540000"/>
           </a:xfrm>
           <a:prstGeom prst="rect">
             <a:avLst/>
@@ -19827,7 +19827,7 @@
               </a:lnSpc>
             </a:pPr>
             <a:r>
-              <a:rPr sz="850" b="0">
+              <a:rPr sz="1000" b="0">
                 <a:solidFill>
                   <a:srgbClr val="3A3F4D"/>
                 </a:solidFill>
@@ -19847,8 +19847,8 @@
         </p:nvSpPr>
         <p:spPr>
           <a:xfrm>
-            <a:off x="4428000" y="3384000"/>
-            <a:ext cx="2520000" cy="540000"/>
+            <a:off x="4500000" y="3456000"/>
+            <a:ext cx="2448000" cy="540000"/>
           </a:xfrm>
           <a:prstGeom prst="rect">
             <a:avLst/>
@@ -19893,8 +19893,8 @@
         </p:nvSpPr>
         <p:spPr>
           <a:xfrm>
-            <a:off x="4536000" y="3384000"/>
-            <a:ext cx="2304000" cy="540000"/>
+            <a:off x="4608000" y="3456000"/>
+            <a:ext cx="2232000" cy="540000"/>
           </a:xfrm>
           <a:prstGeom prst="rect">
             <a:avLst/>
@@ -19913,7 +19913,7 @@
               </a:lnSpc>
             </a:pPr>
             <a:r>
-              <a:rPr sz="850" b="0">
+              <a:rPr sz="1000" b="0">
                 <a:solidFill>
                   <a:srgbClr val="3A3F4D"/>
                 </a:solidFill>
@@ -19933,7 +19933,7 @@
         </p:nvSpPr>
         <p:spPr>
           <a:xfrm>
-            <a:off x="6948000" y="3384000"/>
+            <a:off x="6948000" y="3456000"/>
             <a:ext cx="3060000" cy="540000"/>
           </a:xfrm>
           <a:prstGeom prst="rect">
@@ -19979,7 +19979,7 @@
         </p:nvSpPr>
         <p:spPr>
           <a:xfrm>
-            <a:off x="7056000" y="3384000"/>
+            <a:off x="7056000" y="3456000"/>
             <a:ext cx="2844000" cy="540000"/>
           </a:xfrm>
           <a:prstGeom prst="rect">
@@ -19999,7 +19999,7 @@
               </a:lnSpc>
             </a:pPr>
             <a:r>
-              <a:rPr sz="850" b="0">
+              <a:rPr sz="1000" b="0">
                 <a:solidFill>
                   <a:srgbClr val="1A1D29"/>
                 </a:solidFill>
@@ -20019,8 +20019,8 @@
         </p:nvSpPr>
         <p:spPr>
           <a:xfrm>
-            <a:off x="684000" y="3924000"/>
-            <a:ext cx="1224000" cy="468000"/>
+            <a:off x="684000" y="3996000"/>
+            <a:ext cx="1368000" cy="468000"/>
           </a:xfrm>
           <a:prstGeom prst="rect">
             <a:avLst/>
@@ -20065,8 +20065,8 @@
         </p:nvSpPr>
         <p:spPr>
           <a:xfrm>
-            <a:off x="792000" y="3924000"/>
-            <a:ext cx="1008000" cy="468000"/>
+            <a:off x="792000" y="3996000"/>
+            <a:ext cx="1152000" cy="468000"/>
           </a:xfrm>
           <a:prstGeom prst="rect">
             <a:avLst/>
@@ -20085,7 +20085,7 @@
               </a:lnSpc>
             </a:pPr>
             <a:r>
-              <a:rPr sz="850" b="1">
+              <a:rPr sz="1000" b="1">
                 <a:solidFill>
                   <a:srgbClr val="1A1D29"/>
                 </a:solidFill>
@@ -20105,8 +20105,8 @@
         </p:nvSpPr>
         <p:spPr>
           <a:xfrm>
-            <a:off x="1908000" y="3924000"/>
-            <a:ext cx="2520000" cy="468000"/>
+            <a:off x="2052000" y="3996000"/>
+            <a:ext cx="2448000" cy="468000"/>
           </a:xfrm>
           <a:prstGeom prst="rect">
             <a:avLst/>
@@ -20151,8 +20151,8 @@
         </p:nvSpPr>
         <p:spPr>
           <a:xfrm>
-            <a:off x="2016000" y="3924000"/>
-            <a:ext cx="2304000" cy="468000"/>
+            <a:off x="2160000" y="3996000"/>
+            <a:ext cx="2232000" cy="468000"/>
           </a:xfrm>
           <a:prstGeom prst="rect">
             <a:avLst/>
@@ -20171,7 +20171,7 @@
               </a:lnSpc>
             </a:pPr>
             <a:r>
-              <a:rPr sz="850" b="0">
+              <a:rPr sz="1000" b="0">
                 <a:solidFill>
                   <a:srgbClr val="3A3F4D"/>
                 </a:solidFill>
@@ -20191,8 +20191,8 @@
         </p:nvSpPr>
         <p:spPr>
           <a:xfrm>
-            <a:off x="4428000" y="3924000"/>
-            <a:ext cx="2520000" cy="468000"/>
+            <a:off x="4500000" y="3996000"/>
+            <a:ext cx="2448000" cy="468000"/>
           </a:xfrm>
           <a:prstGeom prst="rect">
             <a:avLst/>
@@ -20237,8 +20237,8 @@
         </p:nvSpPr>
         <p:spPr>
           <a:xfrm>
-            <a:off x="4536000" y="3924000"/>
-            <a:ext cx="2304000" cy="468000"/>
+            <a:off x="4608000" y="3996000"/>
+            <a:ext cx="2232000" cy="468000"/>
           </a:xfrm>
           <a:prstGeom prst="rect">
             <a:avLst/>
@@ -20257,7 +20257,7 @@
               </a:lnSpc>
             </a:pPr>
             <a:r>
-              <a:rPr sz="850" b="0">
+              <a:rPr sz="1000" b="0">
                 <a:solidFill>
                   <a:srgbClr val="3A3F4D"/>
                 </a:solidFill>
@@ -20277,7 +20277,7 @@
         </p:nvSpPr>
         <p:spPr>
           <a:xfrm>
-            <a:off x="6948000" y="3924000"/>
+            <a:off x="6948000" y="3996000"/>
             <a:ext cx="3060000" cy="468000"/>
           </a:xfrm>
           <a:prstGeom prst="rect">
@@ -20323,7 +20323,7 @@
         </p:nvSpPr>
         <p:spPr>
           <a:xfrm>
-            <a:off x="7056000" y="3924000"/>
+            <a:off x="7056000" y="3996000"/>
             <a:ext cx="2844000" cy="468000"/>
           </a:xfrm>
           <a:prstGeom prst="rect">
@@ -20343,7 +20343,7 @@
               </a:lnSpc>
             </a:pPr>
             <a:r>
-              <a:rPr sz="850" b="0">
+              <a:rPr sz="1000" b="0">
                 <a:solidFill>
                   <a:srgbClr val="1A1D29"/>
                 </a:solidFill>
@@ -20363,7 +20363,7 @@
         </p:nvSpPr>
         <p:spPr>
           <a:xfrm>
-            <a:off x="6948000" y="1620000"/>
+            <a:off x="6948000" y="1692000"/>
             <a:ext cx="3060000" cy="2772000"/>
           </a:xfrm>
           <a:prstGeom prst="rect">
@@ -20407,7 +20407,7 @@
         </p:nvSpPr>
         <p:spPr>
           <a:xfrm>
-            <a:off x="684000" y="4500000"/>
+            <a:off x="684000" y="4572000"/>
             <a:ext cx="9324000" cy="360000"/>
           </a:xfrm>
           <a:prstGeom prst="rect">
@@ -20427,7 +20427,7 @@
               </a:lnSpc>
             </a:pPr>
             <a:r>
-              <a:rPr sz="750" b="0">
+              <a:rPr sz="880" b="0">
                 <a:solidFill>
                   <a:srgbClr val="5F6672"/>
                 </a:solidFill>
@@ -20467,7 +20467,7 @@
               </a:lnSpc>
             </a:pPr>
             <a:r>
-              <a:rPr sz="900" b="1">
+              <a:rPr sz="1060" b="1">
                 <a:solidFill>
                   <a:srgbClr val="7A6030"/>
                 </a:solidFill>
@@ -20477,7 +20477,7 @@
               <a:t>MarkGate</a:t>
             </a:r>
             <a:r>
-              <a:rPr sz="700" b="0">
+              <a:rPr sz="830" b="0">
                 <a:solidFill>
                   <a:srgbClr val="5F6672"/>
                 </a:solidFill>
@@ -20517,7 +20517,7 @@
               </a:lnSpc>
             </a:pPr>
             <a:r>
-              <a:rPr sz="900" b="0" spc="100">
+              <a:rPr sz="1060" b="0" spc="100">
                 <a:solidFill>
                   <a:srgbClr val="5F6672"/>
                 </a:solidFill>
@@ -20619,7 +20619,7 @@
               </a:lnSpc>
             </a:pPr>
             <a:r>
-              <a:rPr sz="1700" b="0">
+              <a:rPr sz="2010" b="0">
                 <a:solidFill>
                   <a:srgbClr val="C6A15B"/>
                 </a:solidFill>
@@ -20659,7 +20659,7 @@
               </a:lnSpc>
             </a:pPr>
             <a:r>
-              <a:rPr sz="750" b="0" spc="300">
+              <a:rPr sz="880" b="0" spc="300">
                 <a:solidFill>
                   <a:srgbClr val="7A6030"/>
                 </a:solidFill>
@@ -20680,7 +20680,7 @@
         <p:spPr>
           <a:xfrm>
             <a:off x="684000" y="792000"/>
-            <a:ext cx="9324000" cy="432000"/>
+            <a:ext cx="9324000" cy="504000"/>
           </a:xfrm>
           <a:prstGeom prst="rect">
             <a:avLst/>
@@ -20699,7 +20699,7 @@
               </a:lnSpc>
             </a:pPr>
             <a:r>
-              <a:rPr sz="2200" b="1">
+              <a:rPr sz="2600" b="1">
                 <a:solidFill>
                   <a:srgbClr val="1A1D29"/>
                 </a:solidFill>
@@ -20719,8 +20719,8 @@
         </p:nvSpPr>
         <p:spPr>
           <a:xfrm>
-            <a:off x="684000" y="1260000"/>
-            <a:ext cx="9000000" cy="360000"/>
+            <a:off x="684000" y="1332000"/>
+            <a:ext cx="9180000" cy="504000"/>
           </a:xfrm>
           <a:prstGeom prst="rect">
             <a:avLst/>
@@ -20739,7 +20739,7 @@
               </a:lnSpc>
             </a:pPr>
             <a:r>
-              <a:rPr sz="1000" b="0">
+              <a:rPr sz="1180" b="0">
                 <a:solidFill>
                   <a:srgbClr val="3A3F4D"/>
                 </a:solidFill>
@@ -20759,7 +20759,7 @@
         </p:nvSpPr>
         <p:spPr>
           <a:xfrm>
-            <a:off x="684000" y="1656000"/>
+            <a:off x="684000" y="1908000"/>
             <a:ext cx="504000" cy="25200"/>
           </a:xfrm>
           <a:prstGeom prst="rect">
@@ -20803,7 +20803,7 @@
         </p:nvSpPr>
         <p:spPr>
           <a:xfrm>
-            <a:off x="684000" y="1944000"/>
+            <a:off x="684000" y="2196000"/>
             <a:ext cx="3600000" cy="180000"/>
           </a:xfrm>
           <a:prstGeom prst="rect">
@@ -20823,7 +20823,7 @@
               </a:lnSpc>
             </a:pPr>
             <a:r>
-              <a:rPr sz="800" b="0" spc="250">
+              <a:rPr sz="940" b="0" spc="250">
                 <a:solidFill>
                   <a:srgbClr val="7A6030"/>
                 </a:solidFill>
@@ -20843,8 +20843,8 @@
         </p:nvSpPr>
         <p:spPr>
           <a:xfrm>
-            <a:off x="684000" y="2196000"/>
-            <a:ext cx="5040000" cy="684000"/>
+            <a:off x="684000" y="2448000"/>
+            <a:ext cx="5040000" cy="792000"/>
           </a:xfrm>
           <a:prstGeom prst="rect">
             <a:avLst/>
@@ -20889,8 +20889,8 @@
         </p:nvSpPr>
         <p:spPr>
           <a:xfrm>
-            <a:off x="684000" y="2196000"/>
-            <a:ext cx="36000" cy="684000"/>
+            <a:off x="684000" y="2448000"/>
+            <a:ext cx="36000" cy="792000"/>
           </a:xfrm>
           <a:prstGeom prst="rect">
             <a:avLst/>
@@ -20933,8 +20933,8 @@
         </p:nvSpPr>
         <p:spPr>
           <a:xfrm>
-            <a:off x="900000" y="2286000"/>
-            <a:ext cx="4680000" cy="540000"/>
+            <a:off x="900000" y="2556000"/>
+            <a:ext cx="4680000" cy="648000"/>
           </a:xfrm>
           <a:prstGeom prst="rect">
             <a:avLst/>
@@ -20956,7 +20956,7 @@
               </a:spcAft>
             </a:pPr>
             <a:r>
-              <a:rPr sz="1050" b="1">
+              <a:rPr sz="1240" b="1">
                 <a:solidFill>
                   <a:srgbClr val="1A1D29"/>
                 </a:solidFill>
@@ -20973,7 +20973,7 @@
               </a:lnSpc>
             </a:pPr>
             <a:r>
-              <a:rPr sz="800" b="0">
+              <a:rPr sz="940" b="0">
                 <a:solidFill>
                   <a:srgbClr val="3A3F4D"/>
                 </a:solidFill>
@@ -20993,8 +20993,8 @@
         </p:nvSpPr>
         <p:spPr>
           <a:xfrm>
-            <a:off x="684000" y="3006000"/>
-            <a:ext cx="5040000" cy="684000"/>
+            <a:off x="684000" y="3366000"/>
+            <a:ext cx="5040000" cy="792000"/>
           </a:xfrm>
           <a:prstGeom prst="rect">
             <a:avLst/>
@@ -21039,8 +21039,8 @@
         </p:nvSpPr>
         <p:spPr>
           <a:xfrm>
-            <a:off x="684000" y="3006000"/>
-            <a:ext cx="36000" cy="684000"/>
+            <a:off x="684000" y="3366000"/>
+            <a:ext cx="36000" cy="792000"/>
           </a:xfrm>
           <a:prstGeom prst="rect">
             <a:avLst/>
@@ -21083,8 +21083,8 @@
         </p:nvSpPr>
         <p:spPr>
           <a:xfrm>
-            <a:off x="900000" y="3096000"/>
-            <a:ext cx="4680000" cy="540000"/>
+            <a:off x="900000" y="3474000"/>
+            <a:ext cx="4680000" cy="648000"/>
           </a:xfrm>
           <a:prstGeom prst="rect">
             <a:avLst/>
@@ -21106,7 +21106,7 @@
               </a:spcAft>
             </a:pPr>
             <a:r>
-              <a:rPr sz="1050" b="1">
+              <a:rPr sz="1240" b="1">
                 <a:solidFill>
                   <a:srgbClr val="1A1D29"/>
                 </a:solidFill>
@@ -21123,7 +21123,7 @@
               </a:lnSpc>
             </a:pPr>
             <a:r>
-              <a:rPr sz="800" b="0">
+              <a:rPr sz="940" b="0">
                 <a:solidFill>
                   <a:srgbClr val="3A3F4D"/>
                 </a:solidFill>
@@ -21143,8 +21143,8 @@
         </p:nvSpPr>
         <p:spPr>
           <a:xfrm>
-            <a:off x="684000" y="3816000"/>
-            <a:ext cx="5040000" cy="684000"/>
+            <a:off x="684000" y="4284000"/>
+            <a:ext cx="5040000" cy="792000"/>
           </a:xfrm>
           <a:prstGeom prst="rect">
             <a:avLst/>
@@ -21189,8 +21189,8 @@
         </p:nvSpPr>
         <p:spPr>
           <a:xfrm>
-            <a:off x="684000" y="3816000"/>
-            <a:ext cx="36000" cy="684000"/>
+            <a:off x="684000" y="4284000"/>
+            <a:ext cx="36000" cy="792000"/>
           </a:xfrm>
           <a:prstGeom prst="rect">
             <a:avLst/>
@@ -21233,8 +21233,8 @@
         </p:nvSpPr>
         <p:spPr>
           <a:xfrm>
-            <a:off x="900000" y="3906000"/>
-            <a:ext cx="4680000" cy="540000"/>
+            <a:off x="900000" y="4392000"/>
+            <a:ext cx="4680000" cy="648000"/>
           </a:xfrm>
           <a:prstGeom prst="rect">
             <a:avLst/>
@@ -21256,7 +21256,7 @@
               </a:spcAft>
             </a:pPr>
             <a:r>
-              <a:rPr sz="1050" b="1">
+              <a:rPr sz="1240" b="1">
                 <a:solidFill>
                   <a:srgbClr val="1A1D29"/>
                 </a:solidFill>
@@ -21273,7 +21273,7 @@
               </a:lnSpc>
             </a:pPr>
             <a:r>
-              <a:rPr sz="800" b="0">
+              <a:rPr sz="940" b="0">
                 <a:solidFill>
                   <a:srgbClr val="3A3F4D"/>
                 </a:solidFill>
@@ -21293,8 +21293,8 @@
         </p:nvSpPr>
         <p:spPr>
           <a:xfrm>
-            <a:off x="684000" y="4626000"/>
-            <a:ext cx="5040000" cy="684000"/>
+            <a:off x="684000" y="5202000"/>
+            <a:ext cx="5040000" cy="792000"/>
           </a:xfrm>
           <a:prstGeom prst="rect">
             <a:avLst/>
@@ -21339,8 +21339,8 @@
         </p:nvSpPr>
         <p:spPr>
           <a:xfrm>
-            <a:off x="684000" y="4626000"/>
-            <a:ext cx="36000" cy="684000"/>
+            <a:off x="684000" y="5202000"/>
+            <a:ext cx="36000" cy="792000"/>
           </a:xfrm>
           <a:prstGeom prst="rect">
             <a:avLst/>
@@ -21383,8 +21383,8 @@
         </p:nvSpPr>
         <p:spPr>
           <a:xfrm>
-            <a:off x="900000" y="4716000"/>
-            <a:ext cx="4680000" cy="540000"/>
+            <a:off x="900000" y="5310000"/>
+            <a:ext cx="4680000" cy="648000"/>
           </a:xfrm>
           <a:prstGeom prst="rect">
             <a:avLst/>
@@ -21406,7 +21406,7 @@
               </a:spcAft>
             </a:pPr>
             <a:r>
-              <a:rPr sz="1050" b="1">
+              <a:rPr sz="1240" b="1">
                 <a:solidFill>
                   <a:srgbClr val="1A1D29"/>
                 </a:solidFill>
@@ -21423,7 +21423,7 @@
               </a:lnSpc>
             </a:pPr>
             <a:r>
-              <a:rPr sz="800" b="0">
+              <a:rPr sz="940" b="0">
                 <a:solidFill>
                   <a:srgbClr val="3A3F4D"/>
                 </a:solidFill>
@@ -21443,7 +21443,7 @@
         </p:nvSpPr>
         <p:spPr>
           <a:xfrm>
-            <a:off x="6192000" y="1944000"/>
+            <a:off x="6192000" y="2196000"/>
             <a:ext cx="3600000" cy="180000"/>
           </a:xfrm>
           <a:prstGeom prst="rect">
@@ -21463,7 +21463,7 @@
               </a:lnSpc>
             </a:pPr>
             <a:r>
-              <a:rPr sz="800" b="0" spc="250">
+              <a:rPr sz="940" b="0" spc="250">
                 <a:solidFill>
                   <a:srgbClr val="7A6030"/>
                 </a:solidFill>
@@ -21483,7 +21483,7 @@
         </p:nvSpPr>
         <p:spPr>
           <a:xfrm>
-            <a:off x="6192000" y="2214000"/>
+            <a:off x="6192000" y="2466000"/>
             <a:ext cx="180000" cy="180000"/>
           </a:xfrm>
           <a:prstGeom prst="ellipse">
@@ -21527,8 +21527,8 @@
         </p:nvSpPr>
         <p:spPr>
           <a:xfrm>
-            <a:off x="6274800" y="2412000"/>
-            <a:ext cx="12600" cy="522000"/>
+            <a:off x="6274800" y="2664000"/>
+            <a:ext cx="12600" cy="612000"/>
           </a:xfrm>
           <a:prstGeom prst="rect">
             <a:avLst/>
@@ -21571,8 +21571,8 @@
         </p:nvSpPr>
         <p:spPr>
           <a:xfrm>
-            <a:off x="6516000" y="2196000"/>
-            <a:ext cx="3492000" cy="648000"/>
+            <a:off x="6516000" y="2448000"/>
+            <a:ext cx="3492000" cy="720000"/>
           </a:xfrm>
           <a:prstGeom prst="rect">
             <a:avLst/>
@@ -21594,7 +21594,7 @@
               </a:spcAft>
             </a:pPr>
             <a:r>
-              <a:rPr sz="1050" b="1">
+              <a:rPr sz="1240" b="1">
                 <a:solidFill>
                   <a:srgbClr val="1A1D29"/>
                 </a:solidFill>
@@ -21611,7 +21611,7 @@
               </a:lnSpc>
             </a:pPr>
             <a:r>
-              <a:rPr sz="800" b="0">
+              <a:rPr sz="940" b="0">
                 <a:solidFill>
                   <a:srgbClr val="3A3F4D"/>
                 </a:solidFill>
@@ -21631,7 +21631,7 @@
         </p:nvSpPr>
         <p:spPr>
           <a:xfrm>
-            <a:off x="6192000" y="2952000"/>
+            <a:off x="6192000" y="3294000"/>
             <a:ext cx="180000" cy="180000"/>
           </a:xfrm>
           <a:prstGeom prst="ellipse">
@@ -21675,8 +21675,8 @@
         </p:nvSpPr>
         <p:spPr>
           <a:xfrm>
-            <a:off x="6274800" y="3150000"/>
-            <a:ext cx="12600" cy="522000"/>
+            <a:off x="6274800" y="3492000"/>
+            <a:ext cx="12600" cy="612000"/>
           </a:xfrm>
           <a:prstGeom prst="rect">
             <a:avLst/>
@@ -21719,8 +21719,8 @@
         </p:nvSpPr>
         <p:spPr>
           <a:xfrm>
-            <a:off x="6516000" y="2934000"/>
-            <a:ext cx="3492000" cy="648000"/>
+            <a:off x="6516000" y="3276000"/>
+            <a:ext cx="3492000" cy="720000"/>
           </a:xfrm>
           <a:prstGeom prst="rect">
             <a:avLst/>
@@ -21742,7 +21742,7 @@
               </a:spcAft>
             </a:pPr>
             <a:r>
-              <a:rPr sz="1050" b="1">
+              <a:rPr sz="1240" b="1">
                 <a:solidFill>
                   <a:srgbClr val="1A1D29"/>
                 </a:solidFill>
@@ -21759,7 +21759,7 @@
               </a:lnSpc>
             </a:pPr>
             <a:r>
-              <a:rPr sz="800" b="0">
+              <a:rPr sz="940" b="0">
                 <a:solidFill>
                   <a:srgbClr val="3A3F4D"/>
                 </a:solidFill>
@@ -21779,7 +21779,7 @@
         </p:nvSpPr>
         <p:spPr>
           <a:xfrm>
-            <a:off x="6192000" y="3690000"/>
+            <a:off x="6192000" y="4122000"/>
             <a:ext cx="180000" cy="180000"/>
           </a:xfrm>
           <a:prstGeom prst="ellipse">
@@ -21823,8 +21823,8 @@
         </p:nvSpPr>
         <p:spPr>
           <a:xfrm>
-            <a:off x="6274800" y="3888000"/>
-            <a:ext cx="12600" cy="522000"/>
+            <a:off x="6274800" y="4320000"/>
+            <a:ext cx="12600" cy="612000"/>
           </a:xfrm>
           <a:prstGeom prst="rect">
             <a:avLst/>
@@ -21867,8 +21867,8 @@
         </p:nvSpPr>
         <p:spPr>
           <a:xfrm>
-            <a:off x="6516000" y="3672000"/>
-            <a:ext cx="3492000" cy="648000"/>
+            <a:off x="6516000" y="4104000"/>
+            <a:ext cx="3492000" cy="720000"/>
           </a:xfrm>
           <a:prstGeom prst="rect">
             <a:avLst/>
@@ -21890,7 +21890,7 @@
               </a:spcAft>
             </a:pPr>
             <a:r>
-              <a:rPr sz="1050" b="1">
+              <a:rPr sz="1240" b="1">
                 <a:solidFill>
                   <a:srgbClr val="1A1D29"/>
                 </a:solidFill>
@@ -21907,7 +21907,7 @@
               </a:lnSpc>
             </a:pPr>
             <a:r>
-              <a:rPr sz="800" b="0">
+              <a:rPr sz="940" b="0">
                 <a:solidFill>
                   <a:srgbClr val="3A3F4D"/>
                 </a:solidFill>
@@ -21927,7 +21927,7 @@
         </p:nvSpPr>
         <p:spPr>
           <a:xfrm>
-            <a:off x="6192000" y="4428000"/>
+            <a:off x="6192000" y="4950000"/>
             <a:ext cx="180000" cy="180000"/>
           </a:xfrm>
           <a:prstGeom prst="ellipse">
@@ -21971,8 +21971,8 @@
         </p:nvSpPr>
         <p:spPr>
           <a:xfrm>
-            <a:off x="6516000" y="4410000"/>
-            <a:ext cx="3492000" cy="648000"/>
+            <a:off x="6516000" y="4932000"/>
+            <a:ext cx="3492000" cy="720000"/>
           </a:xfrm>
           <a:prstGeom prst="rect">
             <a:avLst/>
@@ -21994,7 +21994,7 @@
               </a:spcAft>
             </a:pPr>
             <a:r>
-              <a:rPr sz="1050" b="1">
+              <a:rPr sz="1240" b="1">
                 <a:solidFill>
                   <a:srgbClr val="1A1D29"/>
                 </a:solidFill>
@@ -22011,7 +22011,7 @@
               </a:lnSpc>
             </a:pPr>
             <a:r>
-              <a:rPr sz="800" b="0">
+              <a:rPr sz="940" b="0">
                 <a:solidFill>
                   <a:srgbClr val="3A3F4D"/>
                 </a:solidFill>
@@ -22031,7 +22031,7 @@
         </p:nvSpPr>
         <p:spPr>
           <a:xfrm>
-            <a:off x="6192000" y="5184000"/>
+            <a:off x="6192000" y="5796000"/>
             <a:ext cx="3816000" cy="288000"/>
           </a:xfrm>
           <a:prstGeom prst="rect">
@@ -22051,7 +22051,7 @@
               </a:lnSpc>
             </a:pPr>
             <a:r>
-              <a:rPr sz="750" b="0">
+              <a:rPr sz="880" b="0">
                 <a:solidFill>
                   <a:srgbClr val="5F6672"/>
                 </a:solidFill>
@@ -22091,7 +22091,7 @@
               </a:lnSpc>
             </a:pPr>
             <a:r>
-              <a:rPr sz="900" b="1">
+              <a:rPr sz="1060" b="1">
                 <a:solidFill>
                   <a:srgbClr val="7A6030"/>
                 </a:solidFill>
@@ -22101,7 +22101,7 @@
               <a:t>MarkGate</a:t>
             </a:r>
             <a:r>
-              <a:rPr sz="700" b="0">
+              <a:rPr sz="830" b="0">
                 <a:solidFill>
                   <a:srgbClr val="5F6672"/>
                 </a:solidFill>
@@ -22141,7 +22141,7 @@
               </a:lnSpc>
             </a:pPr>
             <a:r>
-              <a:rPr sz="900" b="0" spc="100">
+              <a:rPr sz="1060" b="0" spc="100">
                 <a:solidFill>
                   <a:srgbClr val="5F6672"/>
                 </a:solidFill>

--- a/sales/markgate-agent-deck.pptx
+++ b/sales/markgate-agent-deck.pptx
@@ -3264,7 +3264,7 @@
               </a:lnSpc>
             </a:pPr>
             <a:r>
-              <a:rPr sz="1100" b="0" i="0" spc="400">
+              <a:rPr sz="1260" b="0" i="0" spc="400">
                 <a:solidFill>
                   <a:srgbClr val="D8C08C"/>
                 </a:solidFill>
@@ -3304,7 +3304,7 @@
               </a:lnSpc>
             </a:pPr>
             <a:r>
-              <a:rPr sz="5600" b="0" i="0">
+              <a:rPr sz="6440" b="0" i="0">
                 <a:solidFill>
                   <a:srgbClr val="FFFFFF"/>
                 </a:solidFill>
@@ -3314,7 +3314,7 @@
               <a:t>MarkGate</a:t>
             </a:r>
             <a:r>
-              <a:rPr sz="5600" b="0" i="0">
+              <a:rPr sz="6440" b="0" i="0">
                 <a:solidFill>
                   <a:srgbClr val="B8934E"/>
                 </a:solidFill>
@@ -3354,14 +3354,14 @@
               </a:lnSpc>
             </a:pPr>
             <a:r>
-              <a:rPr sz="1750" b="1" i="0" spc="200">
+              <a:rPr sz="2010" b="1" i="0" spc="200">
                 <a:solidFill>
                   <a:srgbClr val="FFFFFF"/>
                 </a:solidFill>
                 <a:latin typeface="Garamond"/>
                 <a:ea typeface="游明朝"/>
               </a:rPr>
-              <a:t>絞るから、届く。スカウトと指名のハイクラス転職。</a:t>
+              <a:t>選ばれるから、届く。“指名”で始まるハイクラス転職。</a:t>
             </a:r>
           </a:p>
         </p:txBody>
@@ -3394,14 +3394,14 @@
               </a:lnSpc>
             </a:pPr>
             <a:r>
-              <a:rPr sz="950" b="0" i="0" spc="100">
+              <a:rPr sz="1090" b="0" i="0" spc="100">
                 <a:solidFill>
                   <a:srgbClr val="ABA595"/>
                 </a:solidFill>
                 <a:latin typeface="Yu Gothic"/>
                 <a:ea typeface="游ゴシック"/>
               </a:rPr>
-              <a:t>「量の競争」で飽和した転職スカウト市場を、送り手を絞る「質の競争」へ。</a:t>
+              <a:t>「量の競争」で飽和した転職スカウト市場に、求職者がCAを選ぶ「指名」という新しい入口を。</a:t>
             </a:r>
           </a:p>
           <a:p>
@@ -3411,7 +3411,7 @@
               </a:lnSpc>
             </a:pPr>
             <a:r>
-              <a:rPr sz="950" b="0" i="0" spc="100">
+              <a:rPr sz="1090" b="0" i="0" spc="100">
                 <a:solidFill>
                   <a:srgbClr val="ABA595"/>
                 </a:solidFill>
@@ -3451,7 +3451,7 @@
               </a:lnSpc>
             </a:pPr>
             <a:r>
-              <a:rPr sz="800" b="0" i="0" spc="300">
+              <a:rPr sz="919" b="0" i="0" spc="300">
                 <a:solidFill>
                   <a:srgbClr val="7E7868"/>
                 </a:solidFill>
@@ -3491,7 +3491,7 @@
               </a:lnSpc>
             </a:pPr>
             <a:r>
-              <a:rPr sz="1050" b="0" i="1">
+              <a:rPr sz="1210" b="0" i="1">
                 <a:solidFill>
                   <a:srgbClr val="D8C08C"/>
                 </a:solidFill>
@@ -3593,7 +3593,7 @@
               </a:lnSpc>
             </a:pPr>
             <a:r>
-              <a:rPr sz="1050" b="0" i="1" spc="250">
+              <a:rPr sz="1210" b="0" i="1" spc="250">
                 <a:solidFill>
                   <a:srgbClr val="8A6A32"/>
                 </a:solidFill>
@@ -3658,7 +3658,7 @@
         <p:spPr>
           <a:xfrm>
             <a:off x="738000" y="1008000"/>
-            <a:ext cx="10713600" cy="576000"/>
+            <a:ext cx="10713600" cy="666000"/>
           </a:xfrm>
           <a:prstGeom prst="rect">
             <a:avLst/>
@@ -3677,7 +3677,7 @@
               </a:lnSpc>
             </a:pPr>
             <a:r>
-              <a:rPr sz="2900" b="1" i="0" spc="100">
+              <a:rPr sz="3329" b="1" i="0" spc="100">
                 <a:solidFill>
                   <a:srgbClr val="201C15"/>
                 </a:solidFill>
@@ -3687,7 +3687,7 @@
               <a:t>母集団は、「CAを</a:t>
             </a:r>
             <a:r>
-              <a:rPr sz="2900" b="1" i="0" spc="100">
+              <a:rPr sz="3329" b="1" i="0" spc="100">
                 <a:solidFill>
                   <a:srgbClr val="B8934E"/>
                 </a:solidFill>
@@ -3697,7 +3697,7 @@
               <a:t>選びたい人</a:t>
             </a:r>
             <a:r>
-              <a:rPr sz="2900" b="1" i="0" spc="100">
+              <a:rPr sz="3329" b="1" i="0" spc="100">
                 <a:solidFill>
                   <a:srgbClr val="201C15"/>
                 </a:solidFill>
@@ -3717,7 +3717,7 @@
         </p:nvSpPr>
         <p:spPr>
           <a:xfrm>
-            <a:off x="738000" y="1602000"/>
+            <a:off x="738000" y="1692000"/>
             <a:ext cx="10713600" cy="324000"/>
           </a:xfrm>
           <a:prstGeom prst="rect">
@@ -3737,7 +3737,7 @@
               </a:lnSpc>
             </a:pPr>
             <a:r>
-              <a:rPr sz="1050" b="0" i="0" spc="100">
+              <a:rPr sz="1210" b="0" i="0" spc="100">
                 <a:solidFill>
                   <a:srgbClr val="8F8A7B"/>
                 </a:solidFill>
@@ -3821,7 +3821,7 @@
               </a:lnSpc>
             </a:pPr>
             <a:r>
-              <a:rPr sz="1200" b="1" i="0">
+              <a:rPr sz="1380" b="1" i="0">
                 <a:solidFill>
                   <a:srgbClr val="201C15"/>
                 </a:solidFill>
@@ -3861,7 +3861,7 @@
               </a:lnSpc>
             </a:pPr>
             <a:r>
-              <a:rPr sz="850" b="0" i="0">
+              <a:rPr sz="980" b="0" i="0">
                 <a:solidFill>
                   <a:srgbClr val="201C15"/>
                 </a:solidFill>
@@ -3945,7 +3945,7 @@
               </a:lnSpc>
             </a:pPr>
             <a:r>
-              <a:rPr sz="1200" b="1" i="0">
+              <a:rPr sz="1380" b="1" i="0">
                 <a:solidFill>
                   <a:srgbClr val="201C15"/>
                 </a:solidFill>
@@ -3985,7 +3985,7 @@
               </a:lnSpc>
             </a:pPr>
             <a:r>
-              <a:rPr sz="850" b="0" i="0">
+              <a:rPr sz="980" b="0" i="0">
                 <a:solidFill>
                   <a:srgbClr val="201C15"/>
                 </a:solidFill>
@@ -4069,7 +4069,7 @@
               </a:lnSpc>
             </a:pPr>
             <a:r>
-              <a:rPr sz="1200" b="1" i="0">
+              <a:rPr sz="1380" b="1" i="0">
                 <a:solidFill>
                   <a:srgbClr val="201C15"/>
                 </a:solidFill>
@@ -4109,7 +4109,7 @@
               </a:lnSpc>
             </a:pPr>
             <a:r>
-              <a:rPr sz="850" b="0" i="0">
+              <a:rPr sz="980" b="0" i="0">
                 <a:solidFill>
                   <a:srgbClr val="201C15"/>
                 </a:solidFill>
@@ -4196,7 +4196,7 @@
               </a:spcAft>
             </a:pPr>
             <a:r>
-              <a:rPr sz="1500" b="0" i="1">
+              <a:rPr sz="1720" b="0" i="1">
                 <a:solidFill>
                   <a:srgbClr val="D8C08C"/>
                 </a:solidFill>
@@ -4216,7 +4216,7 @@
               </a:spcAft>
             </a:pPr>
             <a:r>
-              <a:rPr sz="1050" b="1" i="0">
+              <a:rPr sz="1210" b="1" i="0">
                 <a:solidFill>
                   <a:srgbClr val="FFFFFF"/>
                 </a:solidFill>
@@ -4233,7 +4233,7 @@
               </a:lnSpc>
             </a:pPr>
             <a:r>
-              <a:rPr sz="880" b="0" i="0">
+              <a:rPr sz="1010" b="0" i="0">
                 <a:solidFill>
                   <a:srgbClr val="ABA595"/>
                 </a:solidFill>
@@ -4317,7 +4317,7 @@
               </a:lnSpc>
             </a:pPr>
             <a:r>
-              <a:rPr sz="880" b="0" i="0">
+              <a:rPr sz="1010" b="0" i="0">
                 <a:solidFill>
                   <a:srgbClr val="FFFFFF"/>
                 </a:solidFill>
@@ -4401,7 +4401,7 @@
               </a:lnSpc>
             </a:pPr>
             <a:r>
-              <a:rPr sz="1050" b="0" i="0">
+              <a:rPr sz="1210" b="0" i="0">
                 <a:solidFill>
                   <a:srgbClr val="FFFFFF"/>
                 </a:solidFill>
@@ -4411,7 +4411,7 @@
               <a:t>求職者が集まらなければ、当社の売上もゼロ — </a:t>
             </a:r>
             <a:r>
-              <a:rPr sz="1050" b="1" i="0">
+              <a:rPr sz="1210" b="1" i="0">
                 <a:solidFill>
                   <a:srgbClr val="D8C08C"/>
                 </a:solidFill>
@@ -4513,7 +4513,7 @@
               </a:lnSpc>
             </a:pPr>
             <a:r>
-              <a:rPr sz="1050" b="0" i="1" spc="250">
+              <a:rPr sz="1210" b="0" i="1" spc="250">
                 <a:solidFill>
                   <a:srgbClr val="8A6A32"/>
                 </a:solidFill>
@@ -4578,7 +4578,7 @@
         <p:spPr>
           <a:xfrm>
             <a:off x="738000" y="1008000"/>
-            <a:ext cx="10713600" cy="576000"/>
+            <a:ext cx="10713600" cy="666000"/>
           </a:xfrm>
           <a:prstGeom prst="rect">
             <a:avLst/>
@@ -4597,7 +4597,7 @@
               </a:lnSpc>
             </a:pPr>
             <a:r>
-              <a:rPr sz="2900" b="1" i="0" spc="100">
+              <a:rPr sz="3329" b="1" i="0" spc="100">
                 <a:solidFill>
                   <a:srgbClr val="201C15"/>
                 </a:solidFill>
@@ -4607,7 +4607,7 @@
               <a:t>既存チャネルとの、</a:t>
             </a:r>
             <a:r>
-              <a:rPr sz="2900" b="1" i="0" spc="100">
+              <a:rPr sz="3329" b="1" i="0" spc="100">
                 <a:solidFill>
                   <a:srgbClr val="B8934E"/>
                 </a:solidFill>
@@ -4617,7 +4617,7 @@
               <a:t>違い</a:t>
             </a:r>
             <a:r>
-              <a:rPr sz="2900" b="1" i="0" spc="100">
+              <a:rPr sz="3329" b="1" i="0" spc="100">
                 <a:solidFill>
                   <a:srgbClr val="201C15"/>
                 </a:solidFill>
@@ -4637,7 +4637,7 @@
         </p:nvSpPr>
         <p:spPr>
           <a:xfrm>
-            <a:off x="738000" y="1602000"/>
+            <a:off x="738000" y="1692000"/>
             <a:ext cx="10713600" cy="324000"/>
           </a:xfrm>
           <a:prstGeom prst="rect">
@@ -4657,7 +4657,7 @@
               </a:lnSpc>
             </a:pPr>
             <a:r>
-              <a:rPr sz="1050" b="0" i="0" spc="100">
+              <a:rPr sz="1210" b="0" i="0" spc="100">
                 <a:solidFill>
                   <a:srgbClr val="8F8A7B"/>
                 </a:solidFill>
@@ -4785,7 +4785,7 @@
               </a:lnSpc>
             </a:pPr>
             <a:r>
-              <a:rPr sz="1000" b="1" i="0">
+              <a:rPr sz="1150" b="1" i="0">
                 <a:solidFill>
                   <a:srgbClr val="201C15"/>
                 </a:solidFill>
@@ -4825,7 +4825,7 @@
               </a:lnSpc>
             </a:pPr>
             <a:r>
-              <a:rPr sz="1000" b="1" i="0">
+              <a:rPr sz="1150" b="1" i="0">
                 <a:solidFill>
                   <a:srgbClr val="201C15"/>
                 </a:solidFill>
@@ -4842,7 +4842,7 @@
               </a:lnSpc>
             </a:pPr>
             <a:r>
-              <a:rPr sz="680" b="0" i="0" spc="100">
+              <a:rPr sz="780" b="0" i="0" spc="100">
                 <a:solidFill>
                   <a:srgbClr val="8F8A7B"/>
                 </a:solidFill>
@@ -4882,7 +4882,7 @@
               </a:lnSpc>
             </a:pPr>
             <a:r>
-              <a:rPr sz="1000" b="1" i="0">
+              <a:rPr sz="1150" b="1" i="0">
                 <a:solidFill>
                   <a:srgbClr val="201C15"/>
                 </a:solidFill>
@@ -4899,7 +4899,7 @@
               </a:lnSpc>
             </a:pPr>
             <a:r>
-              <a:rPr sz="680" b="0" i="0" spc="100">
+              <a:rPr sz="780" b="0" i="0" spc="100">
                 <a:solidFill>
                   <a:srgbClr val="8F8A7B"/>
                 </a:solidFill>
@@ -4939,7 +4939,7 @@
               </a:lnSpc>
             </a:pPr>
             <a:r>
-              <a:rPr sz="1000" b="1" i="0">
+              <a:rPr sz="1150" b="1" i="0">
                 <a:solidFill>
                   <a:srgbClr val="FFFFFF"/>
                 </a:solidFill>
@@ -4956,14 +4956,14 @@
               </a:lnSpc>
             </a:pPr>
             <a:r>
-              <a:rPr sz="680" b="0" i="0" spc="100">
+              <a:rPr sz="780" b="0" i="0" spc="100">
                 <a:solidFill>
                   <a:srgbClr val="D8C08C"/>
                 </a:solidFill>
                 <a:latin typeface="Yu Gothic"/>
                 <a:ea typeface="游ゴシック"/>
               </a:rPr>
-              <a:t>審査制×双方向マッチング</a:t>
+              <a:t>審査制×指名型マッチング</a:t>
             </a:r>
           </a:p>
         </p:txBody>
@@ -5084,14 +5084,14 @@
               </a:lnSpc>
             </a:pPr>
             <a:r>
-              <a:rPr sz="900" b="1" i="0">
+              <a:rPr sz="1030" b="1" i="0">
                 <a:solidFill>
                   <a:srgbClr val="201C15"/>
                 </a:solidFill>
                 <a:latin typeface="Yu Gothic"/>
                 <a:ea typeface="游ゴシック"/>
               </a:rPr>
-              <a:t>スカウトの競争環境</a:t>
+              <a:t>求職者との接点</a:t>
             </a:r>
           </a:p>
         </p:txBody>
@@ -5124,7 +5124,7 @@
               </a:lnSpc>
             </a:pPr>
             <a:r>
-              <a:rPr sz="900" b="1" i="0">
+              <a:rPr sz="1030" b="1" i="0">
                 <a:solidFill>
                   <a:srgbClr val="A03A2A"/>
                 </a:solidFill>
@@ -5134,14 +5134,14 @@
               <a:t>✕ </a:t>
             </a:r>
             <a:r>
-              <a:rPr sz="880" b="0" i="0">
+              <a:rPr sz="1010" b="0" i="0">
                 <a:solidFill>
                   <a:srgbClr val="201C15"/>
                 </a:solidFill>
                 <a:latin typeface="Yu Gothic"/>
                 <a:ea typeface="游ゴシック"/>
               </a:rPr>
-              <a:t>誰でも登録可。送信過多で受信箱が飽和</a:t>
+              <a:t>スカウト送信（受信箱で競争・埋もれる）</a:t>
             </a:r>
           </a:p>
         </p:txBody>
@@ -5174,24 +5174,24 @@
               </a:lnSpc>
             </a:pPr>
             <a:r>
-              <a:rPr sz="900" b="1" i="0">
+              <a:rPr sz="1030" b="1" i="0">
                 <a:solidFill>
                   <a:srgbClr val="8F8A7B"/>
                 </a:solidFill>
                 <a:latin typeface="Yu Gothic"/>
                 <a:ea typeface="游ゴシック"/>
               </a:rPr>
-              <a:t>— </a:t>
-            </a:r>
-            <a:r>
-              <a:rPr sz="880" b="0" i="0">
+              <a:t>△ </a:t>
+            </a:r>
+            <a:r>
+              <a:rPr sz="1010" b="0" i="0">
                 <a:solidFill>
                   <a:srgbClr val="201C15"/>
                 </a:solidFill>
                 <a:latin typeface="Yu Gothic"/>
                 <a:ea typeface="游ゴシック"/>
               </a:rPr>
-              <a:t>スカウト機能なし</a:t>
+              <a:t>面談リストの購入</a:t>
             </a:r>
           </a:p>
         </p:txBody>
@@ -5224,7 +5224,7 @@
               </a:lnSpc>
             </a:pPr>
             <a:r>
-              <a:rPr sz="900" b="1" i="0">
+              <a:rPr sz="1030" b="1" i="0">
                 <a:solidFill>
                   <a:srgbClr val="D8C08C"/>
                 </a:solidFill>
@@ -5234,14 +5234,14 @@
               <a:t>◎ </a:t>
             </a:r>
             <a:r>
-              <a:rPr sz="880" b="0" i="0">
+              <a:rPr sz="1010" b="0" i="0">
                 <a:solidFill>
                   <a:srgbClr val="FFFFFF"/>
                 </a:solidFill>
                 <a:latin typeface="Yu Gothic"/>
                 <a:ea typeface="游ゴシック"/>
               </a:rPr>
-              <a:t>審査制で送り手を限定</a:t>
+              <a:t>求職者からの「指名」が届く</a:t>
             </a:r>
           </a:p>
         </p:txBody>
@@ -5362,14 +5362,14 @@
               </a:lnSpc>
             </a:pPr>
             <a:r>
-              <a:rPr sz="900" b="1" i="0">
+              <a:rPr sz="1030" b="1" i="0">
                 <a:solidFill>
                   <a:srgbClr val="201C15"/>
                 </a:solidFill>
                 <a:latin typeface="Yu Gothic"/>
                 <a:ea typeface="游ゴシック"/>
               </a:rPr>
-              <a:t>求職者からの指名</a:t>
+              <a:t>担当者を選べるか</a:t>
             </a:r>
           </a:p>
         </p:txBody>
@@ -5402,7 +5402,7 @@
               </a:lnSpc>
             </a:pPr>
             <a:r>
-              <a:rPr sz="900" b="1" i="0">
+              <a:rPr sz="1030" b="1" i="0">
                 <a:solidFill>
                   <a:srgbClr val="A03A2A"/>
                 </a:solidFill>
@@ -5412,14 +5412,14 @@
               <a:t>✕ </a:t>
             </a:r>
             <a:r>
-              <a:rPr sz="880" b="0" i="0">
+              <a:rPr sz="1010" b="0" i="0">
                 <a:solidFill>
                   <a:srgbClr val="201C15"/>
                 </a:solidFill>
                 <a:latin typeface="Yu Gothic"/>
                 <a:ea typeface="游ゴシック"/>
               </a:rPr>
-              <a:t>不可</a:t>
+              <a:t>選べない</a:t>
             </a:r>
           </a:p>
         </p:txBody>
@@ -5452,7 +5452,7 @@
               </a:lnSpc>
             </a:pPr>
             <a:r>
-              <a:rPr sz="900" b="1" i="0">
+              <a:rPr sz="1030" b="1" i="0">
                 <a:solidFill>
                   <a:srgbClr val="A03A2A"/>
                 </a:solidFill>
@@ -5462,14 +5462,14 @@
               <a:t>✕ </a:t>
             </a:r>
             <a:r>
-              <a:rPr sz="880" b="0" i="0">
+              <a:rPr sz="1010" b="0" i="0">
                 <a:solidFill>
                   <a:srgbClr val="201C15"/>
                 </a:solidFill>
                 <a:latin typeface="Yu Gothic"/>
                 <a:ea typeface="游ゴシック"/>
               </a:rPr>
-              <a:t>不可</a:t>
+              <a:t>選べない</a:t>
             </a:r>
           </a:p>
         </p:txBody>
@@ -5502,7 +5502,7 @@
               </a:lnSpc>
             </a:pPr>
             <a:r>
-              <a:rPr sz="900" b="1" i="0">
+              <a:rPr sz="1030" b="1" i="0">
                 <a:solidFill>
                   <a:srgbClr val="D8C08C"/>
                 </a:solidFill>
@@ -5512,14 +5512,14 @@
               <a:t>◎ </a:t>
             </a:r>
             <a:r>
-              <a:rPr sz="880" b="0" i="0">
+              <a:rPr sz="1010" b="0" i="0">
                 <a:solidFill>
                   <a:srgbClr val="FFFFFF"/>
                 </a:solidFill>
                 <a:latin typeface="Yu Gothic"/>
                 <a:ea typeface="游ゴシック"/>
               </a:rPr>
-              <a:t>指名が届く</a:t>
+              <a:t>求職者がCAを選んで指名</a:t>
             </a:r>
           </a:p>
         </p:txBody>
@@ -5640,7 +5640,7 @@
               </a:lnSpc>
             </a:pPr>
             <a:r>
-              <a:rPr sz="900" b="1" i="0">
+              <a:rPr sz="1030" b="1" i="0">
                 <a:solidFill>
                   <a:srgbClr val="201C15"/>
                 </a:solidFill>
@@ -5680,7 +5680,7 @@
               </a:lnSpc>
             </a:pPr>
             <a:r>
-              <a:rPr sz="900" b="1" i="0">
+              <a:rPr sz="1030" b="1" i="0">
                 <a:solidFill>
                   <a:srgbClr val="A03A2A"/>
                 </a:solidFill>
@@ -5690,7 +5690,7 @@
               <a:t>✕ </a:t>
             </a:r>
             <a:r>
-              <a:rPr sz="880" b="0" i="0">
+              <a:rPr sz="1010" b="0" i="0">
                 <a:solidFill>
                   <a:srgbClr val="201C15"/>
                 </a:solidFill>
@@ -5730,7 +5730,7 @@
               </a:lnSpc>
             </a:pPr>
             <a:r>
-              <a:rPr sz="900" b="1" i="0">
+              <a:rPr sz="1030" b="1" i="0">
                 <a:solidFill>
                   <a:srgbClr val="A03A2A"/>
                 </a:solidFill>
@@ -5740,7 +5740,7 @@
               <a:t>✕ </a:t>
             </a:r>
             <a:r>
-              <a:rPr sz="880" b="0" i="0">
+              <a:rPr sz="1010" b="0" i="0">
                 <a:solidFill>
                   <a:srgbClr val="201C15"/>
                 </a:solidFill>
@@ -5780,7 +5780,7 @@
               </a:lnSpc>
             </a:pPr>
             <a:r>
-              <a:rPr sz="900" b="1" i="0">
+              <a:rPr sz="1030" b="1" i="0">
                 <a:solidFill>
                   <a:srgbClr val="D8C08C"/>
                 </a:solidFill>
@@ -5790,7 +5790,7 @@
               <a:t>◎ </a:t>
             </a:r>
             <a:r>
-              <a:rPr sz="880" b="0" i="0">
+              <a:rPr sz="1010" b="0" i="0">
                 <a:solidFill>
                   <a:srgbClr val="FFFFFF"/>
                 </a:solidFill>
@@ -5918,7 +5918,7 @@
               </a:lnSpc>
             </a:pPr>
             <a:r>
-              <a:rPr sz="900" b="1" i="0">
+              <a:rPr sz="1030" b="1" i="0">
                 <a:solidFill>
                   <a:srgbClr val="201C15"/>
                 </a:solidFill>
@@ -5958,7 +5958,7 @@
               </a:lnSpc>
             </a:pPr>
             <a:r>
-              <a:rPr sz="900" b="1" i="0">
+              <a:rPr sz="1030" b="1" i="0">
                 <a:solidFill>
                   <a:srgbClr val="A03A2A"/>
                 </a:solidFill>
@@ -5968,7 +5968,7 @@
               <a:t>✕ </a:t>
             </a:r>
             <a:r>
-              <a:rPr sz="880" b="0" i="0">
+              <a:rPr sz="1010" b="0" i="0">
                 <a:solidFill>
                   <a:srgbClr val="201C15"/>
                 </a:solidFill>
@@ -6008,7 +6008,7 @@
               </a:lnSpc>
             </a:pPr>
             <a:r>
-              <a:rPr sz="900" b="1" i="0">
+              <a:rPr sz="1030" b="1" i="0">
                 <a:solidFill>
                   <a:srgbClr val="8F8A7B"/>
                 </a:solidFill>
@@ -6018,7 +6018,7 @@
               <a:t>△ </a:t>
             </a:r>
             <a:r>
-              <a:rPr sz="880" b="0" i="0">
+              <a:rPr sz="1010" b="0" i="0">
                 <a:solidFill>
                   <a:srgbClr val="201C15"/>
                 </a:solidFill>
@@ -6058,7 +6058,7 @@
               </a:lnSpc>
             </a:pPr>
             <a:r>
-              <a:rPr sz="900" b="1" i="0">
+              <a:rPr sz="1030" b="1" i="0">
                 <a:solidFill>
                   <a:srgbClr val="D8C08C"/>
                 </a:solidFill>
@@ -6068,7 +6068,7 @@
               <a:t>◎ </a:t>
             </a:r>
             <a:r>
-              <a:rPr sz="880" b="0" i="0">
+              <a:rPr sz="1010" b="0" i="0">
                 <a:solidFill>
                   <a:srgbClr val="FFFFFF"/>
                 </a:solidFill>
@@ -6108,7 +6108,7 @@
               </a:lnSpc>
             </a:pPr>
             <a:r>
-              <a:rPr sz="700" b="0" i="0">
+              <a:rPr sz="800" b="0" i="0">
                 <a:solidFill>
                   <a:srgbClr val="8F8A7B"/>
                 </a:solidFill>
@@ -6210,7 +6210,7 @@
               </a:lnSpc>
             </a:pPr>
             <a:r>
-              <a:rPr sz="1050" b="0" i="1" spc="250">
+              <a:rPr sz="1210" b="0" i="1" spc="250">
                 <a:solidFill>
                   <a:srgbClr val="8A6A32"/>
                 </a:solidFill>
@@ -6275,7 +6275,7 @@
         <p:spPr>
           <a:xfrm>
             <a:off x="738000" y="1008000"/>
-            <a:ext cx="10713600" cy="576000"/>
+            <a:ext cx="10713600" cy="666000"/>
           </a:xfrm>
           <a:prstGeom prst="rect">
             <a:avLst/>
@@ -6294,7 +6294,7 @@
               </a:lnSpc>
             </a:pPr>
             <a:r>
-              <a:rPr sz="2900" b="1" i="0" spc="100">
+              <a:rPr sz="3329" b="1" i="0" spc="100">
                 <a:solidFill>
                   <a:srgbClr val="201C15"/>
                 </a:solidFill>
@@ -6304,7 +6304,7 @@
               <a:t>同じ1成約で、</a:t>
             </a:r>
             <a:r>
-              <a:rPr sz="2900" b="1" i="0" spc="100">
+              <a:rPr sz="3329" b="1" i="0" spc="100">
                 <a:solidFill>
                   <a:srgbClr val="B8934E"/>
                 </a:solidFill>
@@ -6314,7 +6314,7 @@
               <a:t>手残り</a:t>
             </a:r>
             <a:r>
-              <a:rPr sz="2900" b="1" i="0" spc="100">
+              <a:rPr sz="3329" b="1" i="0" spc="100">
                 <a:solidFill>
                   <a:srgbClr val="201C15"/>
                 </a:solidFill>
@@ -6334,7 +6334,7 @@
         </p:nvSpPr>
         <p:spPr>
           <a:xfrm>
-            <a:off x="738000" y="1602000"/>
+            <a:off x="738000" y="1692000"/>
             <a:ext cx="10713600" cy="324000"/>
           </a:xfrm>
           <a:prstGeom prst="rect">
@@ -6354,7 +6354,7 @@
               </a:lnSpc>
             </a:pPr>
             <a:r>
-              <a:rPr sz="1050" b="0" i="0" spc="100">
+              <a:rPr sz="1210" b="0" i="0" spc="100">
                 <a:solidFill>
                   <a:srgbClr val="8F8A7B"/>
                 </a:solidFill>
@@ -6397,7 +6397,7 @@
               </a:spcAft>
             </a:pPr>
             <a:r>
-              <a:rPr sz="750" b="0" i="0">
+              <a:rPr sz="860" b="0" i="0">
                 <a:solidFill>
                   <a:srgbClr val="8F8A7B"/>
                 </a:solidFill>
@@ -6414,7 +6414,7 @@
               </a:lnSpc>
             </a:pPr>
             <a:r>
-              <a:rPr sz="3000" b="0" i="0">
+              <a:rPr sz="3450" b="0" i="0">
                 <a:solidFill>
                   <a:srgbClr val="201C15"/>
                 </a:solidFill>
@@ -6424,7 +6424,7 @@
               <a:t>600</a:t>
             </a:r>
             <a:r>
-              <a:rPr sz="1200" b="1" i="0">
+              <a:rPr sz="1380" b="1" i="0">
                 <a:solidFill>
                   <a:srgbClr val="201C15"/>
                 </a:solidFill>
@@ -6464,7 +6464,7 @@
               </a:lnSpc>
             </a:pPr>
             <a:r>
-              <a:rPr sz="1300" b="0" i="0">
+              <a:rPr sz="1490" b="0" i="0">
                 <a:solidFill>
                   <a:srgbClr val="8F8A7B"/>
                 </a:solidFill>
@@ -6507,7 +6507,7 @@
               </a:spcAft>
             </a:pPr>
             <a:r>
-              <a:rPr sz="750" b="0" i="0">
+              <a:rPr sz="860" b="0" i="0">
                 <a:solidFill>
                   <a:srgbClr val="8F8A7B"/>
                 </a:solidFill>
@@ -6524,7 +6524,7 @@
               </a:lnSpc>
             </a:pPr>
             <a:r>
-              <a:rPr sz="3000" b="0" i="0">
+              <a:rPr sz="3450" b="0" i="0">
                 <a:solidFill>
                   <a:srgbClr val="201C15"/>
                 </a:solidFill>
@@ -6534,7 +6534,7 @@
               <a:t>35</a:t>
             </a:r>
             <a:r>
-              <a:rPr sz="1200" b="1" i="0">
+              <a:rPr sz="1380" b="1" i="0">
                 <a:solidFill>
                   <a:srgbClr val="201C15"/>
                 </a:solidFill>
@@ -6574,7 +6574,7 @@
               </a:lnSpc>
             </a:pPr>
             <a:r>
-              <a:rPr sz="1300" b="0" i="0">
+              <a:rPr sz="1490" b="0" i="0">
                 <a:solidFill>
                   <a:srgbClr val="8F8A7B"/>
                 </a:solidFill>
@@ -6661,7 +6661,7 @@
               </a:spcAft>
             </a:pPr>
             <a:r>
-              <a:rPr sz="750" b="0" i="0">
+              <a:rPr sz="860" b="0" i="0">
                 <a:solidFill>
                   <a:srgbClr val="D8C08C"/>
                 </a:solidFill>
@@ -6678,7 +6678,7 @@
               </a:lnSpc>
             </a:pPr>
             <a:r>
-              <a:rPr sz="2700" b="0" i="0">
+              <a:rPr sz="3100" b="0" i="0">
                 <a:solidFill>
                   <a:srgbClr val="FFFFFF"/>
                 </a:solidFill>
@@ -6688,7 +6688,7 @@
               <a:t>210</a:t>
             </a:r>
             <a:r>
-              <a:rPr sz="1200" b="1" i="0">
+              <a:rPr sz="1380" b="1" i="0">
                 <a:solidFill>
                   <a:srgbClr val="FFFFFF"/>
                 </a:solidFill>
@@ -6728,7 +6728,7 @@
               </a:lnSpc>
             </a:pPr>
             <a:r>
-              <a:rPr sz="750" b="0" i="0" spc="100">
+              <a:rPr sz="860" b="0" i="0" spc="100">
                 <a:solidFill>
                   <a:srgbClr val="8F8A7B"/>
                 </a:solidFill>
@@ -6856,7 +6856,7 @@
               </a:lnSpc>
             </a:pPr>
             <a:r>
-              <a:rPr sz="1100" b="1" i="0">
+              <a:rPr sz="1260" b="1" i="0">
                 <a:solidFill>
                   <a:srgbClr val="FFFFFF"/>
                 </a:solidFill>
@@ -6896,7 +6896,7 @@
               </a:lnSpc>
             </a:pPr>
             <a:r>
-              <a:rPr sz="1000" b="1" i="0">
+              <a:rPr sz="1150" b="1" i="0">
                 <a:solidFill>
                   <a:srgbClr val="131009"/>
                 </a:solidFill>
@@ -6936,7 +6936,7 @@
               </a:lnSpc>
             </a:pPr>
             <a:r>
-              <a:rPr sz="730" b="0" i="0">
+              <a:rPr sz="840" b="0" i="0">
                 <a:solidFill>
                   <a:srgbClr val="8F8A7B"/>
                 </a:solidFill>
@@ -6976,7 +6976,7 @@
               </a:lnSpc>
             </a:pPr>
             <a:r>
-              <a:rPr sz="900" b="1" i="0">
+              <a:rPr sz="1030" b="1" i="0">
                 <a:solidFill>
                   <a:srgbClr val="201C15"/>
                 </a:solidFill>
@@ -6986,7 +6986,7 @@
               <a:t>スカウト型DB経由の一例: </a:t>
             </a:r>
             <a:r>
-              <a:rPr sz="900" b="0" i="0">
+              <a:rPr sz="1030" b="0" i="0">
                 <a:solidFill>
                   <a:srgbClr val="201C15"/>
                 </a:solidFill>
@@ -7070,7 +7070,7 @@
               </a:lnSpc>
             </a:pPr>
             <a:r>
-              <a:rPr sz="950" b="1" i="0">
+              <a:rPr sz="1090" b="1" i="0">
                 <a:solidFill>
                   <a:srgbClr val="D8C08C"/>
                 </a:solidFill>
@@ -7080,14 +7080,14 @@
               <a:t>MarkGate: </a:t>
             </a:r>
             <a:r>
-              <a:rPr sz="950" b="1" i="0">
+              <a:rPr sz="1090" b="1" i="0">
                 <a:solidFill>
                   <a:srgbClr val="FFFFFF"/>
                 </a:solidFill>
                 <a:latin typeface="Yu Gothic"/>
                 <a:ea typeface="游ゴシック"/>
               </a:rPr>
-              <a:t>成約まで0円。スカウト工数の削減まで含めて、利益率が変わる。</a:t>
+              <a:t>成約まで0円。“送る工数”がないことまで含めて、利益率が変わる。</a:t>
             </a:r>
           </a:p>
         </p:txBody>
@@ -7120,7 +7120,7 @@
               </a:lnSpc>
             </a:pPr>
             <a:r>
-              <a:rPr sz="700" b="0" i="0">
+              <a:rPr sz="800" b="0" i="0">
                 <a:solidFill>
                   <a:srgbClr val="8F8A7B"/>
                 </a:solidFill>
@@ -7222,7 +7222,7 @@
               </a:lnSpc>
             </a:pPr>
             <a:r>
-              <a:rPr sz="1050" b="0" i="1" spc="250">
+              <a:rPr sz="1210" b="0" i="1" spc="250">
                 <a:solidFill>
                   <a:srgbClr val="8A6A32"/>
                 </a:solidFill>
@@ -7287,7 +7287,7 @@
         <p:spPr>
           <a:xfrm>
             <a:off x="738000" y="1008000"/>
-            <a:ext cx="10713600" cy="576000"/>
+            <a:ext cx="10713600" cy="666000"/>
           </a:xfrm>
           <a:prstGeom prst="rect">
             <a:avLst/>
@@ -7306,7 +7306,7 @@
               </a:lnSpc>
             </a:pPr>
             <a:r>
-              <a:rPr sz="2900" b="1" i="0" spc="100">
+              <a:rPr sz="3329" b="1" i="0" spc="100">
                 <a:solidFill>
                   <a:srgbClr val="201C15"/>
                 </a:solidFill>
@@ -7316,7 +7316,7 @@
               <a:t>「審査制」は、貴社の</a:t>
             </a:r>
             <a:r>
-              <a:rPr sz="2900" b="1" i="0" spc="100">
+              <a:rPr sz="3329" b="1" i="0" spc="100">
                 <a:solidFill>
                   <a:srgbClr val="B8934E"/>
                 </a:solidFill>
@@ -7326,7 +7326,7 @@
               <a:t>ブランド</a:t>
             </a:r>
             <a:r>
-              <a:rPr sz="2900" b="1" i="0" spc="100">
+              <a:rPr sz="3329" b="1" i="0" spc="100">
                 <a:solidFill>
                   <a:srgbClr val="201C15"/>
                 </a:solidFill>
@@ -7410,7 +7410,7 @@
               </a:lnSpc>
             </a:pPr>
             <a:r>
-              <a:rPr sz="1200" b="1" i="0">
+              <a:rPr sz="1380" b="1" i="0">
                 <a:solidFill>
                   <a:srgbClr val="201C15"/>
                 </a:solidFill>
@@ -7450,7 +7450,7 @@
               </a:lnSpc>
             </a:pPr>
             <a:r>
-              <a:rPr sz="880" b="0" i="0">
+              <a:rPr sz="1010" b="0" i="0">
                 <a:solidFill>
                   <a:srgbClr val="201C15"/>
                 </a:solidFill>
@@ -7534,7 +7534,7 @@
               </a:lnSpc>
             </a:pPr>
             <a:r>
-              <a:rPr sz="1200" b="1" i="0">
+              <a:rPr sz="1380" b="1" i="0">
                 <a:solidFill>
                   <a:srgbClr val="201C15"/>
                 </a:solidFill>
@@ -7574,7 +7574,7 @@
               </a:lnSpc>
             </a:pPr>
             <a:r>
-              <a:rPr sz="880" b="0" i="0">
+              <a:rPr sz="1010" b="0" i="0">
                 <a:solidFill>
                   <a:srgbClr val="201C15"/>
                 </a:solidFill>
@@ -7658,7 +7658,7 @@
               </a:lnSpc>
             </a:pPr>
             <a:r>
-              <a:rPr sz="1200" b="1" i="0">
+              <a:rPr sz="1380" b="1" i="0">
                 <a:solidFill>
                   <a:srgbClr val="201C15"/>
                 </a:solidFill>
@@ -7698,7 +7698,7 @@
               </a:lnSpc>
             </a:pPr>
             <a:r>
-              <a:rPr sz="880" b="0" i="0">
+              <a:rPr sz="1010" b="0" i="0">
                 <a:solidFill>
                   <a:srgbClr val="201C15"/>
                 </a:solidFill>
@@ -7785,7 +7785,7 @@
               </a:spcAft>
             </a:pPr>
             <a:r>
-              <a:rPr sz="1500" b="0" i="1">
+              <a:rPr sz="1720" b="0" i="1">
                 <a:solidFill>
                   <a:srgbClr val="D8C08C"/>
                 </a:solidFill>
@@ -7805,7 +7805,7 @@
               </a:spcAft>
             </a:pPr>
             <a:r>
-              <a:rPr sz="1050" b="1" i="0">
+              <a:rPr sz="1210" b="1" i="0">
                 <a:solidFill>
                   <a:srgbClr val="FFFFFF"/>
                 </a:solidFill>
@@ -7825,7 +7825,7 @@
               </a:spcAft>
             </a:pPr>
             <a:r>
-              <a:rPr sz="1500" b="0" i="1">
+              <a:rPr sz="1720" b="0" i="1">
                 <a:solidFill>
                   <a:srgbClr val="D8C08C"/>
                 </a:solidFill>
@@ -7845,7 +7845,7 @@
               </a:spcAft>
             </a:pPr>
             <a:r>
-              <a:rPr sz="930" b="0" i="0">
+              <a:rPr sz="1070" b="0" i="0">
                 <a:solidFill>
                   <a:srgbClr val="ABA595"/>
                 </a:solidFill>
@@ -7862,7 +7862,7 @@
               </a:lnSpc>
             </a:pPr>
             <a:r>
-              <a:rPr sz="680" b="0" i="0">
+              <a:rPr sz="780" b="0" i="0">
                 <a:solidFill>
                   <a:srgbClr val="7E7868"/>
                 </a:solidFill>
@@ -7964,7 +7964,7 @@
               </a:lnSpc>
             </a:pPr>
             <a:r>
-              <a:rPr sz="1050" b="0" i="1" spc="250">
+              <a:rPr sz="1210" b="0" i="1" spc="250">
                 <a:solidFill>
                   <a:srgbClr val="8A6A32"/>
                 </a:solidFill>
@@ -8029,7 +8029,7 @@
         <p:spPr>
           <a:xfrm>
             <a:off x="738000" y="1008000"/>
-            <a:ext cx="10713600" cy="576000"/>
+            <a:ext cx="10713600" cy="666000"/>
           </a:xfrm>
           <a:prstGeom prst="rect">
             <a:avLst/>
@@ -8048,7 +8048,7 @@
               </a:lnSpc>
             </a:pPr>
             <a:r>
-              <a:rPr sz="2900" b="1" i="0" spc="100">
+              <a:rPr sz="3329" b="1" i="0" spc="100">
                 <a:solidFill>
                   <a:srgbClr val="201C15"/>
                 </a:solidFill>
@@ -8058,7 +8058,7 @@
               <a:t>よくいただく、</a:t>
             </a:r>
             <a:r>
-              <a:rPr sz="2900" b="1" i="0" spc="100">
+              <a:rPr sz="3329" b="1" i="0" spc="100">
                 <a:solidFill>
                   <a:srgbClr val="B8934E"/>
                 </a:solidFill>
@@ -8068,7 +8068,7 @@
               <a:t>4つ</a:t>
             </a:r>
             <a:r>
-              <a:rPr sz="2900" b="1" i="0" spc="100">
+              <a:rPr sz="3329" b="1" i="0" spc="100">
                 <a:solidFill>
                   <a:srgbClr val="201C15"/>
                 </a:solidFill>
@@ -8152,7 +8152,7 @@
               </a:lnSpc>
             </a:pPr>
             <a:r>
-              <a:rPr sz="1100" b="1" i="1">
+              <a:rPr sz="1260" b="1" i="1">
                 <a:solidFill>
                   <a:srgbClr val="8A6A32"/>
                 </a:solidFill>
@@ -8162,7 +8162,7 @@
               <a:t>Q. </a:t>
             </a:r>
             <a:r>
-              <a:rPr sz="1150" b="1" i="0">
+              <a:rPr sz="1320" b="1" i="0">
                 <a:solidFill>
                   <a:srgbClr val="201C15"/>
                 </a:solidFill>
@@ -8202,7 +8202,7 @@
               </a:lnSpc>
             </a:pPr>
             <a:r>
-              <a:rPr sz="880" b="0" i="0">
+              <a:rPr sz="1010" b="0" i="0">
                 <a:solidFill>
                   <a:srgbClr val="201C15"/>
                 </a:solidFill>
@@ -8212,7 +8212,7 @@
               <a:t>ローンチ前のため、実績数値はまだありません。だからこそ、料金は</a:t>
             </a:r>
             <a:r>
-              <a:rPr sz="880" b="1" i="0">
+              <a:rPr sz="1010" b="1" i="0">
                 <a:solidFill>
                   <a:srgbClr val="201C15"/>
                 </a:solidFill>
@@ -8222,7 +8222,7 @@
               <a:t>完全成果報酬</a:t>
             </a:r>
             <a:r>
-              <a:rPr sz="880" b="0" i="0">
+              <a:rPr sz="1010" b="0" i="0">
                 <a:solidFill>
                   <a:srgbClr val="201C15"/>
                 </a:solidFill>
@@ -8306,7 +8306,7 @@
               </a:lnSpc>
             </a:pPr>
             <a:r>
-              <a:rPr sz="1100" b="1" i="1">
+              <a:rPr sz="1260" b="1" i="1">
                 <a:solidFill>
                   <a:srgbClr val="8A6A32"/>
                 </a:solidFill>
@@ -8316,7 +8316,7 @@
               <a:t>Q. </a:t>
             </a:r>
             <a:r>
-              <a:rPr sz="1150" b="1" i="0">
+              <a:rPr sz="1320" b="1" i="0">
                 <a:solidFill>
                   <a:srgbClr val="201C15"/>
                 </a:solidFill>
@@ -8356,7 +8356,7 @@
               </a:lnSpc>
             </a:pPr>
             <a:r>
-              <a:rPr sz="880" b="0" i="0">
+              <a:rPr sz="1010" b="0" i="0">
                 <a:solidFill>
                   <a:srgbClr val="201C15"/>
                 </a:solidFill>
@@ -8366,7 +8366,7 @@
               <a:t>スカウト型媒体は成功報酬30%の例に加え、</a:t>
             </a:r>
             <a:r>
-              <a:rPr sz="880" b="1" i="0">
+              <a:rPr sz="1010" b="1" i="0">
                 <a:solidFill>
                   <a:srgbClr val="201C15"/>
                 </a:solidFill>
@@ -8376,7 +8376,7 @@
               <a:t>成約ゼロでも固定費・通数課金が発生</a:t>
             </a:r>
             <a:r>
-              <a:rPr sz="880" b="0" i="0">
+              <a:rPr sz="1010" b="0" i="0">
                 <a:solidFill>
                   <a:srgbClr val="201C15"/>
                 </a:solidFill>
@@ -8460,7 +8460,7 @@
               </a:lnSpc>
             </a:pPr>
             <a:r>
-              <a:rPr sz="1100" b="1" i="1">
+              <a:rPr sz="1260" b="1" i="1">
                 <a:solidFill>
                   <a:srgbClr val="8A6A32"/>
                 </a:solidFill>
@@ -8470,7 +8470,7 @@
               <a:t>Q. </a:t>
             </a:r>
             <a:r>
-              <a:rPr sz="1150" b="1" i="0">
+              <a:rPr sz="1320" b="1" i="0">
                 <a:solidFill>
                   <a:srgbClr val="201C15"/>
                 </a:solidFill>
@@ -8510,7 +8510,7 @@
               </a:lnSpc>
             </a:pPr>
             <a:r>
-              <a:rPr sz="880" b="1" i="0">
+              <a:rPr sz="1010" b="1" i="0">
                 <a:solidFill>
                   <a:srgbClr val="201C15"/>
                 </a:solidFill>
@@ -8520,7 +8520,7 @@
               <a:t>併用が前提の設計です。</a:t>
             </a:r>
             <a:r>
-              <a:rPr sz="880" b="0" i="0">
+              <a:rPr sz="1010" b="0" i="0">
                 <a:solidFill>
                   <a:srgbClr val="201C15"/>
                 </a:solidFill>
@@ -8604,7 +8604,7 @@
               </a:lnSpc>
             </a:pPr>
             <a:r>
-              <a:rPr sz="1100" b="1" i="1">
+              <a:rPr sz="1260" b="1" i="1">
                 <a:solidFill>
                   <a:srgbClr val="8A6A32"/>
                 </a:solidFill>
@@ -8614,7 +8614,7 @@
               <a:t>Q. </a:t>
             </a:r>
             <a:r>
-              <a:rPr sz="1150" b="1" i="0">
+              <a:rPr sz="1320" b="1" i="0">
                 <a:solidFill>
                   <a:srgbClr val="201C15"/>
                 </a:solidFill>
@@ -8654,7 +8654,7 @@
               </a:lnSpc>
             </a:pPr>
             <a:r>
-              <a:rPr sz="880" b="0" i="0">
+              <a:rPr sz="1010" b="0" i="0">
                 <a:solidFill>
                   <a:srgbClr val="201C15"/>
                 </a:solidFill>
@@ -8664,7 +8664,7 @@
               <a:t>エントリーは法人単位の簡単な書類から。</a:t>
             </a:r>
             <a:r>
-              <a:rPr sz="880" b="1" i="0">
+              <a:rPr sz="1010" b="1" i="0">
                 <a:solidFill>
                   <a:srgbClr val="201C15"/>
                 </a:solidFill>
@@ -8674,7 +8674,7 @@
               <a:t>プロフィール制作は当社が伴走</a:t>
             </a:r>
             <a:r>
-              <a:rPr sz="880" b="0" i="0">
+              <a:rPr sz="1010" b="0" i="0">
                 <a:solidFill>
                   <a:srgbClr val="201C15"/>
                 </a:solidFill>
@@ -8758,7 +8758,7 @@
               </a:lnSpc>
             </a:pPr>
             <a:r>
-              <a:rPr sz="1050" b="0" i="0">
+              <a:rPr sz="1210" b="0" i="0">
                 <a:solidFill>
                   <a:srgbClr val="FFFFFF"/>
                 </a:solidFill>
@@ -8768,7 +8768,7 @@
               <a:t>4つに共通する設計 — </a:t>
             </a:r>
             <a:r>
-              <a:rPr sz="1050" b="1" i="0">
+              <a:rPr sz="1210" b="1" i="0">
                 <a:solidFill>
                   <a:srgbClr val="D8C08C"/>
                 </a:solidFill>
@@ -8778,7 +8778,7 @@
               <a:t>貴社がリスクを取らずに、試せること。</a:t>
             </a:r>
             <a:r>
-              <a:rPr sz="1050" b="0" i="0">
+              <a:rPr sz="1210" b="0" i="0">
                 <a:solidFill>
                   <a:srgbClr val="FFFFFF"/>
                 </a:solidFill>
@@ -8880,7 +8880,7 @@
               </a:lnSpc>
             </a:pPr>
             <a:r>
-              <a:rPr sz="1050" b="0" i="1" spc="250">
+              <a:rPr sz="1210" b="0" i="1" spc="250">
                 <a:solidFill>
                   <a:srgbClr val="8A6A32"/>
                 </a:solidFill>
@@ -8945,7 +8945,7 @@
         <p:spPr>
           <a:xfrm>
             <a:off x="738000" y="1008000"/>
-            <a:ext cx="10713600" cy="576000"/>
+            <a:ext cx="10713600" cy="666000"/>
           </a:xfrm>
           <a:prstGeom prst="rect">
             <a:avLst/>
@@ -8964,7 +8964,7 @@
               </a:lnSpc>
             </a:pPr>
             <a:r>
-              <a:rPr sz="2900" b="1" i="0" spc="100">
+              <a:rPr sz="3329" b="1" i="0" spc="100">
                 <a:solidFill>
                   <a:srgbClr val="201C15"/>
                 </a:solidFill>
@@ -8974,7 +8974,7 @@
               <a:t>成約まで、</a:t>
             </a:r>
             <a:r>
-              <a:rPr sz="2900" b="1" i="0" spc="100">
+              <a:rPr sz="3329" b="1" i="0" spc="100">
                 <a:solidFill>
                   <a:srgbClr val="B8934E"/>
                 </a:solidFill>
@@ -8984,7 +8984,7 @@
               <a:t>費用はかかりません</a:t>
             </a:r>
             <a:r>
-              <a:rPr sz="2900" b="1" i="0" spc="100">
+              <a:rPr sz="3329" b="1" i="0" spc="100">
                 <a:solidFill>
                   <a:srgbClr val="201C15"/>
                 </a:solidFill>
@@ -9071,7 +9071,7 @@
               </a:spcAft>
             </a:pPr>
             <a:r>
-              <a:rPr sz="850" b="0" i="0" spc="250">
+              <a:rPr sz="980" b="0" i="0" spc="250">
                 <a:solidFill>
                   <a:srgbClr val="D8C08C"/>
                 </a:solidFill>
@@ -9091,7 +9091,7 @@
               </a:spcAft>
             </a:pPr>
             <a:r>
-              <a:rPr sz="4600" b="0" i="0">
+              <a:rPr sz="5290" b="0" i="0">
                 <a:solidFill>
                   <a:srgbClr val="FFFFFF"/>
                 </a:solidFill>
@@ -9101,7 +9101,7 @@
               <a:t>20</a:t>
             </a:r>
             <a:r>
-              <a:rPr sz="1800" b="1" i="0">
+              <a:rPr sz="2070" b="1" i="0">
                 <a:solidFill>
                   <a:srgbClr val="D8C08C"/>
                 </a:solidFill>
@@ -9121,7 +9121,7 @@
               </a:spcAft>
             </a:pPr>
             <a:r>
-              <a:rPr sz="850" b="0" i="0">
+              <a:rPr sz="980" b="0" i="0">
                 <a:solidFill>
                   <a:srgbClr val="ABA595"/>
                 </a:solidFill>
@@ -9141,7 +9141,7 @@
               </a:spcBef>
             </a:pPr>
             <a:r>
-              <a:rPr sz="1200" b="1" i="0">
+              <a:rPr sz="1380" b="1" i="0">
                 <a:solidFill>
                   <a:srgbClr val="FFFFFF"/>
                 </a:solidFill>
@@ -9151,7 +9151,7 @@
               <a:t>貴社の取り分 </a:t>
             </a:r>
             <a:r>
-              <a:rPr sz="1200" b="1" i="0">
+              <a:rPr sz="1380" b="1" i="0">
                 <a:solidFill>
                   <a:srgbClr val="D8C08C"/>
                 </a:solidFill>
@@ -9326,7 +9326,7 @@
               </a:spcAft>
             </a:pPr>
             <a:r>
-              <a:rPr sz="800" b="0" i="0" spc="250">
+              <a:rPr sz="919" b="0" i="0" spc="250">
                 <a:solidFill>
                   <a:srgbClr val="8F8A7B"/>
                 </a:solidFill>
@@ -9346,7 +9346,7 @@
               </a:spcAft>
             </a:pPr>
             <a:r>
-              <a:rPr sz="2400" b="0" i="0">
+              <a:rPr sz="2760" b="0" i="0">
                 <a:solidFill>
                   <a:srgbClr val="201C15"/>
                 </a:solidFill>
@@ -9356,7 +9356,7 @@
               <a:t>¥0</a:t>
             </a:r>
             <a:r>
-              <a:rPr sz="1050" b="1" i="0">
+              <a:rPr sz="1210" b="1" i="0">
                 <a:solidFill>
                   <a:srgbClr val="201C15"/>
                 </a:solidFill>
@@ -9373,14 +9373,14 @@
               </a:lnSpc>
             </a:pPr>
             <a:r>
-              <a:rPr sz="850" b="0" i="0">
+              <a:rPr sz="980" b="0" i="0">
                 <a:solidFill>
                   <a:srgbClr val="8F8A7B"/>
                 </a:solidFill>
                 <a:latin typeface="Yu Gothic"/>
                 <a:ea typeface="游ゴシック"/>
               </a:rPr>
-              <a:t>登録・掲載・スカウト・指名の受信・面談まで、すべて無料。</a:t>
+              <a:t>登録・掲載・指名の受信・面談まで、すべて無料。</a:t>
             </a:r>
           </a:p>
         </p:txBody>
@@ -9504,7 +9504,7 @@
               </a:spcAft>
             </a:pPr>
             <a:r>
-              <a:rPr sz="800" b="0" i="0" spc="250">
+              <a:rPr sz="919" b="0" i="0" spc="250">
                 <a:solidFill>
                   <a:srgbClr val="8A6A32"/>
                 </a:solidFill>
@@ -9524,7 +9524,7 @@
               </a:spcAft>
             </a:pPr>
             <a:r>
-              <a:rPr sz="2200" b="0" i="0">
+              <a:rPr sz="2530" b="0" i="0">
                 <a:solidFill>
                   <a:srgbClr val="201C15"/>
                 </a:solidFill>
@@ -9534,7 +9534,7 @@
               <a:t>¥50,000</a:t>
             </a:r>
             <a:r>
-              <a:rPr sz="1050" b="1" i="0">
+              <a:rPr sz="1210" b="1" i="0">
                 <a:solidFill>
                   <a:srgbClr val="201C15"/>
                 </a:solidFill>
@@ -9551,7 +9551,7 @@
               </a:lnSpc>
             </a:pPr>
             <a:r>
-              <a:rPr sz="850" b="0" i="0">
+              <a:rPr sz="980" b="0" i="0">
                 <a:solidFill>
                   <a:srgbClr val="8F8A7B"/>
                 </a:solidFill>
@@ -9591,14 +9591,14 @@
               </a:lnSpc>
             </a:pPr>
             <a:r>
-              <a:rPr sz="700" b="0" i="0">
+              <a:rPr sz="800" b="0" i="0">
                 <a:solidFill>
                   <a:srgbClr val="8F8A7B"/>
                 </a:solidFill>
                 <a:latin typeface="Yu Gothic"/>
                 <a:ea typeface="游ゴシック"/>
               </a:rPr>
-              <a:t>スカウト通数課金・広告費・送客費・掲載料は一切なし。　※平均決定単価の出典: 厚生労働省「令和6年度職業紹介事業報告書の集計結果」</a:t>
+              <a:t>通数課金・広告費・送客費・掲載料は一切なし。　※平均決定単価の出典: 厚生労働省「令和6年度職業紹介事業報告書の集計結果」</a:t>
             </a:r>
           </a:p>
         </p:txBody>
@@ -9693,7 +9693,7 @@
               </a:lnSpc>
             </a:pPr>
             <a:r>
-              <a:rPr sz="1050" b="0" i="1" spc="250">
+              <a:rPr sz="1210" b="0" i="1" spc="250">
                 <a:solidFill>
                   <a:srgbClr val="8A6A32"/>
                 </a:solidFill>
@@ -9758,7 +9758,7 @@
         <p:spPr>
           <a:xfrm>
             <a:off x="738000" y="1008000"/>
-            <a:ext cx="10713600" cy="576000"/>
+            <a:ext cx="10713600" cy="666000"/>
           </a:xfrm>
           <a:prstGeom prst="rect">
             <a:avLst/>
@@ -9777,7 +9777,7 @@
               </a:lnSpc>
             </a:pPr>
             <a:r>
-              <a:rPr sz="2900" b="1" i="0" spc="100">
+              <a:rPr sz="3329" b="1" i="0" spc="100">
                 <a:solidFill>
                   <a:srgbClr val="201C15"/>
                 </a:solidFill>
@@ -9787,7 +9787,7 @@
               <a:t>ローンチパートナーを、</a:t>
             </a:r>
             <a:r>
-              <a:rPr sz="2900" b="1" i="0" spc="100">
+              <a:rPr sz="3329" b="1" i="0" spc="100">
                 <a:solidFill>
                   <a:srgbClr val="B8934E"/>
                 </a:solidFill>
@@ -9797,7 +9797,7 @@
               <a:t>募集します</a:t>
             </a:r>
             <a:r>
-              <a:rPr sz="2900" b="1" i="0" spc="100">
+              <a:rPr sz="3329" b="1" i="0" spc="100">
                 <a:solidFill>
                   <a:srgbClr val="201C15"/>
                 </a:solidFill>
@@ -9925,7 +9925,7 @@
               </a:lnSpc>
             </a:pPr>
             <a:r>
-              <a:rPr sz="1250" b="1" i="0">
+              <a:rPr sz="1440" b="1" i="0">
                 <a:solidFill>
                   <a:srgbClr val="201C15"/>
                 </a:solidFill>
@@ -9965,7 +9965,7 @@
               </a:lnSpc>
             </a:pPr>
             <a:r>
-              <a:rPr sz="880" b="0" i="0">
+              <a:rPr sz="1010" b="0" i="0">
                 <a:solidFill>
                   <a:srgbClr val="8F8A7B"/>
                 </a:solidFill>
@@ -10093,7 +10093,7 @@
               </a:lnSpc>
             </a:pPr>
             <a:r>
-              <a:rPr sz="1250" b="1" i="0">
+              <a:rPr sz="1440" b="1" i="0">
                 <a:solidFill>
                   <a:srgbClr val="201C15"/>
                 </a:solidFill>
@@ -10133,7 +10133,7 @@
               </a:lnSpc>
             </a:pPr>
             <a:r>
-              <a:rPr sz="880" b="0" i="0">
+              <a:rPr sz="1010" b="0" i="0">
                 <a:solidFill>
                   <a:srgbClr val="8F8A7B"/>
                 </a:solidFill>
@@ -10217,7 +10217,7 @@
               </a:lnSpc>
             </a:pPr>
             <a:r>
-              <a:rPr sz="1250" b="1" i="0">
+              <a:rPr sz="1440" b="1" i="0">
                 <a:solidFill>
                   <a:srgbClr val="201C15"/>
                 </a:solidFill>
@@ -10257,7 +10257,7 @@
               </a:lnSpc>
             </a:pPr>
             <a:r>
-              <a:rPr sz="880" b="0" i="0">
+              <a:rPr sz="1010" b="0" i="0">
                 <a:solidFill>
                   <a:srgbClr val="8F8A7B"/>
                 </a:solidFill>
@@ -10344,7 +10344,7 @@
               </a:spcAft>
             </a:pPr>
             <a:r>
-              <a:rPr sz="1150" b="1" i="0">
+              <a:rPr sz="1320" b="1" i="0">
                 <a:solidFill>
                   <a:srgbClr val="FFFFFF"/>
                 </a:solidFill>
@@ -10364,7 +10364,7 @@
               </a:spcAft>
             </a:pPr>
             <a:r>
-              <a:rPr sz="1050" b="0" i="1">
+              <a:rPr sz="1210" b="0" i="1">
                 <a:solidFill>
                   <a:srgbClr val="D8C08C"/>
                 </a:solidFill>
@@ -10374,14 +10374,14 @@
               <a:t>01　</a:t>
             </a:r>
             <a:r>
-              <a:rPr sz="1050" b="1" i="0">
+              <a:rPr sz="1210" b="1" i="0">
                 <a:solidFill>
                   <a:srgbClr val="FFFFFF"/>
                 </a:solidFill>
                 <a:latin typeface="Yu Gothic"/>
                 <a:ea typeface="游ゴシック"/>
               </a:rPr>
-              <a:t>初期ほど、スカウトが効く</a:t>
+              <a:t>初期ほど、指名が集中する</a:t>
             </a:r>
           </a:p>
           <a:p>
@@ -10394,14 +10394,14 @@
               </a:spcAft>
             </a:pPr>
             <a:r>
-              <a:rPr sz="830" b="0" i="0">
+              <a:rPr sz="950" b="0" i="0">
                 <a:solidFill>
                   <a:srgbClr val="ABA595"/>
                 </a:solidFill>
                 <a:latin typeface="Yu Gothic"/>
                 <a:ea typeface="游ゴシック"/>
               </a:rPr>
-              <a:t>参加CAを限定してローンチ。送信競争が最も少ない時期に始められる。</a:t>
+              <a:t>参加CAを限定してローンチ。掲載が少ない時期ほど、1人あたりの露出が大きい。</a:t>
             </a:r>
           </a:p>
           <a:p>
@@ -10414,7 +10414,7 @@
               </a:spcAft>
             </a:pPr>
             <a:r>
-              <a:rPr sz="1050" b="0" i="1">
+              <a:rPr sz="1210" b="0" i="1">
                 <a:solidFill>
                   <a:srgbClr val="D8C08C"/>
                 </a:solidFill>
@@ -10424,7 +10424,7 @@
               <a:t>02　</a:t>
             </a:r>
             <a:r>
-              <a:rPr sz="1050" b="1" i="0">
+              <a:rPr sz="1210" b="1" i="0">
                 <a:solidFill>
                   <a:srgbClr val="FFFFFF"/>
                 </a:solidFill>
@@ -10444,7 +10444,7 @@
               </a:spcAft>
             </a:pPr>
             <a:r>
-              <a:rPr sz="830" b="0" i="0">
+              <a:rPr sz="950" b="0" i="0">
                 <a:solidFill>
                   <a:srgbClr val="ABA595"/>
                 </a:solidFill>
@@ -10464,7 +10464,7 @@
               </a:spcAft>
             </a:pPr>
             <a:r>
-              <a:rPr sz="1050" b="0" i="1">
+              <a:rPr sz="1210" b="0" i="1">
                 <a:solidFill>
                   <a:srgbClr val="D8C08C"/>
                 </a:solidFill>
@@ -10474,7 +10474,7 @@
               <a:t>03　</a:t>
             </a:r>
             <a:r>
-              <a:rPr sz="1050" b="1" i="0">
+              <a:rPr sz="1210" b="1" i="0">
                 <a:solidFill>
                   <a:srgbClr val="FFFFFF"/>
                 </a:solidFill>
@@ -10494,7 +10494,7 @@
               </a:spcAft>
             </a:pPr>
             <a:r>
-              <a:rPr sz="830" b="0" i="0">
+              <a:rPr sz="950" b="0" i="0">
                 <a:solidFill>
                   <a:srgbClr val="ABA595"/>
                 </a:solidFill>
@@ -10534,7 +10534,7 @@
               </a:lnSpc>
             </a:pPr>
             <a:r>
-              <a:rPr sz="700" b="0" i="0">
+              <a:rPr sz="800" b="0" i="0">
                 <a:solidFill>
                   <a:srgbClr val="8F8A7B"/>
                 </a:solidFill>
@@ -10680,7 +10680,7 @@
               </a:lnSpc>
             </a:pPr>
             <a:r>
-              <a:rPr sz="1050" b="0" i="1" spc="250">
+              <a:rPr sz="1210" b="0" i="1" spc="250">
                 <a:solidFill>
                   <a:srgbClr val="D8C08C"/>
                 </a:solidFill>
@@ -10764,7 +10764,7 @@
               </a:lnSpc>
             </a:pPr>
             <a:r>
-              <a:rPr sz="2700" b="1" i="0" spc="100">
+              <a:rPr sz="3100" b="1" i="0" spc="100">
                 <a:solidFill>
                   <a:srgbClr val="FFFFFF"/>
                 </a:solidFill>
@@ -10781,24 +10781,24 @@
               </a:lnSpc>
             </a:pPr>
             <a:r>
-              <a:rPr sz="2700" b="1" i="0" spc="100">
+              <a:rPr sz="3100" b="1" i="0" spc="100">
                 <a:solidFill>
                   <a:srgbClr val="D8C08C"/>
                 </a:solidFill>
                 <a:latin typeface="Garamond"/>
                 <a:ea typeface="游明朝"/>
               </a:rPr>
-              <a:t>スカウトも指名も</a:t>
-            </a:r>
-            <a:r>
-              <a:rPr sz="2700" b="1" i="0" spc="100">
+              <a:t>“指名”</a:t>
+            </a:r>
+            <a:r>
+              <a:rPr sz="3100" b="1" i="0" spc="100">
                 <a:solidFill>
                   <a:srgbClr val="FFFFFF"/>
                 </a:solidFill>
                 <a:latin typeface="Garamond"/>
                 <a:ea typeface="游明朝"/>
               </a:rPr>
-              <a:t>、届く。</a:t>
+              <a:t>は届く。</a:t>
             </a:r>
           </a:p>
         </p:txBody>
@@ -10831,7 +10831,7 @@
               </a:lnSpc>
             </a:pPr>
             <a:r>
-              <a:rPr sz="1050" b="0" i="0" spc="100">
+              <a:rPr sz="1210" b="0" i="0" spc="100">
                 <a:solidFill>
                   <a:srgbClr val="ABA595"/>
                 </a:solidFill>
@@ -10915,7 +10915,7 @@
               </a:lnSpc>
             </a:pPr>
             <a:r>
-              <a:rPr sz="930" b="0" i="0">
+              <a:rPr sz="1070" b="0" i="0">
                 <a:solidFill>
                   <a:srgbClr val="D8C08C"/>
                 </a:solidFill>
@@ -11002,7 +11002,7 @@
               </a:spcAft>
             </a:pPr>
             <a:r>
-              <a:rPr sz="2200" b="0" i="0">
+              <a:rPr sz="2530" b="0" i="0">
                 <a:solidFill>
                   <a:srgbClr val="FFFFFF"/>
                 </a:solidFill>
@@ -11012,7 +11012,7 @@
               <a:t>MarkGate</a:t>
             </a:r>
             <a:r>
-              <a:rPr sz="2200" b="0" i="0">
+              <a:rPr sz="2530" b="0" i="0">
                 <a:solidFill>
                   <a:srgbClr val="B8934E"/>
                 </a:solidFill>
@@ -11029,7 +11029,7 @@
               </a:lnSpc>
             </a:pPr>
             <a:r>
-              <a:rPr sz="700" b="0" i="0" spc="300">
+              <a:rPr sz="800" b="0" i="0" spc="300">
                 <a:solidFill>
                   <a:srgbClr val="7E7868"/>
                 </a:solidFill>
@@ -11069,7 +11069,7 @@
               </a:lnSpc>
             </a:pPr>
             <a:r>
-              <a:rPr sz="880" b="0" i="0">
+              <a:rPr sz="1010" b="0" i="0">
                 <a:solidFill>
                   <a:srgbClr val="ABA595"/>
                 </a:solidFill>
@@ -11086,7 +11086,7 @@
               </a:lnSpc>
             </a:pPr>
             <a:r>
-              <a:rPr sz="880" b="0" i="0">
+              <a:rPr sz="1010" b="0" i="0">
                 <a:solidFill>
                   <a:srgbClr val="ABA595"/>
                 </a:solidFill>
@@ -11103,7 +11103,7 @@
               </a:lnSpc>
             </a:pPr>
             <a:r>
-              <a:rPr sz="880" b="0" i="0">
+              <a:rPr sz="1010" b="0" i="0">
                 <a:solidFill>
                   <a:srgbClr val="ABA595"/>
                 </a:solidFill>
@@ -11143,7 +11143,7 @@
               </a:lnSpc>
             </a:pPr>
             <a:r>
-              <a:rPr sz="680" b="0" i="0">
+              <a:rPr sz="780" b="0" i="0">
                 <a:solidFill>
                   <a:srgbClr val="7E7868"/>
                 </a:solidFill>
@@ -11183,7 +11183,7 @@
               </a:lnSpc>
             </a:pPr>
             <a:r>
-              <a:rPr sz="950" b="0" i="1">
+              <a:rPr sz="1090" b="0" i="1">
                 <a:solidFill>
                   <a:srgbClr val="D8C08C"/>
                 </a:solidFill>
@@ -11285,7 +11285,7 @@
               </a:lnSpc>
             </a:pPr>
             <a:r>
-              <a:rPr sz="1050" b="0" i="1" spc="250">
+              <a:rPr sz="1210" b="0" i="1" spc="250">
                 <a:solidFill>
                   <a:srgbClr val="8A6A32"/>
                 </a:solidFill>
@@ -11350,7 +11350,7 @@
         <p:spPr>
           <a:xfrm>
             <a:off x="738000" y="1008000"/>
-            <a:ext cx="10713600" cy="576000"/>
+            <a:ext cx="10713600" cy="666000"/>
           </a:xfrm>
           <a:prstGeom prst="rect">
             <a:avLst/>
@@ -11369,17 +11369,17 @@
               </a:lnSpc>
             </a:pPr>
             <a:r>
-              <a:rPr sz="2900" b="1" i="0" spc="100">
+              <a:rPr sz="3329" b="1" i="0" spc="100">
                 <a:solidFill>
                   <a:srgbClr val="201C15"/>
                 </a:solidFill>
                 <a:latin typeface="Garamond"/>
                 <a:ea typeface="游明朝"/>
               </a:rPr>
-              <a:t>絞るから、</a:t>
-            </a:r>
-            <a:r>
-              <a:rPr sz="2900" b="1" i="0" spc="100">
+              <a:t>選ばれるから、</a:t>
+            </a:r>
+            <a:r>
+              <a:rPr sz="3329" b="1" i="0" spc="100">
                 <a:solidFill>
                   <a:srgbClr val="B8934E"/>
                 </a:solidFill>
@@ -11389,7 +11389,7 @@
               <a:t>届く</a:t>
             </a:r>
             <a:r>
-              <a:rPr sz="2900" b="1" i="0" spc="100">
+              <a:rPr sz="3329" b="1" i="0" spc="100">
                 <a:solidFill>
                   <a:srgbClr val="201C15"/>
                 </a:solidFill>
@@ -11409,7 +11409,7 @@
         </p:nvSpPr>
         <p:spPr>
           <a:xfrm>
-            <a:off x="738000" y="1602000"/>
+            <a:off x="738000" y="1692000"/>
             <a:ext cx="10713600" cy="324000"/>
           </a:xfrm>
           <a:prstGeom prst="rect">
@@ -11429,14 +11429,14 @@
               </a:lnSpc>
             </a:pPr>
             <a:r>
-              <a:rPr sz="1050" b="0" i="0" spc="100">
+              <a:rPr sz="1210" b="0" i="0" spc="100">
                 <a:solidFill>
                   <a:srgbClr val="8F8A7B"/>
                 </a:solidFill>
                 <a:latin typeface="Yu Gothic"/>
                 <a:ea typeface="游ゴシック"/>
               </a:rPr>
-              <a:t>トップクラスのCAだけが参加できる、スカウトと指名の双方向マッチングです。</a:t>
+              <a:t>トップクラスのCAだけが参加できる、“指名”型のマッチングです。</a:t>
             </a:r>
           </a:p>
         </p:txBody>
@@ -11560,7 +11560,7 @@
               </a:spcAft>
             </a:pPr>
             <a:r>
-              <a:rPr sz="1600" b="0" i="1">
+              <a:rPr sz="1839" b="0" i="1">
                 <a:solidFill>
                   <a:srgbClr val="8A6A32"/>
                 </a:solidFill>
@@ -11580,14 +11580,14 @@
               </a:spcAft>
             </a:pPr>
             <a:r>
-              <a:rPr sz="1350" b="1" i="0">
+              <a:rPr sz="1550" b="1" i="0">
                 <a:solidFill>
                   <a:srgbClr val="201C15"/>
                 </a:solidFill>
                 <a:latin typeface="Yu Gothic"/>
                 <a:ea typeface="游ゴシック"/>
               </a:rPr>
-              <a:t>届くスカウト</a:t>
+              <a:t>トップCA限定</a:t>
             </a:r>
           </a:p>
           <a:p>
@@ -11600,14 +11600,14 @@
               </a:spcAft>
             </a:pPr>
             <a:r>
-              <a:rPr sz="680" b="0" i="0" spc="200">
+              <a:rPr sz="780" b="0" i="0" spc="200">
                 <a:solidFill>
                   <a:srgbClr val="8F8A7B"/>
                 </a:solidFill>
                 <a:latin typeface="Yu Gothic"/>
                 <a:ea typeface="游ゴシック"/>
               </a:rPr>
-              <a:t>SCOUTS THAT LAND</a:t>
+              <a:t>VETTED ADVISORS</a:t>
             </a:r>
           </a:p>
           <a:p>
@@ -11617,14 +11617,14 @@
               </a:lnSpc>
             </a:pPr>
             <a:r>
-              <a:rPr sz="950" b="0" i="0">
+              <a:rPr sz="1090" b="0" i="0">
                 <a:solidFill>
                   <a:srgbClr val="201C15"/>
                 </a:solidFill>
                 <a:latin typeface="Yu Gothic"/>
                 <a:ea typeface="游ゴシック"/>
               </a:rPr>
-              <a:t>送り手をトップクラスのCAに限定。総量が絞られ、1通が読まれる。</a:t>
+              <a:t>実績・専門性・支援品質の審査制。掲載されていること自体が証明になる。</a:t>
             </a:r>
           </a:p>
         </p:txBody>
@@ -11704,7 +11704,7 @@
               </a:spcAft>
             </a:pPr>
             <a:r>
-              <a:rPr sz="1600" b="0" i="1">
+              <a:rPr sz="1839" b="0" i="1">
                 <a:solidFill>
                   <a:srgbClr val="D8C08C"/>
                 </a:solidFill>
@@ -11724,14 +11724,14 @@
               </a:spcAft>
             </a:pPr>
             <a:r>
-              <a:rPr sz="1350" b="1" i="0">
+              <a:rPr sz="1550" b="1" i="0">
                 <a:solidFill>
                   <a:srgbClr val="FFFFFF"/>
                 </a:solidFill>
                 <a:latin typeface="Yu Gothic"/>
                 <a:ea typeface="游ゴシック"/>
               </a:rPr>
-              <a:t>指名も届く</a:t>
+              <a:t>指名が届く</a:t>
             </a:r>
           </a:p>
           <a:p>
@@ -11744,7 +11744,7 @@
               </a:spcAft>
             </a:pPr>
             <a:r>
-              <a:rPr sz="680" b="0" i="0" spc="200">
+              <a:rPr sz="780" b="0" i="0" spc="200">
                 <a:solidFill>
                   <a:srgbClr val="7E7868"/>
                 </a:solidFill>
@@ -11761,14 +11761,14 @@
               </a:lnSpc>
             </a:pPr>
             <a:r>
-              <a:rPr sz="950" b="0" i="0">
+              <a:rPr sz="1090" b="0" i="0">
                 <a:solidFill>
                   <a:srgbClr val="ABA595"/>
                 </a:solidFill>
                 <a:latin typeface="Yu Gothic"/>
                 <a:ea typeface="游ゴシック"/>
               </a:rPr>
-              <a:t>求職者がプロフィールを見て指名。受け身でも温度の高い面談が届く。</a:t>
+              <a:t>求職者がプロフィールを見て指名。温度の高い面談が、送信ゼロで届く。</a:t>
             </a:r>
           </a:p>
         </p:txBody>
@@ -11892,7 +11892,7 @@
               </a:spcAft>
             </a:pPr>
             <a:r>
-              <a:rPr sz="1600" b="0" i="1">
+              <a:rPr sz="1839" b="0" i="1">
                 <a:solidFill>
                   <a:srgbClr val="8A6A32"/>
                 </a:solidFill>
@@ -11912,7 +11912,7 @@
               </a:spcAft>
             </a:pPr>
             <a:r>
-              <a:rPr sz="1350" b="1" i="0">
+              <a:rPr sz="1550" b="1" i="0">
                 <a:solidFill>
                   <a:srgbClr val="201C15"/>
                 </a:solidFill>
@@ -11932,7 +11932,7 @@
               </a:spcAft>
             </a:pPr>
             <a:r>
-              <a:rPr sz="680" b="0" i="0" spc="200">
+              <a:rPr sz="780" b="0" i="0" spc="200">
                 <a:solidFill>
                   <a:srgbClr val="8F8A7B"/>
                 </a:solidFill>
@@ -11949,7 +11949,7 @@
               </a:lnSpc>
             </a:pPr>
             <a:r>
-              <a:rPr sz="950" b="0" i="0">
+              <a:rPr sz="1090" b="0" i="0">
                 <a:solidFill>
                   <a:srgbClr val="201C15"/>
                 </a:solidFill>
@@ -12051,7 +12051,7 @@
               </a:lnSpc>
             </a:pPr>
             <a:r>
-              <a:rPr sz="1050" b="0" i="1" spc="250">
+              <a:rPr sz="1210" b="0" i="1" spc="250">
                 <a:solidFill>
                   <a:srgbClr val="8A6A32"/>
                 </a:solidFill>
@@ -12116,7 +12116,7 @@
         <p:spPr>
           <a:xfrm>
             <a:off x="738000" y="1008000"/>
-            <a:ext cx="10713600" cy="576000"/>
+            <a:ext cx="10713600" cy="666000"/>
           </a:xfrm>
           <a:prstGeom prst="rect">
             <a:avLst/>
@@ -12135,7 +12135,7 @@
               </a:lnSpc>
             </a:pPr>
             <a:r>
-              <a:rPr sz="2900" b="1" i="0" spc="100">
+              <a:rPr sz="3329" b="1" i="0" spc="100">
                 <a:solidFill>
                   <a:srgbClr val="201C15"/>
                 </a:solidFill>
@@ -12145,7 +12145,7 @@
               <a:t>スカウトは、もう</a:t>
             </a:r>
             <a:r>
-              <a:rPr sz="2900" b="1" i="0" spc="100">
+              <a:rPr sz="3329" b="1" i="0" spc="100">
                 <a:solidFill>
                   <a:srgbClr val="A03A2A"/>
                 </a:solidFill>
@@ -12155,7 +12155,7 @@
               <a:t>読まれていない</a:t>
             </a:r>
             <a:r>
-              <a:rPr sz="2900" b="1" i="0" spc="100">
+              <a:rPr sz="3329" b="1" i="0" spc="100">
                 <a:solidFill>
                   <a:srgbClr val="201C15"/>
                 </a:solidFill>
@@ -12175,7 +12175,7 @@
         </p:nvSpPr>
         <p:spPr>
           <a:xfrm>
-            <a:off x="738000" y="1602000"/>
+            <a:off x="738000" y="1692000"/>
             <a:ext cx="10713600" cy="324000"/>
           </a:xfrm>
           <a:prstGeom prst="rect">
@@ -12195,7 +12195,7 @@
               </a:lnSpc>
             </a:pPr>
             <a:r>
-              <a:rPr sz="1050" b="0" i="0" spc="100">
+              <a:rPr sz="1210" b="0" i="0" spc="100">
                 <a:solidFill>
                   <a:srgbClr val="8F8A7B"/>
                 </a:solidFill>
@@ -12326,7 +12326,7 @@
               </a:spcAft>
             </a:pPr>
             <a:r>
-              <a:rPr sz="850" b="0" i="1" spc="200">
+              <a:rPr sz="980" b="0" i="1" spc="200">
                 <a:solidFill>
                   <a:srgbClr val="8A6A32"/>
                 </a:solidFill>
@@ -12346,7 +12346,7 @@
               </a:spcAft>
             </a:pPr>
             <a:r>
-              <a:rPr sz="3800" b="0" i="0">
+              <a:rPr sz="4370" b="0" i="0">
                 <a:solidFill>
                   <a:srgbClr val="201C15"/>
                 </a:solidFill>
@@ -12356,7 +12356,7 @@
               <a:t>41,800</a:t>
             </a:r>
             <a:r>
-              <a:rPr sz="1300" b="1" i="0">
+              <a:rPr sz="1490" b="1" i="0">
                 <a:solidFill>
                   <a:srgbClr val="201C15"/>
                 </a:solidFill>
@@ -12376,7 +12376,7 @@
               </a:spcAft>
             </a:pPr>
             <a:r>
-              <a:rPr sz="730" b="0" i="0">
+              <a:rPr sz="840" b="0" i="0">
                 <a:solidFill>
                   <a:srgbClr val="8F8A7B"/>
                 </a:solidFill>
@@ -12399,7 +12399,7 @@
               </a:spcAft>
             </a:pPr>
             <a:r>
-              <a:rPr sz="2300" b="0" i="0">
+              <a:rPr sz="2640" b="0" i="0">
                 <a:solidFill>
                   <a:srgbClr val="201C15"/>
                 </a:solidFill>
@@ -12409,7 +12409,7 @@
               <a:t>9,700</a:t>
             </a:r>
             <a:r>
-              <a:rPr sz="1100" b="1" i="0">
+              <a:rPr sz="1260" b="1" i="0">
                 <a:solidFill>
                   <a:srgbClr val="201C15"/>
                 </a:solidFill>
@@ -12426,7 +12426,7 @@
               </a:lnSpc>
             </a:pPr>
             <a:r>
-              <a:rPr sz="730" b="0" i="0">
+              <a:rPr sz="840" b="0" i="0">
                 <a:solidFill>
                   <a:srgbClr val="8F8A7B"/>
                 </a:solidFill>
@@ -12510,7 +12510,7 @@
               </a:lnSpc>
             </a:pPr>
             <a:r>
-              <a:rPr sz="1500" b="0" i="0">
+              <a:rPr sz="1720" b="0" i="0">
                 <a:solidFill>
                   <a:srgbClr val="8F8A7B"/>
                 </a:solidFill>
@@ -12597,7 +12597,7 @@
               </a:spcAft>
             </a:pPr>
             <a:r>
-              <a:rPr sz="850" b="0" i="1" spc="200">
+              <a:rPr sz="980" b="0" i="1" spc="200">
                 <a:solidFill>
                   <a:srgbClr val="D8C08C"/>
                 </a:solidFill>
@@ -12617,7 +12617,7 @@
               </a:spcAft>
             </a:pPr>
             <a:r>
-              <a:rPr sz="3800" b="0" i="0">
+              <a:rPr sz="4370" b="0" i="0">
                 <a:solidFill>
                   <a:srgbClr val="FFFFFF"/>
                 </a:solidFill>
@@ -12627,7 +12627,7 @@
               <a:t>2−10</a:t>
             </a:r>
             <a:r>
-              <a:rPr sz="1400" b="1" i="0">
+              <a:rPr sz="1610" b="1" i="0">
                 <a:solidFill>
                   <a:srgbClr val="FFFFFF"/>
                 </a:solidFill>
@@ -12647,7 +12647,7 @@
               </a:spcAft>
             </a:pPr>
             <a:r>
-              <a:rPr sz="730" b="0" i="0">
+              <a:rPr sz="840" b="0" i="0">
                 <a:solidFill>
                   <a:srgbClr val="7E7868"/>
                 </a:solidFill>
@@ -12664,7 +12664,7 @@
               </a:lnSpc>
             </a:pPr>
             <a:r>
-              <a:rPr sz="1100" b="1" i="0">
+              <a:rPr sz="1260" b="1" i="0">
                 <a:solidFill>
                   <a:srgbClr val="FFFFFF"/>
                 </a:solidFill>
@@ -12681,7 +12681,7 @@
               </a:lnSpc>
             </a:pPr>
             <a:r>
-              <a:rPr sz="1100" b="1" i="0">
+              <a:rPr sz="1260" b="1" i="0">
                 <a:solidFill>
                   <a:srgbClr val="FFFFFF"/>
                 </a:solidFill>
@@ -12701,7 +12701,7 @@
         </p:nvSpPr>
         <p:spPr>
           <a:xfrm>
-            <a:off x="6894000" y="4356000"/>
+            <a:off x="6894000" y="4464000"/>
             <a:ext cx="4197600" cy="14400"/>
           </a:xfrm>
           <a:prstGeom prst="rect">
@@ -12765,7 +12765,7 @@
               </a:lnSpc>
             </a:pPr>
             <a:r>
-              <a:rPr sz="700" b="0" i="0">
+              <a:rPr sz="800" b="0" i="0">
                 <a:solidFill>
                   <a:srgbClr val="8F8A7B"/>
                 </a:solidFill>
@@ -12867,7 +12867,7 @@
               </a:lnSpc>
             </a:pPr>
             <a:r>
-              <a:rPr sz="1050" b="0" i="1" spc="250">
+              <a:rPr sz="1210" b="0" i="1" spc="250">
                 <a:solidFill>
                   <a:srgbClr val="8A6A32"/>
                 </a:solidFill>
@@ -12932,7 +12932,7 @@
         <p:spPr>
           <a:xfrm>
             <a:off x="738000" y="1008000"/>
-            <a:ext cx="10713600" cy="576000"/>
+            <a:ext cx="10713600" cy="666000"/>
           </a:xfrm>
           <a:prstGeom prst="rect">
             <a:avLst/>
@@ -12951,7 +12951,7 @@
               </a:lnSpc>
             </a:pPr>
             <a:r>
-              <a:rPr sz="2900" b="1" i="0" spc="100">
+              <a:rPr sz="3329" b="1" i="0" spc="100">
                 <a:solidFill>
                   <a:srgbClr val="201C15"/>
                 </a:solidFill>
@@ -12961,7 +12961,7 @@
               <a:t>求職者は、</a:t>
             </a:r>
             <a:r>
-              <a:rPr sz="2900" b="1" i="0" spc="100">
+              <a:rPr sz="3329" b="1" i="0" spc="100">
                 <a:solidFill>
                   <a:srgbClr val="B8934E"/>
                 </a:solidFill>
@@ -12971,7 +12971,7 @@
               <a:t>“担当者”</a:t>
             </a:r>
             <a:r>
-              <a:rPr sz="2900" b="1" i="0" spc="100">
+              <a:rPr sz="3329" b="1" i="0" spc="100">
                 <a:solidFill>
                   <a:srgbClr val="201C15"/>
                 </a:solidFill>
@@ -13011,7 +13011,7 @@
               </a:lnSpc>
             </a:pPr>
             <a:r>
-              <a:rPr sz="4400" b="0" i="0">
+              <a:rPr sz="5060" b="0" i="0">
                 <a:solidFill>
                   <a:srgbClr val="201C15"/>
                 </a:solidFill>
@@ -13021,7 +13021,7 @@
               <a:t>36</a:t>
             </a:r>
             <a:r>
-              <a:rPr sz="1600" b="1" i="0">
+              <a:rPr sz="1839" b="1" i="0">
                 <a:solidFill>
                   <a:srgbClr val="201C15"/>
                 </a:solidFill>
@@ -13105,7 +13105,7 @@
               </a:lnSpc>
             </a:pPr>
             <a:r>
-              <a:rPr sz="750" b="0" i="0">
+              <a:rPr sz="860" b="0" i="0">
                 <a:solidFill>
                   <a:srgbClr val="8F8A7B"/>
                 </a:solidFill>
@@ -13145,7 +13145,7 @@
               </a:lnSpc>
             </a:pPr>
             <a:r>
-              <a:rPr sz="4400" b="0" i="0">
+              <a:rPr sz="5060" b="0" i="0">
                 <a:solidFill>
                   <a:srgbClr val="201C15"/>
                 </a:solidFill>
@@ -13155,7 +13155,7 @@
               <a:t>4.2</a:t>
             </a:r>
             <a:r>
-              <a:rPr sz="1600" b="1" i="0">
+              <a:rPr sz="1839" b="1" i="0">
                 <a:solidFill>
                   <a:srgbClr val="201C15"/>
                 </a:solidFill>
@@ -13239,7 +13239,7 @@
               </a:lnSpc>
             </a:pPr>
             <a:r>
-              <a:rPr sz="750" b="0" i="0">
+              <a:rPr sz="860" b="0" i="0">
                 <a:solidFill>
                   <a:srgbClr val="8F8A7B"/>
                 </a:solidFill>
@@ -13326,7 +13326,7 @@
               </a:spcAft>
             </a:pPr>
             <a:r>
-              <a:rPr sz="1150" b="1" i="0">
+              <a:rPr sz="1320" b="1" i="0">
                 <a:solidFill>
                   <a:srgbClr val="201C15"/>
                 </a:solidFill>
@@ -13343,7 +13343,7 @@
               </a:lnSpc>
             </a:pPr>
             <a:r>
-              <a:rPr sz="880" b="0" i="0">
+              <a:rPr sz="1010" b="0" i="0">
                 <a:solidFill>
                   <a:srgbClr val="201C15"/>
                 </a:solidFill>
@@ -13360,7 +13360,7 @@
               </a:lnSpc>
             </a:pPr>
             <a:r>
-              <a:rPr sz="880" b="0" i="0">
+              <a:rPr sz="1010" b="0" i="0">
                 <a:solidFill>
                   <a:srgbClr val="201C15"/>
                 </a:solidFill>
@@ -13377,7 +13377,7 @@
               </a:lnSpc>
             </a:pPr>
             <a:r>
-              <a:rPr sz="880" b="0" i="0">
+              <a:rPr sz="1010" b="0" i="0">
                 <a:solidFill>
                   <a:srgbClr val="201C15"/>
                 </a:solidFill>
@@ -13464,7 +13464,7 @@
               </a:spcAft>
             </a:pPr>
             <a:r>
-              <a:rPr sz="750" b="0" i="0" spc="200">
+              <a:rPr sz="860" b="0" i="0" spc="200">
                 <a:solidFill>
                   <a:srgbClr val="D8C08C"/>
                 </a:solidFill>
@@ -13481,7 +13481,7 @@
               </a:lnSpc>
             </a:pPr>
             <a:r>
-              <a:rPr sz="1000" b="1" i="0">
+              <a:rPr sz="1150" b="1" i="0">
                 <a:solidFill>
                   <a:srgbClr val="FFFFFF"/>
                 </a:solidFill>
@@ -13521,7 +13521,7 @@
               </a:lnSpc>
             </a:pPr>
             <a:r>
-              <a:rPr sz="700" b="0" i="0">
+              <a:rPr sz="800" b="0" i="0">
                 <a:solidFill>
                   <a:srgbClr val="8F8A7B"/>
                 </a:solidFill>
@@ -13667,7 +13667,7 @@
               </a:lnSpc>
             </a:pPr>
             <a:r>
-              <a:rPr sz="1050" b="0" i="1" spc="250">
+              <a:rPr sz="1210" b="0" i="1" spc="250">
                 <a:solidFill>
                   <a:srgbClr val="D8C08C"/>
                 </a:solidFill>
@@ -13751,14 +13751,14 @@
               </a:lnSpc>
             </a:pPr>
             <a:r>
-              <a:rPr sz="2700" b="1" i="0" spc="100">
+              <a:rPr sz="3100" b="1" i="0" spc="100">
                 <a:solidFill>
                   <a:srgbClr val="FFFFFF"/>
                 </a:solidFill>
                 <a:latin typeface="Garamond"/>
                 <a:ea typeface="游明朝"/>
               </a:rPr>
-              <a:t>送り手を絞ることで、</a:t>
+              <a:t>“送る”のをやめて、</a:t>
             </a:r>
           </a:p>
           <a:p>
@@ -13768,7 +13768,7 @@
               </a:lnSpc>
             </a:pPr>
             <a:r>
-              <a:rPr sz="2700" b="1" i="0">
+              <a:rPr sz="3100" b="1" i="0">
                 <a:solidFill>
                   <a:srgbClr val="FFFFFF"/>
                 </a:solidFill>
@@ -13778,24 +13778,24 @@
               <a:t>“</a:t>
             </a:r>
             <a:r>
-              <a:rPr sz="2700" b="1" i="0">
+              <a:rPr sz="3100" b="1" i="0">
                 <a:solidFill>
                   <a:srgbClr val="D8C08C"/>
                 </a:solidFill>
                 <a:latin typeface="Garamond"/>
                 <a:ea typeface="游明朝"/>
               </a:rPr>
-              <a:t>届く</a:t>
-            </a:r>
-            <a:r>
-              <a:rPr sz="2700" b="1" i="0">
+              <a:t>選ばれる</a:t>
+            </a:r>
+            <a:r>
+              <a:rPr sz="3100" b="1" i="0">
                 <a:solidFill>
                   <a:srgbClr val="FFFFFF"/>
                 </a:solidFill>
                 <a:latin typeface="Garamond"/>
                 <a:ea typeface="游明朝"/>
               </a:rPr>
-              <a:t>”を取り戻す。</a:t>
+              <a:t>”へ。</a:t>
             </a:r>
           </a:p>
         </p:txBody>
@@ -13828,7 +13828,7 @@
               </a:lnSpc>
             </a:pPr>
             <a:r>
-              <a:rPr sz="1400" b="0" i="0">
+              <a:rPr sz="1610" b="0" i="0">
                 <a:solidFill>
                   <a:srgbClr val="FFFFFF"/>
                 </a:solidFill>
@@ -13838,7 +13838,7 @@
               <a:t>MarkGate</a:t>
             </a:r>
             <a:r>
-              <a:rPr sz="1400" b="0" i="0">
+              <a:rPr sz="1610" b="0" i="0">
                 <a:solidFill>
                   <a:srgbClr val="B8934E"/>
                 </a:solidFill>
@@ -13848,14 +13848,14 @@
               <a:t>.</a:t>
             </a:r>
             <a:r>
-              <a:rPr sz="1000" b="0" i="0" spc="200">
+              <a:rPr sz="1150" b="0" i="0" spc="200">
                 <a:solidFill>
                   <a:srgbClr val="ABA595"/>
                 </a:solidFill>
                 <a:latin typeface="Yu Gothic"/>
                 <a:ea typeface="游ゴシック"/>
               </a:rPr>
-              <a:t>　— 審査制 × 届くスカウト × 指名</a:t>
+              <a:t>　— 審査制 × 指名</a:t>
             </a:r>
           </a:p>
         </p:txBody>
@@ -13932,7 +13932,7 @@
               </a:lnSpc>
             </a:pPr>
             <a:r>
-              <a:rPr sz="1900" b="0" i="1">
+              <a:rPr sz="2180" b="0" i="1">
                 <a:solidFill>
                   <a:srgbClr val="D8C08C"/>
                 </a:solidFill>
@@ -13972,7 +13972,7 @@
               </a:lnSpc>
             </a:pPr>
             <a:r>
-              <a:rPr sz="930" b="0" i="0">
+              <a:rPr sz="1070" b="0" i="0">
                 <a:solidFill>
                   <a:srgbClr val="ABA595"/>
                 </a:solidFill>
@@ -14056,14 +14056,14 @@
               </a:lnSpc>
             </a:pPr>
             <a:r>
-              <a:rPr sz="1900" b="0" i="1">
+              <a:rPr sz="2180" b="0" i="1">
                 <a:solidFill>
                   <a:srgbClr val="D8C08C"/>
                 </a:solidFill>
                 <a:latin typeface="Garamond"/>
                 <a:ea typeface="游明朝"/>
               </a:rPr>
-              <a:t>Reach</a:t>
+              <a:t>Choice</a:t>
             </a:r>
           </a:p>
         </p:txBody>
@@ -14096,14 +14096,14 @@
               </a:lnSpc>
             </a:pPr>
             <a:r>
-              <a:rPr sz="930" b="0" i="0">
+              <a:rPr sz="1070" b="0" i="0">
                 <a:solidFill>
                   <a:srgbClr val="ABA595"/>
                 </a:solidFill>
                 <a:latin typeface="Yu Gothic"/>
                 <a:ea typeface="游ゴシック"/>
               </a:rPr>
-              <a:t>送信総量が絞られるから、1通が埋もれない。返信率を構造で高める設計。</a:t>
+              <a:t>求職者が実績・専門領域を見て、相談相手を自分で選び、指名する。</a:t>
             </a:r>
           </a:p>
         </p:txBody>
@@ -14180,14 +14180,14 @@
               </a:lnSpc>
             </a:pPr>
             <a:r>
-              <a:rPr sz="1900" b="0" i="1">
+              <a:rPr sz="2180" b="0" i="1">
                 <a:solidFill>
                   <a:srgbClr val="D8C08C"/>
                 </a:solidFill>
                 <a:latin typeface="Garamond"/>
                 <a:ea typeface="游明朝"/>
               </a:rPr>
-              <a:t>Choice</a:t>
+              <a:t>Trust</a:t>
             </a:r>
           </a:p>
         </p:txBody>
@@ -14220,14 +14220,14 @@
               </a:lnSpc>
             </a:pPr>
             <a:r>
-              <a:rPr sz="930" b="0" i="0">
+              <a:rPr sz="1070" b="0" i="0">
                 <a:solidFill>
                   <a:srgbClr val="ABA595"/>
                 </a:solidFill>
                 <a:latin typeface="Yu Gothic"/>
                 <a:ea typeface="游ゴシック"/>
               </a:rPr>
-              <a:t>求職者からの指名も届く。攻めと受け、双方向のマッチング。</a:t>
+              <a:t>選ばれて始まる面談だから、温度が高い。辞退や音信不通が起きにくい。</a:t>
             </a:r>
           </a:p>
         </p:txBody>
@@ -14366,7 +14366,7 @@
               </a:lnSpc>
             </a:pPr>
             <a:r>
-              <a:rPr sz="1050" b="0" i="1" spc="250">
+              <a:rPr sz="1210" b="0" i="1" spc="250">
                 <a:solidFill>
                   <a:srgbClr val="8A6A32"/>
                 </a:solidFill>
@@ -14431,7 +14431,7 @@
         <p:spPr>
           <a:xfrm>
             <a:off x="738000" y="1008000"/>
-            <a:ext cx="10713600" cy="576000"/>
+            <a:ext cx="10713600" cy="666000"/>
           </a:xfrm>
           <a:prstGeom prst="rect">
             <a:avLst/>
@@ -14450,7 +14450,7 @@
               </a:lnSpc>
             </a:pPr>
             <a:r>
-              <a:rPr sz="2900" b="1" i="0" spc="100">
+              <a:rPr sz="3329" b="1" i="0" spc="100">
                 <a:solidFill>
                   <a:srgbClr val="201C15"/>
                 </a:solidFill>
@@ -14460,7 +14460,7 @@
               <a:t>求職者が、CAを</a:t>
             </a:r>
             <a:r>
-              <a:rPr sz="2900" b="1" i="0" spc="100">
+              <a:rPr sz="3329" b="1" i="0" spc="100">
                 <a:solidFill>
                   <a:srgbClr val="B8934E"/>
                 </a:solidFill>
@@ -14470,7 +14470,7 @@
               <a:t>“指名”</a:t>
             </a:r>
             <a:r>
-              <a:rPr sz="2900" b="1" i="0" spc="100">
+              <a:rPr sz="3329" b="1" i="0" spc="100">
                 <a:solidFill>
                   <a:srgbClr val="201C15"/>
                 </a:solidFill>
@@ -14490,7 +14490,7 @@
         </p:nvSpPr>
         <p:spPr>
           <a:xfrm>
-            <a:off x="738000" y="1602000"/>
+            <a:off x="738000" y="1692000"/>
             <a:ext cx="10713600" cy="324000"/>
           </a:xfrm>
           <a:prstGeom prst="rect">
@@ -14510,7 +14510,7 @@
               </a:lnSpc>
             </a:pPr>
             <a:r>
-              <a:rPr sz="1050" b="0" i="0" spc="100">
+              <a:rPr sz="1210" b="0" i="0" spc="100">
                 <a:solidFill>
                   <a:srgbClr val="8F8A7B"/>
                 </a:solidFill>
@@ -14641,7 +14641,7 @@
               </a:spcAft>
             </a:pPr>
             <a:r>
-              <a:rPr sz="850" b="0" i="1" spc="200">
+              <a:rPr sz="980" b="0" i="1" spc="200">
                 <a:solidFill>
                   <a:srgbClr val="8A6A32"/>
                 </a:solidFill>
@@ -14661,7 +14661,7 @@
               </a:spcAft>
             </a:pPr>
             <a:r>
-              <a:rPr sz="1100" b="0" i="1">
+              <a:rPr sz="1260" b="0" i="1">
                 <a:solidFill>
                   <a:srgbClr val="8A6A32"/>
                 </a:solidFill>
@@ -14671,7 +14671,7 @@
               <a:t>01　</a:t>
             </a:r>
             <a:r>
-              <a:rPr sz="1000" b="0" i="0">
+              <a:rPr sz="1150" b="0" i="0">
                 <a:solidFill>
                   <a:srgbClr val="201C15"/>
                 </a:solidFill>
@@ -14691,7 +14691,7 @@
               </a:spcAft>
             </a:pPr>
             <a:r>
-              <a:rPr sz="1100" b="0" i="1">
+              <a:rPr sz="1260" b="0" i="1">
                 <a:solidFill>
                   <a:srgbClr val="8A6A32"/>
                 </a:solidFill>
@@ -14701,7 +14701,7 @@
               <a:t>02　</a:t>
             </a:r>
             <a:r>
-              <a:rPr sz="1000" b="0" i="0">
+              <a:rPr sz="1150" b="0" i="0">
                 <a:solidFill>
                   <a:srgbClr val="201C15"/>
                 </a:solidFill>
@@ -14721,7 +14721,7 @@
               </a:spcAft>
             </a:pPr>
             <a:r>
-              <a:rPr sz="1100" b="0" i="1">
+              <a:rPr sz="1260" b="0" i="1">
                 <a:solidFill>
                   <a:srgbClr val="8A6A32"/>
                 </a:solidFill>
@@ -14731,7 +14731,7 @@
               <a:t>03　</a:t>
             </a:r>
             <a:r>
-              <a:rPr sz="1000" b="0" i="0">
+              <a:rPr sz="1150" b="0" i="0">
                 <a:solidFill>
                   <a:srgbClr val="201C15"/>
                 </a:solidFill>
@@ -14771,7 +14771,7 @@
               </a:lnSpc>
             </a:pPr>
             <a:r>
-              <a:rPr sz="1500" b="0" i="0">
+              <a:rPr sz="1720" b="0" i="0">
                 <a:solidFill>
                   <a:srgbClr val="8F8A7B"/>
                 </a:solidFill>
@@ -14858,7 +14858,7 @@
               </a:spcAft>
             </a:pPr>
             <a:r>
-              <a:rPr sz="850" b="0" i="1" spc="200">
+              <a:rPr sz="980" b="0" i="1" spc="200">
                 <a:solidFill>
                   <a:srgbClr val="D8C08C"/>
                 </a:solidFill>
@@ -14875,7 +14875,7 @@
               </a:lnSpc>
             </a:pPr>
             <a:r>
-              <a:rPr sz="1250" b="1" i="0">
+              <a:rPr sz="1440" b="1" i="0">
                 <a:solidFill>
                   <a:srgbClr val="FFFFFF"/>
                 </a:solidFill>
@@ -14895,7 +14895,7 @@
               </a:spcAft>
             </a:pPr>
             <a:r>
-              <a:rPr sz="1250" b="1" i="0">
+              <a:rPr sz="1440" b="1" i="0">
                 <a:solidFill>
                   <a:srgbClr val="FFFFFF"/>
                 </a:solidFill>
@@ -14915,7 +14915,7 @@
               </a:spcBef>
             </a:pPr>
             <a:r>
-              <a:rPr sz="880" b="0" i="0">
+              <a:rPr sz="1010" b="0" i="0">
                 <a:solidFill>
                   <a:srgbClr val="ABA595"/>
                 </a:solidFill>
@@ -15043,7 +15043,7 @@
               </a:lnSpc>
             </a:pPr>
             <a:r>
-              <a:rPr sz="1050" b="0" i="0">
+              <a:rPr sz="1210" b="0" i="0">
                 <a:solidFill>
                   <a:srgbClr val="FFFFFF"/>
                 </a:solidFill>
@@ -15053,7 +15053,7 @@
               <a:t>プロフィールは貴社の資産 — </a:t>
             </a:r>
             <a:r>
-              <a:rPr sz="1050" b="1" i="0">
+              <a:rPr sz="1210" b="1" i="0">
                 <a:solidFill>
                   <a:srgbClr val="D8C08C"/>
                 </a:solidFill>
@@ -15155,7 +15155,7 @@
               </a:lnSpc>
             </a:pPr>
             <a:r>
-              <a:rPr sz="1050" b="0" i="1" spc="250">
+              <a:rPr sz="1210" b="0" i="1" spc="250">
                 <a:solidFill>
                   <a:srgbClr val="8A6A32"/>
                 </a:solidFill>
@@ -15220,7 +15220,7 @@
         <p:spPr>
           <a:xfrm>
             <a:off x="738000" y="1008000"/>
-            <a:ext cx="10713600" cy="576000"/>
+            <a:ext cx="10713600" cy="666000"/>
           </a:xfrm>
           <a:prstGeom prst="rect">
             <a:avLst/>
@@ -15239,7 +15239,7 @@
               </a:lnSpc>
             </a:pPr>
             <a:r>
-              <a:rPr sz="2900" b="1" i="0" spc="100">
+              <a:rPr sz="3329" b="1" i="0" spc="100">
                 <a:solidFill>
                   <a:srgbClr val="201C15"/>
                 </a:solidFill>
@@ -15249,7 +15249,7 @@
               <a:t>仕組み — 貴社の業務は、</a:t>
             </a:r>
             <a:r>
-              <a:rPr sz="2900" b="1" i="0" spc="100">
+              <a:rPr sz="3329" b="1" i="0" spc="100">
                 <a:solidFill>
                   <a:srgbClr val="B8934E"/>
                 </a:solidFill>
@@ -15259,7 +15259,7 @@
               <a:t>これまで通り</a:t>
             </a:r>
             <a:r>
-              <a:rPr sz="2900" b="1" i="0" spc="100">
+              <a:rPr sz="3329" b="1" i="0" spc="100">
                 <a:solidFill>
                   <a:srgbClr val="201C15"/>
                 </a:solidFill>
@@ -15343,7 +15343,7 @@
               </a:lnSpc>
             </a:pPr>
             <a:r>
-              <a:rPr sz="1500" b="0" i="1">
+              <a:rPr sz="1720" b="0" i="1">
                 <a:solidFill>
                   <a:srgbClr val="8A6A32"/>
                 </a:solidFill>
@@ -15383,7 +15383,7 @@
               </a:lnSpc>
             </a:pPr>
             <a:r>
-              <a:rPr sz="1250" b="1" i="0">
+              <a:rPr sz="1440" b="1" i="0">
                 <a:solidFill>
                   <a:srgbClr val="201C15"/>
                 </a:solidFill>
@@ -15423,7 +15423,7 @@
               </a:lnSpc>
             </a:pPr>
             <a:r>
-              <a:rPr sz="930" b="0" i="0">
+              <a:rPr sz="1070" b="0" i="0">
                 <a:solidFill>
                   <a:srgbClr val="201C15"/>
                 </a:solidFill>
@@ -15507,7 +15507,7 @@
               </a:lnSpc>
             </a:pPr>
             <a:r>
-              <a:rPr sz="1500" b="0" i="1">
+              <a:rPr sz="1720" b="0" i="1">
                 <a:solidFill>
                   <a:srgbClr val="8A6A32"/>
                 </a:solidFill>
@@ -15547,7 +15547,7 @@
               </a:lnSpc>
             </a:pPr>
             <a:r>
-              <a:rPr sz="1250" b="1" i="0">
+              <a:rPr sz="1440" b="1" i="0">
                 <a:solidFill>
                   <a:srgbClr val="201C15"/>
                 </a:solidFill>
@@ -15587,7 +15587,7 @@
               </a:lnSpc>
             </a:pPr>
             <a:r>
-              <a:rPr sz="930" b="0" i="0">
+              <a:rPr sz="1070" b="0" i="0">
                 <a:solidFill>
                   <a:srgbClr val="201C15"/>
                 </a:solidFill>
@@ -15671,7 +15671,7 @@
               </a:lnSpc>
             </a:pPr>
             <a:r>
-              <a:rPr sz="1500" b="0" i="1">
+              <a:rPr sz="1720" b="0" i="1">
                 <a:solidFill>
                   <a:srgbClr val="8A6A32"/>
                 </a:solidFill>
@@ -15711,14 +15711,14 @@
               </a:lnSpc>
             </a:pPr>
             <a:r>
-              <a:rPr sz="1250" b="1" i="0">
+              <a:rPr sz="1440" b="1" i="0">
                 <a:solidFill>
                   <a:srgbClr val="201C15"/>
                 </a:solidFill>
                 <a:latin typeface="Yu Gothic"/>
                 <a:ea typeface="游ゴシック"/>
               </a:rPr>
-              <a:t>スカウト &amp; 指名</a:t>
+              <a:t>指名の受信</a:t>
             </a:r>
           </a:p>
         </p:txBody>
@@ -15751,14 +15751,14 @@
               </a:lnSpc>
             </a:pPr>
             <a:r>
-              <a:rPr sz="930" b="0" i="0">
+              <a:rPr sz="1070" b="0" i="0">
                 <a:solidFill>
                   <a:srgbClr val="201C15"/>
                 </a:solidFill>
                 <a:latin typeface="Yu Gothic"/>
                 <a:ea typeface="游ゴシック"/>
               </a:rPr>
-              <a:t>CAからのスカウトも、求職者からの指名も。双方向でつながる。</a:t>
+              <a:t>プロフィールを見た求職者から、指名が届く。</a:t>
             </a:r>
           </a:p>
         </p:txBody>
@@ -15835,7 +15835,7 @@
               </a:lnSpc>
             </a:pPr>
             <a:r>
-              <a:rPr sz="1500" b="0" i="1">
+              <a:rPr sz="1720" b="0" i="1">
                 <a:solidFill>
                   <a:srgbClr val="8A6A32"/>
                 </a:solidFill>
@@ -15875,7 +15875,7 @@
               </a:lnSpc>
             </a:pPr>
             <a:r>
-              <a:rPr sz="1250" b="1" i="0">
+              <a:rPr sz="1440" b="1" i="0">
                 <a:solidFill>
                   <a:srgbClr val="201C15"/>
                 </a:solidFill>
@@ -15915,7 +15915,7 @@
               </a:lnSpc>
             </a:pPr>
             <a:r>
-              <a:rPr sz="930" b="0" i="0">
+              <a:rPr sz="1070" b="0" i="0">
                 <a:solidFill>
                   <a:srgbClr val="201C15"/>
                 </a:solidFill>
@@ -15999,24 +15999,24 @@
               </a:lnSpc>
             </a:pPr>
             <a:r>
-              <a:rPr sz="1050" b="0" i="0">
+              <a:rPr sz="1210" b="0" i="0">
                 <a:solidFill>
                   <a:srgbClr val="FFFFFF"/>
                 </a:solidFill>
                 <a:latin typeface="Yu Gothic"/>
                 <a:ea typeface="游ゴシック"/>
               </a:rPr>
-              <a:t>送り手が絞られているから、1通のスカウトが競争に埋もれない。</a:t>
-            </a:r>
-            <a:r>
-              <a:rPr sz="1050" b="1" i="0">
+              <a:t>掲載して、待つだけ。</a:t>
+            </a:r>
+            <a:r>
+              <a:rPr sz="1210" b="1" i="0">
                 <a:solidFill>
                   <a:srgbClr val="D8C08C"/>
                 </a:solidFill>
                 <a:latin typeface="Yu Gothic"/>
                 <a:ea typeface="游ゴシック"/>
               </a:rPr>
-              <a:t>母集団形成はプラットフォームの仕事です。</a:t>
+              <a:t>母集団形成と指名の創出は、プラットフォームの仕事です。</a:t>
             </a:r>
           </a:p>
         </p:txBody>
@@ -16111,7 +16111,7 @@
               </a:lnSpc>
             </a:pPr>
             <a:r>
-              <a:rPr sz="1050" b="0" i="1" spc="250">
+              <a:rPr sz="1210" b="0" i="1" spc="250">
                 <a:solidFill>
                   <a:srgbClr val="8A6A32"/>
                 </a:solidFill>
@@ -16176,7 +16176,7 @@
         <p:spPr>
           <a:xfrm>
             <a:off x="738000" y="1008000"/>
-            <a:ext cx="10713600" cy="576000"/>
+            <a:ext cx="10713600" cy="666000"/>
           </a:xfrm>
           <a:prstGeom prst="rect">
             <a:avLst/>
@@ -16195,7 +16195,7 @@
               </a:lnSpc>
             </a:pPr>
             <a:r>
-              <a:rPr sz="2900" b="1" i="0" spc="100">
+              <a:rPr sz="3329" b="1" i="0" spc="100">
                 <a:solidFill>
                   <a:srgbClr val="201C15"/>
                 </a:solidFill>
@@ -16205,7 +16205,7 @@
               <a:t>審査は、狭き門ほど、</a:t>
             </a:r>
             <a:r>
-              <a:rPr sz="2900" b="1" i="0" spc="100">
+              <a:rPr sz="3329" b="1" i="0" spc="100">
                 <a:solidFill>
                   <a:srgbClr val="B8934E"/>
                 </a:solidFill>
@@ -16215,7 +16215,7 @@
               <a:t>価値</a:t>
             </a:r>
             <a:r>
-              <a:rPr sz="2900" b="1" i="0" spc="100">
+              <a:rPr sz="3329" b="1" i="0" spc="100">
                 <a:solidFill>
                   <a:srgbClr val="201C15"/>
                 </a:solidFill>
@@ -16235,7 +16235,7 @@
         </p:nvSpPr>
         <p:spPr>
           <a:xfrm>
-            <a:off x="738000" y="1602000"/>
+            <a:off x="738000" y="1692000"/>
             <a:ext cx="10713600" cy="324000"/>
           </a:xfrm>
           <a:prstGeom prst="rect">
@@ -16255,14 +16255,14 @@
               </a:lnSpc>
             </a:pPr>
             <a:r>
-              <a:rPr sz="1050" b="0" i="0" spc="100">
+              <a:rPr sz="1210" b="0" i="0" spc="100">
                 <a:solidFill>
                   <a:srgbClr val="8F8A7B"/>
                 </a:solidFill>
                 <a:latin typeface="Yu Gothic"/>
                 <a:ea typeface="游ゴシック"/>
               </a:rPr>
-              <a:t>「誰でも登録できる場」にしないこと自体が、貴社のスカウトが届く理由です。</a:t>
+              <a:t>「誰でも登録できる場」にしないこと自体が、求職者が安心して“指名”できる理由です。</a:t>
             </a:r>
           </a:p>
         </p:txBody>
@@ -16339,7 +16339,7 @@
               </a:lnSpc>
             </a:pPr>
             <a:r>
-              <a:rPr sz="1200" b="1" i="0">
+              <a:rPr sz="1380" b="1" i="0">
                 <a:solidFill>
                   <a:srgbClr val="201C15"/>
                 </a:solidFill>
@@ -16349,7 +16349,7 @@
               <a:t>実績</a:t>
             </a:r>
             <a:r>
-              <a:rPr sz="700" b="0" i="0" spc="200">
+              <a:rPr sz="800" b="0" i="0" spc="200">
                 <a:solidFill>
                   <a:srgbClr val="8F8A7B"/>
                 </a:solidFill>
@@ -16389,7 +16389,7 @@
               </a:lnSpc>
             </a:pPr>
             <a:r>
-              <a:rPr sz="880" b="0" i="0">
+              <a:rPr sz="1010" b="0" i="0">
                 <a:solidFill>
                   <a:srgbClr val="201C15"/>
                 </a:solidFill>
@@ -16473,7 +16473,7 @@
               </a:lnSpc>
             </a:pPr>
             <a:r>
-              <a:rPr sz="1200" b="1" i="0">
+              <a:rPr sz="1380" b="1" i="0">
                 <a:solidFill>
                   <a:srgbClr val="201C15"/>
                 </a:solidFill>
@@ -16483,7 +16483,7 @@
               <a:t>専門性</a:t>
             </a:r>
             <a:r>
-              <a:rPr sz="700" b="0" i="0" spc="200">
+              <a:rPr sz="800" b="0" i="0" spc="200">
                 <a:solidFill>
                   <a:srgbClr val="8F8A7B"/>
                 </a:solidFill>
@@ -16523,7 +16523,7 @@
               </a:lnSpc>
             </a:pPr>
             <a:r>
-              <a:rPr sz="880" b="0" i="0">
+              <a:rPr sz="1010" b="0" i="0">
                 <a:solidFill>
                   <a:srgbClr val="201C15"/>
                 </a:solidFill>
@@ -16607,7 +16607,7 @@
               </a:lnSpc>
             </a:pPr>
             <a:r>
-              <a:rPr sz="1200" b="1" i="0">
+              <a:rPr sz="1380" b="1" i="0">
                 <a:solidFill>
                   <a:srgbClr val="201C15"/>
                 </a:solidFill>
@@ -16617,7 +16617,7 @@
               <a:t>支援品質</a:t>
             </a:r>
             <a:r>
-              <a:rPr sz="700" b="0" i="0" spc="200">
+              <a:rPr sz="800" b="0" i="0" spc="200">
                 <a:solidFill>
                   <a:srgbClr val="8F8A7B"/>
                 </a:solidFill>
@@ -16657,7 +16657,7 @@
               </a:lnSpc>
             </a:pPr>
             <a:r>
-              <a:rPr sz="880" b="0" i="0">
+              <a:rPr sz="1010" b="0" i="0">
                 <a:solidFill>
                   <a:srgbClr val="201C15"/>
                 </a:solidFill>
@@ -16744,7 +16744,7 @@
               </a:spcAft>
             </a:pPr>
             <a:r>
-              <a:rPr sz="1500" b="0" i="1">
+              <a:rPr sz="1720" b="0" i="1">
                 <a:solidFill>
                   <a:srgbClr val="D8C08C"/>
                 </a:solidFill>
@@ -16764,7 +16764,7 @@
               </a:spcAft>
             </a:pPr>
             <a:r>
-              <a:rPr sz="1050" b="1" i="0">
+              <a:rPr sz="1210" b="1" i="0">
                 <a:solidFill>
                   <a:srgbClr val="FFFFFF"/>
                 </a:solidFill>
@@ -16784,7 +16784,7 @@
               </a:spcAft>
             </a:pPr>
             <a:r>
-              <a:rPr sz="900" b="0" i="0">
+              <a:rPr sz="1030" b="0" i="0">
                 <a:solidFill>
                   <a:srgbClr val="D8C08C"/>
                 </a:solidFill>
@@ -16794,7 +16794,7 @@
               <a:t>◎　</a:t>
             </a:r>
             <a:r>
-              <a:rPr sz="900" b="0" i="0">
+              <a:rPr sz="1030" b="0" i="0">
                 <a:solidFill>
                   <a:srgbClr val="FFFFFF"/>
                 </a:solidFill>
@@ -16814,7 +16814,7 @@
               </a:spcAft>
             </a:pPr>
             <a:r>
-              <a:rPr sz="900" b="0" i="0">
+              <a:rPr sz="1030" b="0" i="0">
                 <a:solidFill>
                   <a:srgbClr val="D8C08C"/>
                 </a:solidFill>
@@ -16824,7 +16824,7 @@
               <a:t>◎　</a:t>
             </a:r>
             <a:r>
-              <a:rPr sz="900" b="0" i="0">
+              <a:rPr sz="1030" b="0" i="0">
                 <a:solidFill>
                   <a:srgbClr val="FFFFFF"/>
                 </a:solidFill>
@@ -16844,7 +16844,7 @@
               </a:spcAft>
             </a:pPr>
             <a:r>
-              <a:rPr sz="900" b="0" i="0">
+              <a:rPr sz="1030" b="0" i="0">
                 <a:solidFill>
                   <a:srgbClr val="D8C08C"/>
                 </a:solidFill>
@@ -16854,7 +16854,7 @@
               <a:t>◎　</a:t>
             </a:r>
             <a:r>
-              <a:rPr sz="900" b="0" i="0">
+              <a:rPr sz="1030" b="0" i="0">
                 <a:solidFill>
                   <a:srgbClr val="FFFFFF"/>
                 </a:solidFill>
@@ -16874,7 +16874,7 @@
               </a:spcBef>
             </a:pPr>
             <a:r>
-              <a:rPr sz="680" b="0" i="0">
+              <a:rPr sz="780" b="0" i="0">
                 <a:solidFill>
                   <a:srgbClr val="7E7868"/>
                 </a:solidFill>
@@ -16958,7 +16958,7 @@
               </a:lnSpc>
             </a:pPr>
             <a:r>
-              <a:rPr sz="1050" b="0" i="0">
+              <a:rPr sz="1210" b="0" i="0">
                 <a:solidFill>
                   <a:srgbClr val="FFFFFF"/>
                 </a:solidFill>
@@ -16968,7 +16968,7 @@
               <a:t>審査があるから — </a:t>
             </a:r>
             <a:r>
-              <a:rPr sz="1050" b="1" i="0">
+              <a:rPr sz="1210" b="1" i="0">
                 <a:solidFill>
                   <a:srgbClr val="D8C08C"/>
                 </a:solidFill>
@@ -17070,7 +17070,7 @@
               </a:lnSpc>
             </a:pPr>
             <a:r>
-              <a:rPr sz="1050" b="0" i="1" spc="250">
+              <a:rPr sz="1210" b="0" i="1" spc="250">
                 <a:solidFill>
                   <a:srgbClr val="8A6A32"/>
                 </a:solidFill>
@@ -17135,7 +17135,7 @@
         <p:spPr>
           <a:xfrm>
             <a:off x="738000" y="1008000"/>
-            <a:ext cx="10713600" cy="576000"/>
+            <a:ext cx="10713600" cy="666000"/>
           </a:xfrm>
           <a:prstGeom prst="rect">
             <a:avLst/>
@@ -17154,17 +17154,17 @@
               </a:lnSpc>
             </a:pPr>
             <a:r>
-              <a:rPr sz="2900" b="1" i="0" spc="100">
+              <a:rPr sz="3329" b="1" i="0" spc="100">
                 <a:solidFill>
                   <a:srgbClr val="201C15"/>
                 </a:solidFill>
                 <a:latin typeface="Garamond"/>
                 <a:ea typeface="游明朝"/>
               </a:rPr>
-              <a:t>“送る仕事”を、減らす</a:t>
-            </a:r>
-            <a:r>
-              <a:rPr sz="2900" b="1" i="0" spc="100">
+              <a:t>“送る仕事”を、なくす</a:t>
+            </a:r>
+            <a:r>
+              <a:rPr sz="3329" b="1" i="0" spc="100">
                 <a:solidFill>
                   <a:srgbClr val="B8934E"/>
                 </a:solidFill>
@@ -17174,7 +17174,7 @@
               <a:t>構造</a:t>
             </a:r>
             <a:r>
-              <a:rPr sz="2900" b="1" i="0" spc="100">
+              <a:rPr sz="3329" b="1" i="0" spc="100">
                 <a:solidFill>
                   <a:srgbClr val="201C15"/>
                 </a:solidFill>
@@ -17194,7 +17194,7 @@
         </p:nvSpPr>
         <p:spPr>
           <a:xfrm>
-            <a:off x="738000" y="1602000"/>
+            <a:off x="738000" y="1692000"/>
             <a:ext cx="10713600" cy="324000"/>
           </a:xfrm>
           <a:prstGeom prst="rect">
@@ -17214,7 +17214,7 @@
               </a:lnSpc>
             </a:pPr>
             <a:r>
-              <a:rPr sz="1050" b="0" i="0" spc="100">
+              <a:rPr sz="1210" b="0" i="0" spc="100">
                 <a:solidFill>
                   <a:srgbClr val="8F8A7B"/>
                 </a:solidFill>
@@ -17298,7 +17298,7 @@
               </a:lnSpc>
             </a:pPr>
             <a:r>
-              <a:rPr sz="1500" b="0" i="1">
+              <a:rPr sz="1720" b="0" i="1">
                 <a:solidFill>
                   <a:srgbClr val="8A6A32"/>
                 </a:solidFill>
@@ -17338,14 +17338,14 @@
               </a:lnSpc>
             </a:pPr>
             <a:r>
-              <a:rPr sz="1200" b="1" i="0">
+              <a:rPr sz="1380" b="1" i="0">
                 <a:solidFill>
                   <a:srgbClr val="201C15"/>
                 </a:solidFill>
                 <a:latin typeface="Yu Gothic"/>
                 <a:ea typeface="游ゴシック"/>
               </a:rPr>
-              <a:t>大量送信が、前提でなくなる</a:t>
+              <a:t>送る工数が、ゼロになる</a:t>
             </a:r>
           </a:p>
         </p:txBody>
@@ -17378,14 +17378,14 @@
               </a:lnSpc>
             </a:pPr>
             <a:r>
-              <a:rPr sz="930" b="0" i="0">
+              <a:rPr sz="1070" b="0" i="0">
                 <a:solidFill>
                   <a:srgbClr val="201C15"/>
                 </a:solidFill>
                 <a:latin typeface="Yu Gothic"/>
                 <a:ea typeface="游ゴシック"/>
               </a:rPr>
-              <a:t>送り手が絞られた場では、埋もれ対策の“数打ち”が要らない。読まれる前提で、1通に時間を使えます。</a:t>
+              <a:t>指名は“待って受け取る”接点。スカウト送信や文面作成の工数そのものが発生しません。</a:t>
             </a:r>
           </a:p>
         </p:txBody>
@@ -17462,7 +17462,7 @@
               </a:lnSpc>
             </a:pPr>
             <a:r>
-              <a:rPr sz="1500" b="0" i="1">
+              <a:rPr sz="1720" b="0" i="1">
                 <a:solidFill>
                   <a:srgbClr val="8A6A32"/>
                 </a:solidFill>
@@ -17502,7 +17502,7 @@
               </a:lnSpc>
             </a:pPr>
             <a:r>
-              <a:rPr sz="1200" b="1" i="0">
+              <a:rPr sz="1380" b="1" i="0">
                 <a:solidFill>
                   <a:srgbClr val="201C15"/>
                 </a:solidFill>
@@ -17542,7 +17542,7 @@
               </a:lnSpc>
             </a:pPr>
             <a:r>
-              <a:rPr sz="930" b="0" i="0">
+              <a:rPr sz="1070" b="0" i="0">
                 <a:solidFill>
                   <a:srgbClr val="201C15"/>
                 </a:solidFill>
@@ -17626,7 +17626,7 @@
               </a:lnSpc>
             </a:pPr>
             <a:r>
-              <a:rPr sz="1500" b="0" i="1">
+              <a:rPr sz="1720" b="0" i="1">
                 <a:solidFill>
                   <a:srgbClr val="8A6A32"/>
                 </a:solidFill>
@@ -17666,7 +17666,7 @@
               </a:lnSpc>
             </a:pPr>
             <a:r>
-              <a:rPr sz="1200" b="1" i="0">
+              <a:rPr sz="1380" b="1" i="0">
                 <a:solidFill>
                   <a:srgbClr val="201C15"/>
                 </a:solidFill>
@@ -17706,7 +17706,7 @@
               </a:lnSpc>
             </a:pPr>
             <a:r>
-              <a:rPr sz="930" b="0" i="0">
+              <a:rPr sz="1070" b="0" i="0">
                 <a:solidFill>
                   <a:srgbClr val="201C15"/>
                 </a:solidFill>
@@ -17790,7 +17790,7 @@
               </a:lnSpc>
             </a:pPr>
             <a:r>
-              <a:rPr sz="1050" b="0" i="0">
+              <a:rPr sz="1210" b="0" i="0">
                 <a:solidFill>
                   <a:srgbClr val="FFFFFF"/>
                 </a:solidFill>
@@ -17800,7 +17800,7 @@
               <a:t>送信に使っていた時間を、面談と支援へ。</a:t>
             </a:r>
             <a:r>
-              <a:rPr sz="1050" b="1" i="0">
+              <a:rPr sz="1210" b="1" i="0">
                 <a:solidFill>
                   <a:srgbClr val="D8C08C"/>
                 </a:solidFill>
